--- a/Voyna_발표슬라이드.pptx
+++ b/Voyna_발표슬라이드.pptx
@@ -1,9 +1,1278 @@
 
-<file path=ppt/presentation.xml><?xml version="1.0" encoding="utf-8"?>
+<file path=docProps\app.xml><?xml version="1.0" encoding="utf-8"?>
+<Properties xmlns="http://schemas.openxmlformats.org/officeDocument/2006/extended-properties" xmlns:vt="http://schemas.openxmlformats.org/officeDocument/2006/docPropsVTypes">
+  <TotalTime>8</TotalTime>
+  <Words>720</Words>
+  <Application>Microsoft Office PowerPoint</Application>
+  <PresentationFormat>사용자 지정</PresentationFormat>
+  <Paragraphs>207</Paragraphs>
+  <Slides>10</Slides>
+  <Notes>10</Notes>
+  <HiddenSlides>0</HiddenSlides>
+  <MMClips>0</MMClips>
+  <ScaleCrop>false</ScaleCrop>
+  <HeadingPairs>
+    <vt:vector size="4" baseType="variant">
+      <vt:variant>
+        <vt:lpstr>테마</vt:lpstr>
+      </vt:variant>
+      <vt:variant>
+        <vt:i4>1</vt:i4>
+      </vt:variant>
+      <vt:variant>
+        <vt:lpstr>슬라이드 제목</vt:lpstr>
+      </vt:variant>
+      <vt:variant>
+        <vt:i4>10</vt:i4>
+      </vt:variant>
+    </vt:vector>
+  </HeadingPairs>
+  <TitlesOfParts>
+    <vt:vector size="11" baseType="lpstr">
+      <vt:lpstr>Office Theme</vt:lpstr>
+      <vt:lpstr>PowerPoint 프레젠테이션</vt:lpstr>
+      <vt:lpstr>PowerPoint 프레젠테이션</vt:lpstr>
+      <vt:lpstr>PowerPoint 프레젠테이션</vt:lpstr>
+      <vt:lpstr>PowerPoint 프레젠테이션</vt:lpstr>
+      <vt:lpstr>PowerPoint 프레젠테이션</vt:lpstr>
+      <vt:lpstr>PowerPoint 프레젠테이션</vt:lpstr>
+      <vt:lpstr>PowerPoint 프레젠테이션</vt:lpstr>
+      <vt:lpstr>PowerPoint 프레젠테이션</vt:lpstr>
+      <vt:lpstr>PowerPoint 프레젠테이션</vt:lpstr>
+      <vt:lpstr>PowerPoint 프레젠테이션</vt:lpstr>
+    </vt:vector>
+  </TitlesOfParts>
+  <Company>ASSIST Graduate School (벤처 스타트업 과제)</Company>
+  <LinksUpToDate>false</LinksUpToDate>
+  <SharedDoc>false</SharedDoc>
+  <HyperlinksChanged>false</HyperlinksChanged>
+  <AppVersion>14.0000</AppVersion>
+</Properties>
+</file>
+
+<file path=docProps\core.xml><?xml version="1.0" encoding="utf-8"?>
+<cp:coreProperties xmlns:cp="http://schemas.openxmlformats.org/package/2006/metadata/core-properties" xmlns:dc="http://purl.org/dc/elements/1.1/" xmlns:dcterms="http://purl.org/dc/terms/" xmlns:dcmitype="http://purl.org/dc/dcmitype/" xmlns:xsi="http://www.w3.org/2001/XMLSchema-instance">
+  <dc:title>Voyna — GPS 기반 여행 인증 배지 앱</dc:title>
+  <dc:subject>Voyna 사업 발표</dc:subject>
+  <dc:creator>AlexSong0674</dc:creator>
+  <cp:lastModifiedBy>Windows User</cp:lastModifiedBy>
+  <cp:revision>2</cp:revision>
+  <dcterms:created xsi:type="dcterms:W3CDTF">2026-05-15T02:27:40Z</dcterms:created>
+  <dcterms:modified xsi:type="dcterms:W3CDTF">2026-05-15T05:31:43Z</dcterms:modified>
+</cp:coreProperties>
+</file>
+
+<file path=ppt\notesMasters\notesMaster1.xml><?xml version="1.0" encoding="utf-8"?>
+<p:notesMaster xmlns:a="http://schemas.openxmlformats.org/drawingml/2006/main" xmlns:r="http://schemas.openxmlformats.org/officeDocument/2006/relationships" xmlns:p="http://schemas.openxmlformats.org/presentationml/2006/main">
+  <p:cSld>
+    <p:bg>
+      <p:bgRef idx="1001">
+        <a:schemeClr val="bg1"/>
+      </p:bgRef>
+    </p:bg>
+    <p:spTree>
+      <p:nvGrpSpPr>
+        <p:cNvPr id="1" name=""/>
+        <p:cNvGrpSpPr/>
+        <p:nvPr/>
+      </p:nvGrpSpPr>
+      <p:grpSpPr>
+        <a:xfrm>
+          <a:off x="0" y="0"/>
+          <a:ext cx="0" cy="0"/>
+          <a:chOff x="0" y="0"/>
+          <a:chExt cx="0" cy="0"/>
+        </a:xfrm>
+      </p:grpSpPr>
+      <p:sp>
+        <p:nvSpPr>
+          <p:cNvPr id="2" name="머리글 개체 틀 1"/>
+          <p:cNvSpPr>
+            <a:spLocks noGrp="1"/>
+          </p:cNvSpPr>
+          <p:nvPr>
+            <p:ph type="hdr" sz="quarter"/>
+          </p:nvPr>
+        </p:nvSpPr>
+        <p:spPr>
+          <a:xfrm>
+            <a:off x="0" y="0"/>
+            <a:ext cx="2971800" cy="609600"/>
+          </a:xfrm>
+          <a:prstGeom prst="rect">
+            <a:avLst/>
+          </a:prstGeom>
+        </p:spPr>
+        <p:txBody>
+          <a:bodyPr vert="horz" lIns="91440" tIns="45720" rIns="91440" bIns="45720" rtlCol="0"/>
+          <a:lstStyle>
+            <a:lvl1pPr algn="l">
+              <a:defRPr sz="1200"/>
+            </a:lvl1pPr>
+          </a:lstStyle>
+          <a:p>
+            <a:endParaRPr lang="ko-KR" altLang="en-US"/>
+          </a:p>
+        </p:txBody>
+      </p:sp>
+      <p:sp>
+        <p:nvSpPr>
+          <p:cNvPr id="3" name="날짜 개체 틀 2"/>
+          <p:cNvSpPr>
+            <a:spLocks noGrp="1"/>
+          </p:cNvSpPr>
+          <p:nvPr>
+            <p:ph type="dt" idx="1"/>
+          </p:nvPr>
+        </p:nvSpPr>
+        <p:spPr>
+          <a:xfrm>
+            <a:off x="3884613" y="0"/>
+            <a:ext cx="2971800" cy="609600"/>
+          </a:xfrm>
+          <a:prstGeom prst="rect">
+            <a:avLst/>
+          </a:prstGeom>
+        </p:spPr>
+        <p:txBody>
+          <a:bodyPr vert="horz" lIns="91440" tIns="45720" rIns="91440" bIns="45720" rtlCol="0"/>
+          <a:lstStyle>
+            <a:lvl1pPr algn="r">
+              <a:defRPr sz="1200"/>
+            </a:lvl1pPr>
+          </a:lstStyle>
+          <a:p>
+            <a:fld id="{402ABF2C-BB13-4314-88D1-97E874B35935}" type="datetimeFigureOut">
+              <a:rPr lang="ko-KR" altLang="en-US" smtClean="0"/>
+              <a:t>2026-05-15</a:t>
+            </a:fld>
+            <a:endParaRPr lang="ko-KR" altLang="en-US"/>
+          </a:p>
+        </p:txBody>
+      </p:sp>
+      <p:sp>
+        <p:nvSpPr>
+          <p:cNvPr id="4" name="슬라이드 이미지 개체 틀 3"/>
+          <p:cNvSpPr>
+            <a:spLocks noGrp="1" noRot="1" noChangeAspect="1"/>
+          </p:cNvSpPr>
+          <p:nvPr>
+            <p:ph type="sldImg" idx="2"/>
+          </p:nvPr>
+        </p:nvSpPr>
+        <p:spPr>
+          <a:xfrm>
+            <a:off x="-635000" y="914400"/>
+            <a:ext cx="8128000" cy="4572000"/>
+          </a:xfrm>
+          <a:prstGeom prst="rect">
+            <a:avLst/>
+          </a:prstGeom>
+          <a:noFill/>
+          <a:ln w="12700">
+            <a:solidFill>
+              <a:prstClr val="black"/>
+            </a:solidFill>
+          </a:ln>
+        </p:spPr>
+        <p:txBody>
+          <a:bodyPr vert="horz" lIns="91440" tIns="45720" rIns="91440" bIns="45720" rtlCol="0" anchor="ctr"/>
+          <a:lstStyle/>
+          <a:p>
+            <a:endParaRPr lang="ko-KR" altLang="en-US"/>
+          </a:p>
+        </p:txBody>
+      </p:sp>
+      <p:sp>
+        <p:nvSpPr>
+          <p:cNvPr id="5" name="슬라이드 노트 개체 틀 4"/>
+          <p:cNvSpPr>
+            <a:spLocks noGrp="1"/>
+          </p:cNvSpPr>
+          <p:nvPr>
+            <p:ph type="body" sz="quarter" idx="3"/>
+          </p:nvPr>
+        </p:nvSpPr>
+        <p:spPr>
+          <a:xfrm>
+            <a:off x="685800" y="5791200"/>
+            <a:ext cx="5486400" cy="5486400"/>
+          </a:xfrm>
+          <a:prstGeom prst="rect">
+            <a:avLst/>
+          </a:prstGeom>
+        </p:spPr>
+        <p:txBody>
+          <a:bodyPr vert="horz" lIns="91440" tIns="45720" rIns="91440" bIns="45720" rtlCol="0"/>
+          <a:lstStyle/>
+          <a:p>
+            <a:pPr lvl="0"/>
+            <a:r>
+              <a:rPr lang="ko-KR" altLang="en-US" smtClean="0"/>
+              <a:t>마스터 텍스트 스타일을 편집합니다</a:t>
+            </a:r>
+          </a:p>
+          <a:p>
+            <a:pPr lvl="1"/>
+            <a:r>
+              <a:rPr lang="ko-KR" altLang="en-US" smtClean="0"/>
+              <a:t>둘째 수준</a:t>
+            </a:r>
+          </a:p>
+          <a:p>
+            <a:pPr lvl="2"/>
+            <a:r>
+              <a:rPr lang="ko-KR" altLang="en-US" smtClean="0"/>
+              <a:t>셋째 수준</a:t>
+            </a:r>
+          </a:p>
+          <a:p>
+            <a:pPr lvl="3"/>
+            <a:r>
+              <a:rPr lang="ko-KR" altLang="en-US" smtClean="0"/>
+              <a:t>넷째 수준</a:t>
+            </a:r>
+          </a:p>
+          <a:p>
+            <a:pPr lvl="4"/>
+            <a:r>
+              <a:rPr lang="ko-KR" altLang="en-US" smtClean="0"/>
+              <a:t>다섯째 수준</a:t>
+            </a:r>
+            <a:endParaRPr lang="ko-KR" altLang="en-US"/>
+          </a:p>
+        </p:txBody>
+      </p:sp>
+      <p:sp>
+        <p:nvSpPr>
+          <p:cNvPr id="6" name="바닥글 개체 틀 5"/>
+          <p:cNvSpPr>
+            <a:spLocks noGrp="1"/>
+          </p:cNvSpPr>
+          <p:nvPr>
+            <p:ph type="ftr" sz="quarter" idx="4"/>
+          </p:nvPr>
+        </p:nvSpPr>
+        <p:spPr>
+          <a:xfrm>
+            <a:off x="0" y="11580813"/>
+            <a:ext cx="2971800" cy="609600"/>
+          </a:xfrm>
+          <a:prstGeom prst="rect">
+            <a:avLst/>
+          </a:prstGeom>
+        </p:spPr>
+        <p:txBody>
+          <a:bodyPr vert="horz" lIns="91440" tIns="45720" rIns="91440" bIns="45720" rtlCol="0" anchor="b"/>
+          <a:lstStyle>
+            <a:lvl1pPr algn="l">
+              <a:defRPr sz="1200"/>
+            </a:lvl1pPr>
+          </a:lstStyle>
+          <a:p>
+            <a:endParaRPr lang="ko-KR" altLang="en-US"/>
+          </a:p>
+        </p:txBody>
+      </p:sp>
+      <p:sp>
+        <p:nvSpPr>
+          <p:cNvPr id="7" name="슬라이드 번호 개체 틀 6"/>
+          <p:cNvSpPr>
+            <a:spLocks noGrp="1"/>
+          </p:cNvSpPr>
+          <p:nvPr>
+            <p:ph type="sldNum" sz="quarter" idx="5"/>
+          </p:nvPr>
+        </p:nvSpPr>
+        <p:spPr>
+          <a:xfrm>
+            <a:off x="3884613" y="11580813"/>
+            <a:ext cx="2971800" cy="609600"/>
+          </a:xfrm>
+          <a:prstGeom prst="rect">
+            <a:avLst/>
+          </a:prstGeom>
+        </p:spPr>
+        <p:txBody>
+          <a:bodyPr vert="horz" lIns="91440" tIns="45720" rIns="91440" bIns="45720" rtlCol="0" anchor="b"/>
+          <a:lstStyle>
+            <a:lvl1pPr algn="r">
+              <a:defRPr sz="1200"/>
+            </a:lvl1pPr>
+          </a:lstStyle>
+          <a:p>
+            <a:fld id="{E6763C54-798F-4D6C-AB14-CA34E50E2214}" type="slidenum">
+              <a:rPr lang="ko-KR" altLang="en-US" smtClean="0"/>
+              <a:t>‹#›</a:t>
+            </a:fld>
+            <a:endParaRPr lang="ko-KR" altLang="en-US"/>
+          </a:p>
+        </p:txBody>
+      </p:sp>
+    </p:spTree>
+    <p:extLst>
+      <p:ext uri="{BB962C8B-B14F-4D97-AF65-F5344CB8AC3E}">
+        <p14:creationId xmlns:p14="http://schemas.microsoft.com/office/powerpoint/2010/main" val="3396079634"/>
+      </p:ext>
+    </p:extLst>
+  </p:cSld>
+  <p:clrMap bg1="lt1" tx1="dk1" bg2="lt2" tx2="dk2" accent1="accent1" accent2="accent2" accent3="accent3" accent4="accent4" accent5="accent5" accent6="accent6" hlink="hlink" folHlink="folHlink"/>
+  <p:notesStyle>
+    <a:lvl1pPr marL="0" algn="l" defTabSz="914400" rtl="0" eaLnBrk="1" latinLnBrk="1" hangingPunct="1">
+      <a:defRPr sz="1200" kern="1200">
+        <a:solidFill>
+          <a:schemeClr val="tx1"/>
+        </a:solidFill>
+        <a:latin typeface="+mn-lt"/>
+        <a:ea typeface="+mn-ea"/>
+        <a:cs typeface="+mn-cs"/>
+      </a:defRPr>
+    </a:lvl1pPr>
+    <a:lvl2pPr marL="457200" algn="l" defTabSz="914400" rtl="0" eaLnBrk="1" latinLnBrk="1" hangingPunct="1">
+      <a:defRPr sz="1200" kern="1200">
+        <a:solidFill>
+          <a:schemeClr val="tx1"/>
+        </a:solidFill>
+        <a:latin typeface="+mn-lt"/>
+        <a:ea typeface="+mn-ea"/>
+        <a:cs typeface="+mn-cs"/>
+      </a:defRPr>
+    </a:lvl2pPr>
+    <a:lvl3pPr marL="914400" algn="l" defTabSz="914400" rtl="0" eaLnBrk="1" latinLnBrk="1" hangingPunct="1">
+      <a:defRPr sz="1200" kern="1200">
+        <a:solidFill>
+          <a:schemeClr val="tx1"/>
+        </a:solidFill>
+        <a:latin typeface="+mn-lt"/>
+        <a:ea typeface="+mn-ea"/>
+        <a:cs typeface="+mn-cs"/>
+      </a:defRPr>
+    </a:lvl3pPr>
+    <a:lvl4pPr marL="1371600" algn="l" defTabSz="914400" rtl="0" eaLnBrk="1" latinLnBrk="1" hangingPunct="1">
+      <a:defRPr sz="1200" kern="1200">
+        <a:solidFill>
+          <a:schemeClr val="tx1"/>
+        </a:solidFill>
+        <a:latin typeface="+mn-lt"/>
+        <a:ea typeface="+mn-ea"/>
+        <a:cs typeface="+mn-cs"/>
+      </a:defRPr>
+    </a:lvl4pPr>
+    <a:lvl5pPr marL="1828800" algn="l" defTabSz="914400" rtl="0" eaLnBrk="1" latinLnBrk="1" hangingPunct="1">
+      <a:defRPr sz="1200" kern="1200">
+        <a:solidFill>
+          <a:schemeClr val="tx1"/>
+        </a:solidFill>
+        <a:latin typeface="+mn-lt"/>
+        <a:ea typeface="+mn-ea"/>
+        <a:cs typeface="+mn-cs"/>
+      </a:defRPr>
+    </a:lvl5pPr>
+    <a:lvl6pPr marL="2286000" algn="l" defTabSz="914400" rtl="0" eaLnBrk="1" latinLnBrk="1" hangingPunct="1">
+      <a:defRPr sz="1200" kern="1200">
+        <a:solidFill>
+          <a:schemeClr val="tx1"/>
+        </a:solidFill>
+        <a:latin typeface="+mn-lt"/>
+        <a:ea typeface="+mn-ea"/>
+        <a:cs typeface="+mn-cs"/>
+      </a:defRPr>
+    </a:lvl6pPr>
+    <a:lvl7pPr marL="2743200" algn="l" defTabSz="914400" rtl="0" eaLnBrk="1" latinLnBrk="1" hangingPunct="1">
+      <a:defRPr sz="1200" kern="1200">
+        <a:solidFill>
+          <a:schemeClr val="tx1"/>
+        </a:solidFill>
+        <a:latin typeface="+mn-lt"/>
+        <a:ea typeface="+mn-ea"/>
+        <a:cs typeface="+mn-cs"/>
+      </a:defRPr>
+    </a:lvl7pPr>
+    <a:lvl8pPr marL="3200400" algn="l" defTabSz="914400" rtl="0" eaLnBrk="1" latinLnBrk="1" hangingPunct="1">
+      <a:defRPr sz="1200" kern="1200">
+        <a:solidFill>
+          <a:schemeClr val="tx1"/>
+        </a:solidFill>
+        <a:latin typeface="+mn-lt"/>
+        <a:ea typeface="+mn-ea"/>
+        <a:cs typeface="+mn-cs"/>
+      </a:defRPr>
+    </a:lvl8pPr>
+    <a:lvl9pPr marL="3657600" algn="l" defTabSz="914400" rtl="0" eaLnBrk="1" latinLnBrk="1" hangingPunct="1">
+      <a:defRPr sz="1200" kern="1200">
+        <a:solidFill>
+          <a:schemeClr val="tx1"/>
+        </a:solidFill>
+        <a:latin typeface="+mn-lt"/>
+        <a:ea typeface="+mn-ea"/>
+        <a:cs typeface="+mn-cs"/>
+      </a:defRPr>
+    </a:lvl9pPr>
+  </p:notesStyle>
+</p:notesMaster>
+</file>
+
+<file path=ppt\notesSlides\notesSlide1.xml><?xml version="1.0" encoding="utf-8"?>
+<p:notes xmlns:a="http://schemas.openxmlformats.org/drawingml/2006/main" xmlns:r="http://schemas.openxmlformats.org/officeDocument/2006/relationships" xmlns:p="http://schemas.openxmlformats.org/presentationml/2006/main">
+  <p:cSld>
+    <p:spTree>
+      <p:nvGrpSpPr>
+        <p:cNvPr id="1" name=""/>
+        <p:cNvGrpSpPr/>
+        <p:nvPr/>
+      </p:nvGrpSpPr>
+      <p:grpSpPr>
+        <a:xfrm>
+          <a:off x="0" y="0"/>
+          <a:ext cx="0" cy="0"/>
+          <a:chOff x="0" y="0"/>
+          <a:chExt cx="0" cy="0"/>
+        </a:xfrm>
+      </p:grpSpPr>
+      <p:sp>
+        <p:nvSpPr>
+          <p:cNvPr id="2" name="Slide Image Placeholder 1"/>
+          <p:cNvSpPr>
+            <a:spLocks noGrp="1" noRot="1" noChangeAspect="1"/>
+          </p:cNvSpPr>
+          <p:nvPr>
+            <p:ph type="sldImg"/>
+          </p:nvPr>
+        </p:nvSpPr>
+        <p:spPr/>
+      </p:sp>
+      <p:sp>
+        <p:nvSpPr>
+          <p:cNvPr id="3" name="Notes Placeholder 2"/>
+          <p:cNvSpPr>
+            <a:spLocks noGrp="1"/>
+          </p:cNvSpPr>
+          <p:nvPr>
+            <p:ph type="body" idx="1"/>
+          </p:nvPr>
+        </p:nvSpPr>
+        <p:spPr/>
+        <p:txBody>
+          <a:bodyPr/>
+          <a:lstStyle/>
+          <a:p>
+            <a:endParaRPr lang="en-US" dirty="0"/>
+          </a:p>
+        </p:txBody>
+      </p:sp>
+      <p:sp>
+        <p:nvSpPr>
+          <p:cNvPr id="4" name="Slide Number Placeholder 3"/>
+          <p:cNvSpPr>
+            <a:spLocks noGrp="1"/>
+          </p:cNvSpPr>
+          <p:nvPr>
+            <p:ph type="sldNum" sz="quarter" idx="10"/>
+          </p:nvPr>
+        </p:nvSpPr>
+        <p:spPr/>
+        <p:txBody>
+          <a:bodyPr/>
+          <a:lstStyle/>
+          <a:p>
+            <a:fld id="{F7021451-1387-4CA6-816F-3879F97B5CBC}" type="slidenum">
+              <a:rPr lang="en-US"/>
+              <a:t>1</a:t>
+            </a:fld>
+            <a:endParaRPr lang="en-US"/>
+          </a:p>
+        </p:txBody>
+      </p:sp>
+    </p:spTree>
+    <p:extLst>
+      <p:ext uri="{BB962C8B-B14F-4D97-AF65-F5344CB8AC3E}">
+        <p14:creationId xmlns:p14="http://schemas.microsoft.com/office/powerpoint/2010/main" val="1024086991"/>
+      </p:ext>
+    </p:extLst>
+  </p:cSld>
+  <p:clrMapOvr>
+    <a:masterClrMapping/>
+  </p:clrMapOvr>
+</p:notes>
+</file>
+
+<file path=ppt\notesSlides\notesSlide10.xml><?xml version="1.0" encoding="utf-8"?>
+<p:notes xmlns:a="http://schemas.openxmlformats.org/drawingml/2006/main" xmlns:r="http://schemas.openxmlformats.org/officeDocument/2006/relationships" xmlns:p="http://schemas.openxmlformats.org/presentationml/2006/main">
+  <p:cSld>
+    <p:spTree>
+      <p:nvGrpSpPr>
+        <p:cNvPr id="1" name=""/>
+        <p:cNvGrpSpPr/>
+        <p:nvPr/>
+      </p:nvGrpSpPr>
+      <p:grpSpPr>
+        <a:xfrm>
+          <a:off x="0" y="0"/>
+          <a:ext cx="0" cy="0"/>
+          <a:chOff x="0" y="0"/>
+          <a:chExt cx="0" cy="0"/>
+        </a:xfrm>
+      </p:grpSpPr>
+      <p:sp>
+        <p:nvSpPr>
+          <p:cNvPr id="2" name="Slide Image Placeholder 1"/>
+          <p:cNvSpPr>
+            <a:spLocks noGrp="1" noRot="1" noChangeAspect="1"/>
+          </p:cNvSpPr>
+          <p:nvPr>
+            <p:ph type="sldImg"/>
+          </p:nvPr>
+        </p:nvSpPr>
+        <p:spPr/>
+      </p:sp>
+      <p:sp>
+        <p:nvSpPr>
+          <p:cNvPr id="3" name="Notes Placeholder 2"/>
+          <p:cNvSpPr>
+            <a:spLocks noGrp="1"/>
+          </p:cNvSpPr>
+          <p:nvPr>
+            <p:ph type="body" idx="1"/>
+          </p:nvPr>
+        </p:nvSpPr>
+        <p:spPr/>
+        <p:txBody>
+          <a:bodyPr/>
+          <a:lstStyle/>
+          <a:p>
+            <a:endParaRPr lang="en-US" dirty="0"/>
+          </a:p>
+        </p:txBody>
+      </p:sp>
+      <p:sp>
+        <p:nvSpPr>
+          <p:cNvPr id="4" name="Slide Number Placeholder 3"/>
+          <p:cNvSpPr>
+            <a:spLocks noGrp="1"/>
+          </p:cNvSpPr>
+          <p:nvPr>
+            <p:ph type="sldNum" sz="quarter" idx="10"/>
+          </p:nvPr>
+        </p:nvSpPr>
+        <p:spPr/>
+        <p:txBody>
+          <a:bodyPr/>
+          <a:lstStyle/>
+          <a:p>
+            <a:fld id="{F7021451-1387-4CA6-816F-3879F97B5CBC}" type="slidenum">
+              <a:rPr lang="en-US"/>
+              <a:t>10</a:t>
+            </a:fld>
+            <a:endParaRPr lang="en-US"/>
+          </a:p>
+        </p:txBody>
+      </p:sp>
+    </p:spTree>
+    <p:extLst>
+      <p:ext uri="{BB962C8B-B14F-4D97-AF65-F5344CB8AC3E}">
+        <p14:creationId xmlns:p14="http://schemas.microsoft.com/office/powerpoint/2010/main" val="1024086991"/>
+      </p:ext>
+    </p:extLst>
+  </p:cSld>
+  <p:clrMapOvr>
+    <a:masterClrMapping/>
+  </p:clrMapOvr>
+</p:notes>
+</file>
+
+<file path=ppt\notesSlides\notesSlide2.xml><?xml version="1.0" encoding="utf-8"?>
+<p:notes xmlns:a="http://schemas.openxmlformats.org/drawingml/2006/main" xmlns:r="http://schemas.openxmlformats.org/officeDocument/2006/relationships" xmlns:p="http://schemas.openxmlformats.org/presentationml/2006/main">
+  <p:cSld>
+    <p:spTree>
+      <p:nvGrpSpPr>
+        <p:cNvPr id="1" name=""/>
+        <p:cNvGrpSpPr/>
+        <p:nvPr/>
+      </p:nvGrpSpPr>
+      <p:grpSpPr>
+        <a:xfrm>
+          <a:off x="0" y="0"/>
+          <a:ext cx="0" cy="0"/>
+          <a:chOff x="0" y="0"/>
+          <a:chExt cx="0" cy="0"/>
+        </a:xfrm>
+      </p:grpSpPr>
+      <p:sp>
+        <p:nvSpPr>
+          <p:cNvPr id="2" name="Slide Image Placeholder 1"/>
+          <p:cNvSpPr>
+            <a:spLocks noGrp="1" noRot="1" noChangeAspect="1"/>
+          </p:cNvSpPr>
+          <p:nvPr>
+            <p:ph type="sldImg"/>
+          </p:nvPr>
+        </p:nvSpPr>
+        <p:spPr/>
+      </p:sp>
+      <p:sp>
+        <p:nvSpPr>
+          <p:cNvPr id="3" name="Notes Placeholder 2"/>
+          <p:cNvSpPr>
+            <a:spLocks noGrp="1"/>
+          </p:cNvSpPr>
+          <p:nvPr>
+            <p:ph type="body" idx="1"/>
+          </p:nvPr>
+        </p:nvSpPr>
+        <p:spPr/>
+        <p:txBody>
+          <a:bodyPr/>
+          <a:lstStyle/>
+          <a:p>
+            <a:endParaRPr lang="en-US" dirty="0"/>
+          </a:p>
+        </p:txBody>
+      </p:sp>
+      <p:sp>
+        <p:nvSpPr>
+          <p:cNvPr id="4" name="Slide Number Placeholder 3"/>
+          <p:cNvSpPr>
+            <a:spLocks noGrp="1"/>
+          </p:cNvSpPr>
+          <p:nvPr>
+            <p:ph type="sldNum" sz="quarter" idx="10"/>
+          </p:nvPr>
+        </p:nvSpPr>
+        <p:spPr/>
+        <p:txBody>
+          <a:bodyPr/>
+          <a:lstStyle/>
+          <a:p>
+            <a:fld id="{F7021451-1387-4CA6-816F-3879F97B5CBC}" type="slidenum">
+              <a:rPr lang="en-US"/>
+              <a:t>2</a:t>
+            </a:fld>
+            <a:endParaRPr lang="en-US"/>
+          </a:p>
+        </p:txBody>
+      </p:sp>
+    </p:spTree>
+    <p:extLst>
+      <p:ext uri="{BB962C8B-B14F-4D97-AF65-F5344CB8AC3E}">
+        <p14:creationId xmlns:p14="http://schemas.microsoft.com/office/powerpoint/2010/main" val="1024086991"/>
+      </p:ext>
+    </p:extLst>
+  </p:cSld>
+  <p:clrMapOvr>
+    <a:masterClrMapping/>
+  </p:clrMapOvr>
+</p:notes>
+</file>
+
+<file path=ppt\notesSlides\notesSlide3.xml><?xml version="1.0" encoding="utf-8"?>
+<p:notes xmlns:a="http://schemas.openxmlformats.org/drawingml/2006/main" xmlns:r="http://schemas.openxmlformats.org/officeDocument/2006/relationships" xmlns:p="http://schemas.openxmlformats.org/presentationml/2006/main">
+  <p:cSld>
+    <p:spTree>
+      <p:nvGrpSpPr>
+        <p:cNvPr id="1" name=""/>
+        <p:cNvGrpSpPr/>
+        <p:nvPr/>
+      </p:nvGrpSpPr>
+      <p:grpSpPr>
+        <a:xfrm>
+          <a:off x="0" y="0"/>
+          <a:ext cx="0" cy="0"/>
+          <a:chOff x="0" y="0"/>
+          <a:chExt cx="0" cy="0"/>
+        </a:xfrm>
+      </p:grpSpPr>
+      <p:sp>
+        <p:nvSpPr>
+          <p:cNvPr id="2" name="Slide Image Placeholder 1"/>
+          <p:cNvSpPr>
+            <a:spLocks noGrp="1" noRot="1" noChangeAspect="1"/>
+          </p:cNvSpPr>
+          <p:nvPr>
+            <p:ph type="sldImg"/>
+          </p:nvPr>
+        </p:nvSpPr>
+        <p:spPr/>
+      </p:sp>
+      <p:sp>
+        <p:nvSpPr>
+          <p:cNvPr id="3" name="Notes Placeholder 2"/>
+          <p:cNvSpPr>
+            <a:spLocks noGrp="1"/>
+          </p:cNvSpPr>
+          <p:nvPr>
+            <p:ph type="body" idx="1"/>
+          </p:nvPr>
+        </p:nvSpPr>
+        <p:spPr/>
+        <p:txBody>
+          <a:bodyPr/>
+          <a:lstStyle/>
+          <a:p>
+            <a:endParaRPr lang="en-US" dirty="0"/>
+          </a:p>
+        </p:txBody>
+      </p:sp>
+      <p:sp>
+        <p:nvSpPr>
+          <p:cNvPr id="4" name="Slide Number Placeholder 3"/>
+          <p:cNvSpPr>
+            <a:spLocks noGrp="1"/>
+          </p:cNvSpPr>
+          <p:nvPr>
+            <p:ph type="sldNum" sz="quarter" idx="10"/>
+          </p:nvPr>
+        </p:nvSpPr>
+        <p:spPr/>
+        <p:txBody>
+          <a:bodyPr/>
+          <a:lstStyle/>
+          <a:p>
+            <a:fld id="{F7021451-1387-4CA6-816F-3879F97B5CBC}" type="slidenum">
+              <a:rPr lang="en-US"/>
+              <a:t>3</a:t>
+            </a:fld>
+            <a:endParaRPr lang="en-US"/>
+          </a:p>
+        </p:txBody>
+      </p:sp>
+    </p:spTree>
+    <p:extLst>
+      <p:ext uri="{BB962C8B-B14F-4D97-AF65-F5344CB8AC3E}">
+        <p14:creationId xmlns:p14="http://schemas.microsoft.com/office/powerpoint/2010/main" val="1024086991"/>
+      </p:ext>
+    </p:extLst>
+  </p:cSld>
+  <p:clrMapOvr>
+    <a:masterClrMapping/>
+  </p:clrMapOvr>
+</p:notes>
+</file>
+
+<file path=ppt\notesSlides\notesSlide4.xml><?xml version="1.0" encoding="utf-8"?>
+<p:notes xmlns:a="http://schemas.openxmlformats.org/drawingml/2006/main" xmlns:r="http://schemas.openxmlformats.org/officeDocument/2006/relationships" xmlns:p="http://schemas.openxmlformats.org/presentationml/2006/main">
+  <p:cSld>
+    <p:spTree>
+      <p:nvGrpSpPr>
+        <p:cNvPr id="1" name=""/>
+        <p:cNvGrpSpPr/>
+        <p:nvPr/>
+      </p:nvGrpSpPr>
+      <p:grpSpPr>
+        <a:xfrm>
+          <a:off x="0" y="0"/>
+          <a:ext cx="0" cy="0"/>
+          <a:chOff x="0" y="0"/>
+          <a:chExt cx="0" cy="0"/>
+        </a:xfrm>
+      </p:grpSpPr>
+      <p:sp>
+        <p:nvSpPr>
+          <p:cNvPr id="2" name="Slide Image Placeholder 1"/>
+          <p:cNvSpPr>
+            <a:spLocks noGrp="1" noRot="1" noChangeAspect="1"/>
+          </p:cNvSpPr>
+          <p:nvPr>
+            <p:ph type="sldImg"/>
+          </p:nvPr>
+        </p:nvSpPr>
+        <p:spPr/>
+      </p:sp>
+      <p:sp>
+        <p:nvSpPr>
+          <p:cNvPr id="3" name="Notes Placeholder 2"/>
+          <p:cNvSpPr>
+            <a:spLocks noGrp="1"/>
+          </p:cNvSpPr>
+          <p:nvPr>
+            <p:ph type="body" idx="1"/>
+          </p:nvPr>
+        </p:nvSpPr>
+        <p:spPr/>
+        <p:txBody>
+          <a:bodyPr/>
+          <a:lstStyle/>
+          <a:p>
+            <a:endParaRPr lang="en-US" dirty="0"/>
+          </a:p>
+        </p:txBody>
+      </p:sp>
+      <p:sp>
+        <p:nvSpPr>
+          <p:cNvPr id="4" name="Slide Number Placeholder 3"/>
+          <p:cNvSpPr>
+            <a:spLocks noGrp="1"/>
+          </p:cNvSpPr>
+          <p:nvPr>
+            <p:ph type="sldNum" sz="quarter" idx="10"/>
+          </p:nvPr>
+        </p:nvSpPr>
+        <p:spPr/>
+        <p:txBody>
+          <a:bodyPr/>
+          <a:lstStyle/>
+          <a:p>
+            <a:fld id="{F7021451-1387-4CA6-816F-3879F97B5CBC}" type="slidenum">
+              <a:rPr lang="en-US"/>
+              <a:t>4</a:t>
+            </a:fld>
+            <a:endParaRPr lang="en-US"/>
+          </a:p>
+        </p:txBody>
+      </p:sp>
+    </p:spTree>
+    <p:extLst>
+      <p:ext uri="{BB962C8B-B14F-4D97-AF65-F5344CB8AC3E}">
+        <p14:creationId xmlns:p14="http://schemas.microsoft.com/office/powerpoint/2010/main" val="1024086991"/>
+      </p:ext>
+    </p:extLst>
+  </p:cSld>
+  <p:clrMapOvr>
+    <a:masterClrMapping/>
+  </p:clrMapOvr>
+</p:notes>
+</file>
+
+<file path=ppt\notesSlides\notesSlide5.xml><?xml version="1.0" encoding="utf-8"?>
+<p:notes xmlns:a="http://schemas.openxmlformats.org/drawingml/2006/main" xmlns:r="http://schemas.openxmlformats.org/officeDocument/2006/relationships" xmlns:p="http://schemas.openxmlformats.org/presentationml/2006/main">
+  <p:cSld>
+    <p:spTree>
+      <p:nvGrpSpPr>
+        <p:cNvPr id="1" name=""/>
+        <p:cNvGrpSpPr/>
+        <p:nvPr/>
+      </p:nvGrpSpPr>
+      <p:grpSpPr>
+        <a:xfrm>
+          <a:off x="0" y="0"/>
+          <a:ext cx="0" cy="0"/>
+          <a:chOff x="0" y="0"/>
+          <a:chExt cx="0" cy="0"/>
+        </a:xfrm>
+      </p:grpSpPr>
+      <p:sp>
+        <p:nvSpPr>
+          <p:cNvPr id="2" name="Slide Image Placeholder 1"/>
+          <p:cNvSpPr>
+            <a:spLocks noGrp="1" noRot="1" noChangeAspect="1"/>
+          </p:cNvSpPr>
+          <p:nvPr>
+            <p:ph type="sldImg"/>
+          </p:nvPr>
+        </p:nvSpPr>
+        <p:spPr/>
+      </p:sp>
+      <p:sp>
+        <p:nvSpPr>
+          <p:cNvPr id="3" name="Notes Placeholder 2"/>
+          <p:cNvSpPr>
+            <a:spLocks noGrp="1"/>
+          </p:cNvSpPr>
+          <p:nvPr>
+            <p:ph type="body" idx="1"/>
+          </p:nvPr>
+        </p:nvSpPr>
+        <p:spPr/>
+        <p:txBody>
+          <a:bodyPr/>
+          <a:lstStyle/>
+          <a:p>
+            <a:endParaRPr lang="en-US" dirty="0"/>
+          </a:p>
+        </p:txBody>
+      </p:sp>
+      <p:sp>
+        <p:nvSpPr>
+          <p:cNvPr id="4" name="Slide Number Placeholder 3"/>
+          <p:cNvSpPr>
+            <a:spLocks noGrp="1"/>
+          </p:cNvSpPr>
+          <p:nvPr>
+            <p:ph type="sldNum" sz="quarter" idx="10"/>
+          </p:nvPr>
+        </p:nvSpPr>
+        <p:spPr/>
+        <p:txBody>
+          <a:bodyPr/>
+          <a:lstStyle/>
+          <a:p>
+            <a:fld id="{F7021451-1387-4CA6-816F-3879F97B5CBC}" type="slidenum">
+              <a:rPr lang="en-US"/>
+              <a:t>5</a:t>
+            </a:fld>
+            <a:endParaRPr lang="en-US"/>
+          </a:p>
+        </p:txBody>
+      </p:sp>
+    </p:spTree>
+    <p:extLst>
+      <p:ext uri="{BB962C8B-B14F-4D97-AF65-F5344CB8AC3E}">
+        <p14:creationId xmlns:p14="http://schemas.microsoft.com/office/powerpoint/2010/main" val="1024086991"/>
+      </p:ext>
+    </p:extLst>
+  </p:cSld>
+  <p:clrMapOvr>
+    <a:masterClrMapping/>
+  </p:clrMapOvr>
+</p:notes>
+</file>
+
+<file path=ppt\notesSlides\notesSlide6.xml><?xml version="1.0" encoding="utf-8"?>
+<p:notes xmlns:a="http://schemas.openxmlformats.org/drawingml/2006/main" xmlns:r="http://schemas.openxmlformats.org/officeDocument/2006/relationships" xmlns:p="http://schemas.openxmlformats.org/presentationml/2006/main">
+  <p:cSld>
+    <p:spTree>
+      <p:nvGrpSpPr>
+        <p:cNvPr id="1" name=""/>
+        <p:cNvGrpSpPr/>
+        <p:nvPr/>
+      </p:nvGrpSpPr>
+      <p:grpSpPr>
+        <a:xfrm>
+          <a:off x="0" y="0"/>
+          <a:ext cx="0" cy="0"/>
+          <a:chOff x="0" y="0"/>
+          <a:chExt cx="0" cy="0"/>
+        </a:xfrm>
+      </p:grpSpPr>
+      <p:sp>
+        <p:nvSpPr>
+          <p:cNvPr id="2" name="Slide Image Placeholder 1"/>
+          <p:cNvSpPr>
+            <a:spLocks noGrp="1" noRot="1" noChangeAspect="1"/>
+          </p:cNvSpPr>
+          <p:nvPr>
+            <p:ph type="sldImg"/>
+          </p:nvPr>
+        </p:nvSpPr>
+        <p:spPr/>
+      </p:sp>
+      <p:sp>
+        <p:nvSpPr>
+          <p:cNvPr id="3" name="Notes Placeholder 2"/>
+          <p:cNvSpPr>
+            <a:spLocks noGrp="1"/>
+          </p:cNvSpPr>
+          <p:nvPr>
+            <p:ph type="body" idx="1"/>
+          </p:nvPr>
+        </p:nvSpPr>
+        <p:spPr/>
+        <p:txBody>
+          <a:bodyPr/>
+          <a:lstStyle/>
+          <a:p>
+            <a:endParaRPr lang="en-US" dirty="0"/>
+          </a:p>
+        </p:txBody>
+      </p:sp>
+      <p:sp>
+        <p:nvSpPr>
+          <p:cNvPr id="4" name="Slide Number Placeholder 3"/>
+          <p:cNvSpPr>
+            <a:spLocks noGrp="1"/>
+          </p:cNvSpPr>
+          <p:nvPr>
+            <p:ph type="sldNum" sz="quarter" idx="10"/>
+          </p:nvPr>
+        </p:nvSpPr>
+        <p:spPr/>
+        <p:txBody>
+          <a:bodyPr/>
+          <a:lstStyle/>
+          <a:p>
+            <a:fld id="{F7021451-1387-4CA6-816F-3879F97B5CBC}" type="slidenum">
+              <a:rPr lang="en-US"/>
+              <a:t>6</a:t>
+            </a:fld>
+            <a:endParaRPr lang="en-US"/>
+          </a:p>
+        </p:txBody>
+      </p:sp>
+    </p:spTree>
+    <p:extLst>
+      <p:ext uri="{BB962C8B-B14F-4D97-AF65-F5344CB8AC3E}">
+        <p14:creationId xmlns:p14="http://schemas.microsoft.com/office/powerpoint/2010/main" val="1024086991"/>
+      </p:ext>
+    </p:extLst>
+  </p:cSld>
+  <p:clrMapOvr>
+    <a:masterClrMapping/>
+  </p:clrMapOvr>
+</p:notes>
+</file>
+
+<file path=ppt\notesSlides\notesSlide7.xml><?xml version="1.0" encoding="utf-8"?>
+<p:notes xmlns:a="http://schemas.openxmlformats.org/drawingml/2006/main" xmlns:r="http://schemas.openxmlformats.org/officeDocument/2006/relationships" xmlns:p="http://schemas.openxmlformats.org/presentationml/2006/main">
+  <p:cSld>
+    <p:spTree>
+      <p:nvGrpSpPr>
+        <p:cNvPr id="1" name=""/>
+        <p:cNvGrpSpPr/>
+        <p:nvPr/>
+      </p:nvGrpSpPr>
+      <p:grpSpPr>
+        <a:xfrm>
+          <a:off x="0" y="0"/>
+          <a:ext cx="0" cy="0"/>
+          <a:chOff x="0" y="0"/>
+          <a:chExt cx="0" cy="0"/>
+        </a:xfrm>
+      </p:grpSpPr>
+      <p:sp>
+        <p:nvSpPr>
+          <p:cNvPr id="2" name="Slide Image Placeholder 1"/>
+          <p:cNvSpPr>
+            <a:spLocks noGrp="1" noRot="1" noChangeAspect="1"/>
+          </p:cNvSpPr>
+          <p:nvPr>
+            <p:ph type="sldImg"/>
+          </p:nvPr>
+        </p:nvSpPr>
+        <p:spPr/>
+      </p:sp>
+      <p:sp>
+        <p:nvSpPr>
+          <p:cNvPr id="3" name="Notes Placeholder 2"/>
+          <p:cNvSpPr>
+            <a:spLocks noGrp="1"/>
+          </p:cNvSpPr>
+          <p:nvPr>
+            <p:ph type="body" idx="1"/>
+          </p:nvPr>
+        </p:nvSpPr>
+        <p:spPr/>
+        <p:txBody>
+          <a:bodyPr/>
+          <a:lstStyle/>
+          <a:p>
+            <a:endParaRPr lang="en-US" dirty="0"/>
+          </a:p>
+        </p:txBody>
+      </p:sp>
+      <p:sp>
+        <p:nvSpPr>
+          <p:cNvPr id="4" name="Slide Number Placeholder 3"/>
+          <p:cNvSpPr>
+            <a:spLocks noGrp="1"/>
+          </p:cNvSpPr>
+          <p:nvPr>
+            <p:ph type="sldNum" sz="quarter" idx="10"/>
+          </p:nvPr>
+        </p:nvSpPr>
+        <p:spPr/>
+        <p:txBody>
+          <a:bodyPr/>
+          <a:lstStyle/>
+          <a:p>
+            <a:fld id="{F7021451-1387-4CA6-816F-3879F97B5CBC}" type="slidenum">
+              <a:rPr lang="en-US"/>
+              <a:t>7</a:t>
+            </a:fld>
+            <a:endParaRPr lang="en-US"/>
+          </a:p>
+        </p:txBody>
+      </p:sp>
+    </p:spTree>
+    <p:extLst>
+      <p:ext uri="{BB962C8B-B14F-4D97-AF65-F5344CB8AC3E}">
+        <p14:creationId xmlns:p14="http://schemas.microsoft.com/office/powerpoint/2010/main" val="1024086991"/>
+      </p:ext>
+    </p:extLst>
+  </p:cSld>
+  <p:clrMapOvr>
+    <a:masterClrMapping/>
+  </p:clrMapOvr>
+</p:notes>
+</file>
+
+<file path=ppt\notesSlides\notesSlide8.xml><?xml version="1.0" encoding="utf-8"?>
+<p:notes xmlns:a="http://schemas.openxmlformats.org/drawingml/2006/main" xmlns:r="http://schemas.openxmlformats.org/officeDocument/2006/relationships" xmlns:p="http://schemas.openxmlformats.org/presentationml/2006/main">
+  <p:cSld>
+    <p:spTree>
+      <p:nvGrpSpPr>
+        <p:cNvPr id="1" name=""/>
+        <p:cNvGrpSpPr/>
+        <p:nvPr/>
+      </p:nvGrpSpPr>
+      <p:grpSpPr>
+        <a:xfrm>
+          <a:off x="0" y="0"/>
+          <a:ext cx="0" cy="0"/>
+          <a:chOff x="0" y="0"/>
+          <a:chExt cx="0" cy="0"/>
+        </a:xfrm>
+      </p:grpSpPr>
+      <p:sp>
+        <p:nvSpPr>
+          <p:cNvPr id="2" name="Slide Image Placeholder 1"/>
+          <p:cNvSpPr>
+            <a:spLocks noGrp="1" noRot="1" noChangeAspect="1"/>
+          </p:cNvSpPr>
+          <p:nvPr>
+            <p:ph type="sldImg"/>
+          </p:nvPr>
+        </p:nvSpPr>
+        <p:spPr/>
+      </p:sp>
+      <p:sp>
+        <p:nvSpPr>
+          <p:cNvPr id="3" name="Notes Placeholder 2"/>
+          <p:cNvSpPr>
+            <a:spLocks noGrp="1"/>
+          </p:cNvSpPr>
+          <p:nvPr>
+            <p:ph type="body" idx="1"/>
+          </p:nvPr>
+        </p:nvSpPr>
+        <p:spPr/>
+        <p:txBody>
+          <a:bodyPr/>
+          <a:lstStyle/>
+          <a:p>
+            <a:endParaRPr lang="en-US" dirty="0"/>
+          </a:p>
+        </p:txBody>
+      </p:sp>
+      <p:sp>
+        <p:nvSpPr>
+          <p:cNvPr id="4" name="Slide Number Placeholder 3"/>
+          <p:cNvSpPr>
+            <a:spLocks noGrp="1"/>
+          </p:cNvSpPr>
+          <p:nvPr>
+            <p:ph type="sldNum" sz="quarter" idx="10"/>
+          </p:nvPr>
+        </p:nvSpPr>
+        <p:spPr/>
+        <p:txBody>
+          <a:bodyPr/>
+          <a:lstStyle/>
+          <a:p>
+            <a:fld id="{F7021451-1387-4CA6-816F-3879F97B5CBC}" type="slidenum">
+              <a:rPr lang="en-US"/>
+              <a:t>8</a:t>
+            </a:fld>
+            <a:endParaRPr lang="en-US"/>
+          </a:p>
+        </p:txBody>
+      </p:sp>
+    </p:spTree>
+    <p:extLst>
+      <p:ext uri="{BB962C8B-B14F-4D97-AF65-F5344CB8AC3E}">
+        <p14:creationId xmlns:p14="http://schemas.microsoft.com/office/powerpoint/2010/main" val="1024086991"/>
+      </p:ext>
+    </p:extLst>
+  </p:cSld>
+  <p:clrMapOvr>
+    <a:masterClrMapping/>
+  </p:clrMapOvr>
+</p:notes>
+</file>
+
+<file path=ppt\notesSlides\notesSlide9.xml><?xml version="1.0" encoding="utf-8"?>
+<p:notes xmlns:a="http://schemas.openxmlformats.org/drawingml/2006/main" xmlns:r="http://schemas.openxmlformats.org/officeDocument/2006/relationships" xmlns:p="http://schemas.openxmlformats.org/presentationml/2006/main">
+  <p:cSld>
+    <p:spTree>
+      <p:nvGrpSpPr>
+        <p:cNvPr id="1" name=""/>
+        <p:cNvGrpSpPr/>
+        <p:nvPr/>
+      </p:nvGrpSpPr>
+      <p:grpSpPr>
+        <a:xfrm>
+          <a:off x="0" y="0"/>
+          <a:ext cx="0" cy="0"/>
+          <a:chOff x="0" y="0"/>
+          <a:chExt cx="0" cy="0"/>
+        </a:xfrm>
+      </p:grpSpPr>
+      <p:sp>
+        <p:nvSpPr>
+          <p:cNvPr id="2" name="Slide Image Placeholder 1"/>
+          <p:cNvSpPr>
+            <a:spLocks noGrp="1" noRot="1" noChangeAspect="1"/>
+          </p:cNvSpPr>
+          <p:nvPr>
+            <p:ph type="sldImg"/>
+          </p:nvPr>
+        </p:nvSpPr>
+        <p:spPr/>
+      </p:sp>
+      <p:sp>
+        <p:nvSpPr>
+          <p:cNvPr id="3" name="Notes Placeholder 2"/>
+          <p:cNvSpPr>
+            <a:spLocks noGrp="1"/>
+          </p:cNvSpPr>
+          <p:nvPr>
+            <p:ph type="body" idx="1"/>
+          </p:nvPr>
+        </p:nvSpPr>
+        <p:spPr/>
+        <p:txBody>
+          <a:bodyPr/>
+          <a:lstStyle/>
+          <a:p>
+            <a:endParaRPr lang="en-US" dirty="0"/>
+          </a:p>
+        </p:txBody>
+      </p:sp>
+      <p:sp>
+        <p:nvSpPr>
+          <p:cNvPr id="4" name="Slide Number Placeholder 3"/>
+          <p:cNvSpPr>
+            <a:spLocks noGrp="1"/>
+          </p:cNvSpPr>
+          <p:nvPr>
+            <p:ph type="sldNum" sz="quarter" idx="10"/>
+          </p:nvPr>
+        </p:nvSpPr>
+        <p:spPr/>
+        <p:txBody>
+          <a:bodyPr/>
+          <a:lstStyle/>
+          <a:p>
+            <a:fld id="{F7021451-1387-4CA6-816F-3879F97B5CBC}" type="slidenum">
+              <a:rPr lang="en-US"/>
+              <a:t>9</a:t>
+            </a:fld>
+            <a:endParaRPr lang="en-US"/>
+          </a:p>
+        </p:txBody>
+      </p:sp>
+    </p:spTree>
+    <p:extLst>
+      <p:ext uri="{BB962C8B-B14F-4D97-AF65-F5344CB8AC3E}">
+        <p14:creationId xmlns:p14="http://schemas.microsoft.com/office/powerpoint/2010/main" val="1024086991"/>
+      </p:ext>
+    </p:extLst>
+  </p:cSld>
+  <p:clrMapOvr>
+    <a:masterClrMapping/>
+  </p:clrMapOvr>
+</p:notes>
+</file>
+
+<file path=ppt\presProps.xml><?xml version="1.0" encoding="utf-8"?>
+<p:presentationPr xmlns:a="http://schemas.openxmlformats.org/drawingml/2006/main" xmlns:r="http://schemas.openxmlformats.org/officeDocument/2006/relationships" xmlns:p="http://schemas.openxmlformats.org/presentationml/2006/main">
+  <p:extLst>
+    <p:ext uri="{E76CE94A-603C-4142-B9EB-6D1370010A27}">
+      <p14:discardImageEditData xmlns:p14="http://schemas.microsoft.com/office/powerpoint/2010/main" val="0"/>
+    </p:ext>
+    <p:ext uri="{D31A062A-798A-4329-ABDD-BBA856620510}">
+      <p14:defaultImageDpi xmlns:p14="http://schemas.microsoft.com/office/powerpoint/2010/main" val="220"/>
+    </p:ext>
+  </p:extLst>
+</p:presentationPr>
+</file>
+
+<file path=ppt\presentation.xml><?xml version="1.0" encoding="utf-8"?>
 <p:presentation xmlns:a="http://schemas.openxmlformats.org/drawingml/2006/main" xmlns:r="http://schemas.openxmlformats.org/officeDocument/2006/relationships" xmlns:p="http://schemas.openxmlformats.org/presentationml/2006/main" saveSubsetFonts="1" autoCompressPictures="0">
   <p:sldMasterIdLst>
     <p:sldMasterId id="2147483648" r:id="rId1"/>
   </p:sldMasterIdLst>
+  <p:notesMasterIdLst>
+    <p:notesMasterId r:id="rId12"/>
+  </p:notesMasterIdLst>
   <p:sldIdLst>
     <p:sldId id="256" r:id="rId2"/>
     <p:sldId id="257" r:id="rId3"/>
@@ -16,9 +1285,6 @@
     <p:sldId id="264" r:id="rId10"/>
     <p:sldId id="265" r:id="rId11"/>
   </p:sldIdLst>
-  <p:notesMasterIdLst>
-    <p:notesMasterId r:id="rId12"/>
-  </p:notesMasterIdLst>
   <p:sldSz cx="12192000" cy="6858000"/>
   <p:notesSz cx="6858000" cy="12192000"/>
   <p:defaultTextStyle>
@@ -116,1236 +1382,7 @@
 </p:presentation>
 </file>
 
-<file path=ppt/notesMasters/notesMaster1.xml><?xml version="1.0" encoding="utf-8"?>
-<p:notesMaster xmlns:a="http://schemas.openxmlformats.org/drawingml/2006/main" xmlns:r="http://schemas.openxmlformats.org/officeDocument/2006/relationships" xmlns:p="http://schemas.openxmlformats.org/presentationml/2006/main">
-  <p:cSld>
-    <p:bg>
-      <p:bgRef idx="1001">
-        <a:schemeClr val="bg1"/>
-      </p:bgRef>
-    </p:bg>
-    <p:spTree>
-      <p:nvGrpSpPr>
-        <p:cNvPr id="1" name=""/>
-        <p:cNvGrpSpPr/>
-        <p:nvPr/>
-      </p:nvGrpSpPr>
-      <p:grpSpPr>
-        <a:xfrm>
-          <a:off x="0" y="0"/>
-          <a:ext cx="0" cy="0"/>
-          <a:chOff x="0" y="0"/>
-          <a:chExt cx="0" cy="0"/>
-        </a:xfrm>
-      </p:grpSpPr>
-      <p:sp>
-        <p:nvSpPr>
-          <p:cNvPr id="2" name="Header Placeholder 1"/>
-          <p:cNvSpPr>
-            <a:spLocks noGrp="1"/>
-          </p:cNvSpPr>
-          <p:nvPr>
-            <p:ph type="hdr" sz="quarter"/>
-          </p:nvPr>
-        </p:nvSpPr>
-        <p:spPr>
-          <a:xfrm>
-            <a:off x="0" y="0"/>
-            <a:ext cx="2971800" cy="458788"/>
-          </a:xfrm>
-          <a:prstGeom prst="rect">
-            <a:avLst/>
-          </a:prstGeom>
-        </p:spPr>
-        <p:txBody>
-          <a:bodyPr vert="horz" lIns="91440" tIns="45720" rIns="91440" bIns="45720" rtlCol="0"/>
-          <a:lstStyle>
-            <a:lvl1pPr algn="l">
-              <a:defRPr sz="1200"/>
-            </a:lvl1pPr>
-          </a:lstStyle>
-          <a:p>
-            <a:endParaRPr lang="en-US"/>
-          </a:p>
-        </p:txBody>
-      </p:sp>
-      <p:sp>
-        <p:nvSpPr>
-          <p:cNvPr id="3" name="Date Placeholder 2"/>
-          <p:cNvSpPr>
-            <a:spLocks noGrp="1"/>
-          </p:cNvSpPr>
-          <p:nvPr>
-            <p:ph type="dt" idx="1"/>
-          </p:nvPr>
-        </p:nvSpPr>
-        <p:spPr>
-          <a:xfrm>
-            <a:off x="3884613" y="0"/>
-            <a:ext cx="2971800" cy="458788"/>
-          </a:xfrm>
-          <a:prstGeom prst="rect">
-            <a:avLst/>
-          </a:prstGeom>
-        </p:spPr>
-        <p:txBody>
-          <a:bodyPr vert="horz" lIns="91440" tIns="45720" rIns="91440" bIns="45720" rtlCol="0"/>
-          <a:lstStyle>
-            <a:lvl1pPr algn="r">
-              <a:defRPr sz="1200"/>
-            </a:lvl1pPr>
-          </a:lstStyle>
-          <a:p>
-            <a:fld id="{5282F153-3F37-0F45-9E97-73ACFA13230C}" type="datetimeFigureOut">
-              <a:rPr lang="en-US"/>
-              <a:t>7/23/19</a:t>
-            </a:fld>
-            <a:endParaRPr lang="en-US"/>
-          </a:p>
-        </p:txBody>
-      </p:sp>
-      <p:sp>
-        <p:nvSpPr>
-          <p:cNvPr id="4" name="Slide Image Placeholder 3"/>
-          <p:cNvSpPr>
-            <a:spLocks noGrp="1" noRot="1" noChangeAspect="1"/>
-          </p:cNvSpPr>
-          <p:nvPr>
-            <p:ph type="sldImg" idx="2"/>
-          </p:nvPr>
-        </p:nvSpPr>
-        <p:spPr>
-          <a:xfrm>
-            <a:off x="685800" y="1143000"/>
-            <a:ext cx="5486400" cy="3086100"/>
-          </a:xfrm>
-          <a:prstGeom prst="rect">
-            <a:avLst/>
-          </a:prstGeom>
-          <a:noFill/>
-          <a:ln w="12700">
-            <a:solidFill>
-              <a:prstClr val="black"/>
-            </a:solidFill>
-          </a:ln>
-        </p:spPr>
-        <p:txBody>
-          <a:bodyPr vert="horz" lIns="91440" tIns="45720" rIns="91440" bIns="45720" rtlCol="0" anchor="ctr"/>
-          <a:lstStyle/>
-          <a:p>
-            <a:endParaRPr lang="en-US"/>
-          </a:p>
-        </p:txBody>
-      </p:sp>
-      <p:sp>
-        <p:nvSpPr>
-          <p:cNvPr id="5" name="Notes Placeholder 4"/>
-          <p:cNvSpPr>
-            <a:spLocks noGrp="1"/>
-          </p:cNvSpPr>
-          <p:nvPr>
-            <p:ph type="body" sz="quarter" idx="3"/>
-          </p:nvPr>
-        </p:nvSpPr>
-        <p:spPr>
-          <a:xfrm>
-            <a:off x="685800" y="4400550"/>
-            <a:ext cx="5486400" cy="3600450"/>
-          </a:xfrm>
-          <a:prstGeom prst="rect">
-            <a:avLst/>
-          </a:prstGeom>
-        </p:spPr>
-        <p:txBody>
-          <a:bodyPr vert="horz" lIns="91440" tIns="45720" rIns="91440" bIns="45720" rtlCol="0"/>
-          <a:lstStyle/>
-          <a:p>
-            <a:pPr lvl="0"/>
-            <a:r>
-              <a:rPr lang="en-US"/>
-              <a:t>Click to edit Master text styles</a:t>
-            </a:r>
-          </a:p>
-          <a:p>
-            <a:pPr lvl="1"/>
-            <a:r>
-              <a:rPr lang="en-US"/>
-              <a:t>Second level</a:t>
-            </a:r>
-          </a:p>
-          <a:p>
-            <a:pPr lvl="2"/>
-            <a:r>
-              <a:rPr lang="en-US"/>
-              <a:t>Third level</a:t>
-            </a:r>
-          </a:p>
-          <a:p>
-            <a:pPr lvl="3"/>
-            <a:r>
-              <a:rPr lang="en-US"/>
-              <a:t>Fourth level</a:t>
-            </a:r>
-          </a:p>
-          <a:p>
-            <a:pPr lvl="4"/>
-            <a:r>
-              <a:rPr lang="en-US"/>
-              <a:t>Fifth level</a:t>
-            </a:r>
-          </a:p>
-        </p:txBody>
-      </p:sp>
-      <p:sp>
-        <p:nvSpPr>
-          <p:cNvPr id="6" name="Footer Placeholder 5"/>
-          <p:cNvSpPr>
-            <a:spLocks noGrp="1"/>
-          </p:cNvSpPr>
-          <p:nvPr>
-            <p:ph type="ftr" sz="quarter" idx="4"/>
-          </p:nvPr>
-        </p:nvSpPr>
-        <p:spPr>
-          <a:xfrm>
-            <a:off x="0" y="8685213"/>
-            <a:ext cx="2971800" cy="458787"/>
-          </a:xfrm>
-          <a:prstGeom prst="rect">
-            <a:avLst/>
-          </a:prstGeom>
-        </p:spPr>
-        <p:txBody>
-          <a:bodyPr vert="horz" lIns="91440" tIns="45720" rIns="91440" bIns="45720" rtlCol="0" anchor="b"/>
-          <a:lstStyle>
-            <a:lvl1pPr algn="l">
-              <a:defRPr sz="1200"/>
-            </a:lvl1pPr>
-          </a:lstStyle>
-          <a:p>
-            <a:endParaRPr lang="en-US"/>
-          </a:p>
-        </p:txBody>
-      </p:sp>
-      <p:sp>
-        <p:nvSpPr>
-          <p:cNvPr id="7" name="Slide Number Placeholder 6"/>
-          <p:cNvSpPr>
-            <a:spLocks noGrp="1"/>
-          </p:cNvSpPr>
-          <p:nvPr>
-            <p:ph type="sldNum" sz="quarter" idx="5"/>
-          </p:nvPr>
-        </p:nvSpPr>
-        <p:spPr>
-          <a:xfrm>
-            <a:off x="3884613" y="8685213"/>
-            <a:ext cx="2971800" cy="458787"/>
-          </a:xfrm>
-          <a:prstGeom prst="rect">
-            <a:avLst/>
-          </a:prstGeom>
-        </p:spPr>
-        <p:txBody>
-          <a:bodyPr vert="horz" lIns="91440" tIns="45720" rIns="91440" bIns="45720" rtlCol="0" anchor="b"/>
-          <a:lstStyle>
-            <a:lvl1pPr algn="r">
-              <a:defRPr sz="1200"/>
-            </a:lvl1pPr>
-          </a:lstStyle>
-          <a:p>
-            <a:fld id="{CE5E9CC1-C706-0F49-92D6-E571CC5EEA8F}" type="slidenum">
-              <a:rPr lang="en-US"/>
-              <a:t>‹#›</a:t>
-            </a:fld>
-            <a:endParaRPr lang="en-US"/>
-          </a:p>
-        </p:txBody>
-      </p:sp>
-    </p:spTree>
-    <p:extLst>
-      <p:ext uri="{BB962C8B-B14F-4D97-AF65-F5344CB8AC3E}">
-        <p14:creationId xmlns:p14="http://schemas.microsoft.com/office/powerpoint/2010/main" val="1024086991"/>
-      </p:ext>
-    </p:extLst>
-  </p:cSld>
-  <p:clrMap bg1="lt1" tx1="dk1" bg2="lt2" tx2="dk2" accent1="accent1" accent2="accent2" accent3="accent3" accent4="accent4" accent5="accent5" accent6="accent6" hlink="hlink" folHlink="folHlink"/>
-  <p:notesStyle>
-    <a:lvl1pPr marL="0" algn="l" defTabSz="914400" rtl="0" eaLnBrk="1" latinLnBrk="0" hangingPunct="1">
-      <a:defRPr sz="1200" kern="1200">
-        <a:solidFill>
-          <a:schemeClr val="tx1"/>
-        </a:solidFill>
-        <a:latin typeface="+mn-lt"/>
-        <a:ea typeface="+mn-ea"/>
-        <a:cs typeface="+mn-cs"/>
-      </a:defRPr>
-    </a:lvl1pPr>
-    <a:lvl2pPr marL="457200" algn="l" defTabSz="914400" rtl="0" eaLnBrk="1" latinLnBrk="0" hangingPunct="1">
-      <a:defRPr sz="1200" kern="1200">
-        <a:solidFill>
-          <a:schemeClr val="tx1"/>
-        </a:solidFill>
-        <a:latin typeface="+mn-lt"/>
-        <a:ea typeface="+mn-ea"/>
-        <a:cs typeface="+mn-cs"/>
-      </a:defRPr>
-    </a:lvl2pPr>
-    <a:lvl3pPr marL="914400" algn="l" defTabSz="914400" rtl="0" eaLnBrk="1" latinLnBrk="0" hangingPunct="1">
-      <a:defRPr sz="1200" kern="1200">
-        <a:solidFill>
-          <a:schemeClr val="tx1"/>
-        </a:solidFill>
-        <a:latin typeface="+mn-lt"/>
-        <a:ea typeface="+mn-ea"/>
-        <a:cs typeface="+mn-cs"/>
-      </a:defRPr>
-    </a:lvl3pPr>
-    <a:lvl4pPr marL="1371600" algn="l" defTabSz="914400" rtl="0" eaLnBrk="1" latinLnBrk="0" hangingPunct="1">
-      <a:defRPr sz="1200" kern="1200">
-        <a:solidFill>
-          <a:schemeClr val="tx1"/>
-        </a:solidFill>
-        <a:latin typeface="+mn-lt"/>
-        <a:ea typeface="+mn-ea"/>
-        <a:cs typeface="+mn-cs"/>
-      </a:defRPr>
-    </a:lvl4pPr>
-    <a:lvl5pPr marL="1828800" algn="l" defTabSz="914400" rtl="0" eaLnBrk="1" latinLnBrk="0" hangingPunct="1">
-      <a:defRPr sz="1200" kern="1200">
-        <a:solidFill>
-          <a:schemeClr val="tx1"/>
-        </a:solidFill>
-        <a:latin typeface="+mn-lt"/>
-        <a:ea typeface="+mn-ea"/>
-        <a:cs typeface="+mn-cs"/>
-      </a:defRPr>
-    </a:lvl5pPr>
-    <a:lvl6pPr marL="2286000" algn="l" defTabSz="914400" rtl="0" eaLnBrk="1" latinLnBrk="0" hangingPunct="1">
-      <a:defRPr sz="1200" kern="1200">
-        <a:solidFill>
-          <a:schemeClr val="tx1"/>
-        </a:solidFill>
-        <a:latin typeface="+mn-lt"/>
-        <a:ea typeface="+mn-ea"/>
-        <a:cs typeface="+mn-cs"/>
-      </a:defRPr>
-    </a:lvl6pPr>
-    <a:lvl7pPr marL="2743200" algn="l" defTabSz="914400" rtl="0" eaLnBrk="1" latinLnBrk="0" hangingPunct="1">
-      <a:defRPr sz="1200" kern="1200">
-        <a:solidFill>
-          <a:schemeClr val="tx1"/>
-        </a:solidFill>
-        <a:latin typeface="+mn-lt"/>
-        <a:ea typeface="+mn-ea"/>
-        <a:cs typeface="+mn-cs"/>
-      </a:defRPr>
-    </a:lvl7pPr>
-    <a:lvl8pPr marL="3200400" algn="l" defTabSz="914400" rtl="0" eaLnBrk="1" latinLnBrk="0" hangingPunct="1">
-      <a:defRPr sz="1200" kern="1200">
-        <a:solidFill>
-          <a:schemeClr val="tx1"/>
-        </a:solidFill>
-        <a:latin typeface="+mn-lt"/>
-        <a:ea typeface="+mn-ea"/>
-        <a:cs typeface="+mn-cs"/>
-      </a:defRPr>
-    </a:lvl8pPr>
-    <a:lvl9pPr marL="3657600" algn="l" defTabSz="914400" rtl="0" eaLnBrk="1" latinLnBrk="0" hangingPunct="1">
-      <a:defRPr sz="1200" kern="1200">
-        <a:solidFill>
-          <a:schemeClr val="tx1"/>
-        </a:solidFill>
-        <a:latin typeface="+mn-lt"/>
-        <a:ea typeface="+mn-ea"/>
-        <a:cs typeface="+mn-cs"/>
-      </a:defRPr>
-    </a:lvl9pPr>
-  </p:notesStyle>
-</p:notesMaster>
-</file>
-
-<file path=ppt/notesSlides/notesSlide1.xml><?xml version="1.0" encoding="utf-8"?>
-<p:notes xmlns:a="http://schemas.openxmlformats.org/drawingml/2006/main" xmlns:r="http://schemas.openxmlformats.org/officeDocument/2006/relationships" xmlns:p="http://schemas.openxmlformats.org/presentationml/2006/main">
-  <p:cSld>
-    <p:spTree>
-      <p:nvGrpSpPr>
-        <p:cNvPr id="1" name=""/>
-        <p:cNvGrpSpPr/>
-        <p:nvPr/>
-      </p:nvGrpSpPr>
-      <p:grpSpPr>
-        <a:xfrm>
-          <a:off x="0" y="0"/>
-          <a:ext cx="0" cy="0"/>
-          <a:chOff x="0" y="0"/>
-          <a:chExt cx="0" cy="0"/>
-        </a:xfrm>
-      </p:grpSpPr>
-      <p:sp>
-        <p:nvSpPr>
-          <p:cNvPr id="2" name="Slide Image Placeholder 1"/>
-          <p:cNvSpPr>
-            <a:spLocks noGrp="1" noRot="1" noChangeAspect="1"/>
-          </p:cNvSpPr>
-          <p:nvPr>
-            <p:ph type="sldImg"/>
-          </p:nvPr>
-        </p:nvSpPr>
-        <p:spPr/>
-      </p:sp>
-      <p:sp>
-        <p:nvSpPr>
-          <p:cNvPr id="3" name="Notes Placeholder 2"/>
-          <p:cNvSpPr>
-            <a:spLocks noGrp="1"/>
-          </p:cNvSpPr>
-          <p:nvPr>
-            <p:ph type="body" idx="1"/>
-          </p:nvPr>
-        </p:nvSpPr>
-        <p:spPr/>
-        <p:txBody>
-          <a:bodyPr/>
-          <a:lstStyle/>
-          <a:p>
-            <a:r>
-              <a:rPr lang="en-US" dirty="0"/>
-              <a:t/>
-            </a:r>
-            <a:endParaRPr lang="en-US" dirty="0"/>
-          </a:p>
-        </p:txBody>
-      </p:sp>
-      <p:sp>
-        <p:nvSpPr>
-          <p:cNvPr id="4" name="Slide Number Placeholder 3"/>
-          <p:cNvSpPr>
-            <a:spLocks noGrp="1"/>
-          </p:cNvSpPr>
-          <p:nvPr>
-            <p:ph type="sldNum" sz="quarter" idx="10"/>
-          </p:nvPr>
-        </p:nvSpPr>
-        <p:spPr/>
-        <p:txBody>
-          <a:bodyPr/>
-          <a:lstStyle/>
-          <a:p>
-            <a:fld id="{F7021451-1387-4CA6-816F-3879F97B5CBC}" type="slidenum">
-              <a:rPr lang="en-US"/>
-              <a:t>1</a:t>
-            </a:fld>
-            <a:endParaRPr lang="en-US"/>
-          </a:p>
-        </p:txBody>
-      </p:sp>
-    </p:spTree>
-    <p:extLst>
-      <p:ext uri="{BB962C8B-B14F-4D97-AF65-F5344CB8AC3E}">
-        <p14:creationId xmlns:p14="http://schemas.microsoft.com/office/powerpoint/2010/main" val="1024086991"/>
-      </p:ext>
-    </p:extLst>
-  </p:cSld>
-  <p:clrMapOvr>
-    <a:masterClrMapping/>
-  </p:clrMapOvr>
-</p:notes>
-</file>
-
-<file path=ppt/notesSlides/notesSlide10.xml><?xml version="1.0" encoding="utf-8"?>
-<p:notes xmlns:a="http://schemas.openxmlformats.org/drawingml/2006/main" xmlns:r="http://schemas.openxmlformats.org/officeDocument/2006/relationships" xmlns:p="http://schemas.openxmlformats.org/presentationml/2006/main">
-  <p:cSld>
-    <p:spTree>
-      <p:nvGrpSpPr>
-        <p:cNvPr id="1" name=""/>
-        <p:cNvGrpSpPr/>
-        <p:nvPr/>
-      </p:nvGrpSpPr>
-      <p:grpSpPr>
-        <a:xfrm>
-          <a:off x="0" y="0"/>
-          <a:ext cx="0" cy="0"/>
-          <a:chOff x="0" y="0"/>
-          <a:chExt cx="0" cy="0"/>
-        </a:xfrm>
-      </p:grpSpPr>
-      <p:sp>
-        <p:nvSpPr>
-          <p:cNvPr id="2" name="Slide Image Placeholder 1"/>
-          <p:cNvSpPr>
-            <a:spLocks noGrp="1" noRot="1" noChangeAspect="1"/>
-          </p:cNvSpPr>
-          <p:nvPr>
-            <p:ph type="sldImg"/>
-          </p:nvPr>
-        </p:nvSpPr>
-        <p:spPr/>
-      </p:sp>
-      <p:sp>
-        <p:nvSpPr>
-          <p:cNvPr id="3" name="Notes Placeholder 2"/>
-          <p:cNvSpPr>
-            <a:spLocks noGrp="1"/>
-          </p:cNvSpPr>
-          <p:nvPr>
-            <p:ph type="body" idx="1"/>
-          </p:nvPr>
-        </p:nvSpPr>
-        <p:spPr/>
-        <p:txBody>
-          <a:bodyPr/>
-          <a:lstStyle/>
-          <a:p>
-            <a:r>
-              <a:rPr lang="en-US" dirty="0"/>
-              <a:t/>
-            </a:r>
-            <a:endParaRPr lang="en-US" dirty="0"/>
-          </a:p>
-        </p:txBody>
-      </p:sp>
-      <p:sp>
-        <p:nvSpPr>
-          <p:cNvPr id="4" name="Slide Number Placeholder 3"/>
-          <p:cNvSpPr>
-            <a:spLocks noGrp="1"/>
-          </p:cNvSpPr>
-          <p:nvPr>
-            <p:ph type="sldNum" sz="quarter" idx="10"/>
-          </p:nvPr>
-        </p:nvSpPr>
-        <p:spPr/>
-        <p:txBody>
-          <a:bodyPr/>
-          <a:lstStyle/>
-          <a:p>
-            <a:fld id="{F7021451-1387-4CA6-816F-3879F97B5CBC}" type="slidenum">
-              <a:rPr lang="en-US"/>
-              <a:t>10</a:t>
-            </a:fld>
-            <a:endParaRPr lang="en-US"/>
-          </a:p>
-        </p:txBody>
-      </p:sp>
-    </p:spTree>
-    <p:extLst>
-      <p:ext uri="{BB962C8B-B14F-4D97-AF65-F5344CB8AC3E}">
-        <p14:creationId xmlns:p14="http://schemas.microsoft.com/office/powerpoint/2010/main" val="1024086991"/>
-      </p:ext>
-    </p:extLst>
-  </p:cSld>
-  <p:clrMapOvr>
-    <a:masterClrMapping/>
-  </p:clrMapOvr>
-</p:notes>
-</file>
-
-<file path=ppt/notesSlides/notesSlide2.xml><?xml version="1.0" encoding="utf-8"?>
-<p:notes xmlns:a="http://schemas.openxmlformats.org/drawingml/2006/main" xmlns:r="http://schemas.openxmlformats.org/officeDocument/2006/relationships" xmlns:p="http://schemas.openxmlformats.org/presentationml/2006/main">
-  <p:cSld>
-    <p:spTree>
-      <p:nvGrpSpPr>
-        <p:cNvPr id="1" name=""/>
-        <p:cNvGrpSpPr/>
-        <p:nvPr/>
-      </p:nvGrpSpPr>
-      <p:grpSpPr>
-        <a:xfrm>
-          <a:off x="0" y="0"/>
-          <a:ext cx="0" cy="0"/>
-          <a:chOff x="0" y="0"/>
-          <a:chExt cx="0" cy="0"/>
-        </a:xfrm>
-      </p:grpSpPr>
-      <p:sp>
-        <p:nvSpPr>
-          <p:cNvPr id="2" name="Slide Image Placeholder 1"/>
-          <p:cNvSpPr>
-            <a:spLocks noGrp="1" noRot="1" noChangeAspect="1"/>
-          </p:cNvSpPr>
-          <p:nvPr>
-            <p:ph type="sldImg"/>
-          </p:nvPr>
-        </p:nvSpPr>
-        <p:spPr/>
-      </p:sp>
-      <p:sp>
-        <p:nvSpPr>
-          <p:cNvPr id="3" name="Notes Placeholder 2"/>
-          <p:cNvSpPr>
-            <a:spLocks noGrp="1"/>
-          </p:cNvSpPr>
-          <p:nvPr>
-            <p:ph type="body" idx="1"/>
-          </p:nvPr>
-        </p:nvSpPr>
-        <p:spPr/>
-        <p:txBody>
-          <a:bodyPr/>
-          <a:lstStyle/>
-          <a:p>
-            <a:r>
-              <a:rPr lang="en-US" dirty="0"/>
-              <a:t/>
-            </a:r>
-            <a:endParaRPr lang="en-US" dirty="0"/>
-          </a:p>
-        </p:txBody>
-      </p:sp>
-      <p:sp>
-        <p:nvSpPr>
-          <p:cNvPr id="4" name="Slide Number Placeholder 3"/>
-          <p:cNvSpPr>
-            <a:spLocks noGrp="1"/>
-          </p:cNvSpPr>
-          <p:nvPr>
-            <p:ph type="sldNum" sz="quarter" idx="10"/>
-          </p:nvPr>
-        </p:nvSpPr>
-        <p:spPr/>
-        <p:txBody>
-          <a:bodyPr/>
-          <a:lstStyle/>
-          <a:p>
-            <a:fld id="{F7021451-1387-4CA6-816F-3879F97B5CBC}" type="slidenum">
-              <a:rPr lang="en-US"/>
-              <a:t>2</a:t>
-            </a:fld>
-            <a:endParaRPr lang="en-US"/>
-          </a:p>
-        </p:txBody>
-      </p:sp>
-    </p:spTree>
-    <p:extLst>
-      <p:ext uri="{BB962C8B-B14F-4D97-AF65-F5344CB8AC3E}">
-        <p14:creationId xmlns:p14="http://schemas.microsoft.com/office/powerpoint/2010/main" val="1024086991"/>
-      </p:ext>
-    </p:extLst>
-  </p:cSld>
-  <p:clrMapOvr>
-    <a:masterClrMapping/>
-  </p:clrMapOvr>
-</p:notes>
-</file>
-
-<file path=ppt/notesSlides/notesSlide3.xml><?xml version="1.0" encoding="utf-8"?>
-<p:notes xmlns:a="http://schemas.openxmlformats.org/drawingml/2006/main" xmlns:r="http://schemas.openxmlformats.org/officeDocument/2006/relationships" xmlns:p="http://schemas.openxmlformats.org/presentationml/2006/main">
-  <p:cSld>
-    <p:spTree>
-      <p:nvGrpSpPr>
-        <p:cNvPr id="1" name=""/>
-        <p:cNvGrpSpPr/>
-        <p:nvPr/>
-      </p:nvGrpSpPr>
-      <p:grpSpPr>
-        <a:xfrm>
-          <a:off x="0" y="0"/>
-          <a:ext cx="0" cy="0"/>
-          <a:chOff x="0" y="0"/>
-          <a:chExt cx="0" cy="0"/>
-        </a:xfrm>
-      </p:grpSpPr>
-      <p:sp>
-        <p:nvSpPr>
-          <p:cNvPr id="2" name="Slide Image Placeholder 1"/>
-          <p:cNvSpPr>
-            <a:spLocks noGrp="1" noRot="1" noChangeAspect="1"/>
-          </p:cNvSpPr>
-          <p:nvPr>
-            <p:ph type="sldImg"/>
-          </p:nvPr>
-        </p:nvSpPr>
-        <p:spPr/>
-      </p:sp>
-      <p:sp>
-        <p:nvSpPr>
-          <p:cNvPr id="3" name="Notes Placeholder 2"/>
-          <p:cNvSpPr>
-            <a:spLocks noGrp="1"/>
-          </p:cNvSpPr>
-          <p:nvPr>
-            <p:ph type="body" idx="1"/>
-          </p:nvPr>
-        </p:nvSpPr>
-        <p:spPr/>
-        <p:txBody>
-          <a:bodyPr/>
-          <a:lstStyle/>
-          <a:p>
-            <a:r>
-              <a:rPr lang="en-US" dirty="0"/>
-              <a:t/>
-            </a:r>
-            <a:endParaRPr lang="en-US" dirty="0"/>
-          </a:p>
-        </p:txBody>
-      </p:sp>
-      <p:sp>
-        <p:nvSpPr>
-          <p:cNvPr id="4" name="Slide Number Placeholder 3"/>
-          <p:cNvSpPr>
-            <a:spLocks noGrp="1"/>
-          </p:cNvSpPr>
-          <p:nvPr>
-            <p:ph type="sldNum" sz="quarter" idx="10"/>
-          </p:nvPr>
-        </p:nvSpPr>
-        <p:spPr/>
-        <p:txBody>
-          <a:bodyPr/>
-          <a:lstStyle/>
-          <a:p>
-            <a:fld id="{F7021451-1387-4CA6-816F-3879F97B5CBC}" type="slidenum">
-              <a:rPr lang="en-US"/>
-              <a:t>3</a:t>
-            </a:fld>
-            <a:endParaRPr lang="en-US"/>
-          </a:p>
-        </p:txBody>
-      </p:sp>
-    </p:spTree>
-    <p:extLst>
-      <p:ext uri="{BB962C8B-B14F-4D97-AF65-F5344CB8AC3E}">
-        <p14:creationId xmlns:p14="http://schemas.microsoft.com/office/powerpoint/2010/main" val="1024086991"/>
-      </p:ext>
-    </p:extLst>
-  </p:cSld>
-  <p:clrMapOvr>
-    <a:masterClrMapping/>
-  </p:clrMapOvr>
-</p:notes>
-</file>
-
-<file path=ppt/notesSlides/notesSlide4.xml><?xml version="1.0" encoding="utf-8"?>
-<p:notes xmlns:a="http://schemas.openxmlformats.org/drawingml/2006/main" xmlns:r="http://schemas.openxmlformats.org/officeDocument/2006/relationships" xmlns:p="http://schemas.openxmlformats.org/presentationml/2006/main">
-  <p:cSld>
-    <p:spTree>
-      <p:nvGrpSpPr>
-        <p:cNvPr id="1" name=""/>
-        <p:cNvGrpSpPr/>
-        <p:nvPr/>
-      </p:nvGrpSpPr>
-      <p:grpSpPr>
-        <a:xfrm>
-          <a:off x="0" y="0"/>
-          <a:ext cx="0" cy="0"/>
-          <a:chOff x="0" y="0"/>
-          <a:chExt cx="0" cy="0"/>
-        </a:xfrm>
-      </p:grpSpPr>
-      <p:sp>
-        <p:nvSpPr>
-          <p:cNvPr id="2" name="Slide Image Placeholder 1"/>
-          <p:cNvSpPr>
-            <a:spLocks noGrp="1" noRot="1" noChangeAspect="1"/>
-          </p:cNvSpPr>
-          <p:nvPr>
-            <p:ph type="sldImg"/>
-          </p:nvPr>
-        </p:nvSpPr>
-        <p:spPr/>
-      </p:sp>
-      <p:sp>
-        <p:nvSpPr>
-          <p:cNvPr id="3" name="Notes Placeholder 2"/>
-          <p:cNvSpPr>
-            <a:spLocks noGrp="1"/>
-          </p:cNvSpPr>
-          <p:nvPr>
-            <p:ph type="body" idx="1"/>
-          </p:nvPr>
-        </p:nvSpPr>
-        <p:spPr/>
-        <p:txBody>
-          <a:bodyPr/>
-          <a:lstStyle/>
-          <a:p>
-            <a:r>
-              <a:rPr lang="en-US" dirty="0"/>
-              <a:t/>
-            </a:r>
-            <a:endParaRPr lang="en-US" dirty="0"/>
-          </a:p>
-        </p:txBody>
-      </p:sp>
-      <p:sp>
-        <p:nvSpPr>
-          <p:cNvPr id="4" name="Slide Number Placeholder 3"/>
-          <p:cNvSpPr>
-            <a:spLocks noGrp="1"/>
-          </p:cNvSpPr>
-          <p:nvPr>
-            <p:ph type="sldNum" sz="quarter" idx="10"/>
-          </p:nvPr>
-        </p:nvSpPr>
-        <p:spPr/>
-        <p:txBody>
-          <a:bodyPr/>
-          <a:lstStyle/>
-          <a:p>
-            <a:fld id="{F7021451-1387-4CA6-816F-3879F97B5CBC}" type="slidenum">
-              <a:rPr lang="en-US"/>
-              <a:t>4</a:t>
-            </a:fld>
-            <a:endParaRPr lang="en-US"/>
-          </a:p>
-        </p:txBody>
-      </p:sp>
-    </p:spTree>
-    <p:extLst>
-      <p:ext uri="{BB962C8B-B14F-4D97-AF65-F5344CB8AC3E}">
-        <p14:creationId xmlns:p14="http://schemas.microsoft.com/office/powerpoint/2010/main" val="1024086991"/>
-      </p:ext>
-    </p:extLst>
-  </p:cSld>
-  <p:clrMapOvr>
-    <a:masterClrMapping/>
-  </p:clrMapOvr>
-</p:notes>
-</file>
-
-<file path=ppt/notesSlides/notesSlide5.xml><?xml version="1.0" encoding="utf-8"?>
-<p:notes xmlns:a="http://schemas.openxmlformats.org/drawingml/2006/main" xmlns:r="http://schemas.openxmlformats.org/officeDocument/2006/relationships" xmlns:p="http://schemas.openxmlformats.org/presentationml/2006/main">
-  <p:cSld>
-    <p:spTree>
-      <p:nvGrpSpPr>
-        <p:cNvPr id="1" name=""/>
-        <p:cNvGrpSpPr/>
-        <p:nvPr/>
-      </p:nvGrpSpPr>
-      <p:grpSpPr>
-        <a:xfrm>
-          <a:off x="0" y="0"/>
-          <a:ext cx="0" cy="0"/>
-          <a:chOff x="0" y="0"/>
-          <a:chExt cx="0" cy="0"/>
-        </a:xfrm>
-      </p:grpSpPr>
-      <p:sp>
-        <p:nvSpPr>
-          <p:cNvPr id="2" name="Slide Image Placeholder 1"/>
-          <p:cNvSpPr>
-            <a:spLocks noGrp="1" noRot="1" noChangeAspect="1"/>
-          </p:cNvSpPr>
-          <p:nvPr>
-            <p:ph type="sldImg"/>
-          </p:nvPr>
-        </p:nvSpPr>
-        <p:spPr/>
-      </p:sp>
-      <p:sp>
-        <p:nvSpPr>
-          <p:cNvPr id="3" name="Notes Placeholder 2"/>
-          <p:cNvSpPr>
-            <a:spLocks noGrp="1"/>
-          </p:cNvSpPr>
-          <p:nvPr>
-            <p:ph type="body" idx="1"/>
-          </p:nvPr>
-        </p:nvSpPr>
-        <p:spPr/>
-        <p:txBody>
-          <a:bodyPr/>
-          <a:lstStyle/>
-          <a:p>
-            <a:r>
-              <a:rPr lang="en-US" dirty="0"/>
-              <a:t/>
-            </a:r>
-            <a:endParaRPr lang="en-US" dirty="0"/>
-          </a:p>
-        </p:txBody>
-      </p:sp>
-      <p:sp>
-        <p:nvSpPr>
-          <p:cNvPr id="4" name="Slide Number Placeholder 3"/>
-          <p:cNvSpPr>
-            <a:spLocks noGrp="1"/>
-          </p:cNvSpPr>
-          <p:nvPr>
-            <p:ph type="sldNum" sz="quarter" idx="10"/>
-          </p:nvPr>
-        </p:nvSpPr>
-        <p:spPr/>
-        <p:txBody>
-          <a:bodyPr/>
-          <a:lstStyle/>
-          <a:p>
-            <a:fld id="{F7021451-1387-4CA6-816F-3879F97B5CBC}" type="slidenum">
-              <a:rPr lang="en-US"/>
-              <a:t>5</a:t>
-            </a:fld>
-            <a:endParaRPr lang="en-US"/>
-          </a:p>
-        </p:txBody>
-      </p:sp>
-    </p:spTree>
-    <p:extLst>
-      <p:ext uri="{BB962C8B-B14F-4D97-AF65-F5344CB8AC3E}">
-        <p14:creationId xmlns:p14="http://schemas.microsoft.com/office/powerpoint/2010/main" val="1024086991"/>
-      </p:ext>
-    </p:extLst>
-  </p:cSld>
-  <p:clrMapOvr>
-    <a:masterClrMapping/>
-  </p:clrMapOvr>
-</p:notes>
-</file>
-
-<file path=ppt/notesSlides/notesSlide6.xml><?xml version="1.0" encoding="utf-8"?>
-<p:notes xmlns:a="http://schemas.openxmlformats.org/drawingml/2006/main" xmlns:r="http://schemas.openxmlformats.org/officeDocument/2006/relationships" xmlns:p="http://schemas.openxmlformats.org/presentationml/2006/main">
-  <p:cSld>
-    <p:spTree>
-      <p:nvGrpSpPr>
-        <p:cNvPr id="1" name=""/>
-        <p:cNvGrpSpPr/>
-        <p:nvPr/>
-      </p:nvGrpSpPr>
-      <p:grpSpPr>
-        <a:xfrm>
-          <a:off x="0" y="0"/>
-          <a:ext cx="0" cy="0"/>
-          <a:chOff x="0" y="0"/>
-          <a:chExt cx="0" cy="0"/>
-        </a:xfrm>
-      </p:grpSpPr>
-      <p:sp>
-        <p:nvSpPr>
-          <p:cNvPr id="2" name="Slide Image Placeholder 1"/>
-          <p:cNvSpPr>
-            <a:spLocks noGrp="1" noRot="1" noChangeAspect="1"/>
-          </p:cNvSpPr>
-          <p:nvPr>
-            <p:ph type="sldImg"/>
-          </p:nvPr>
-        </p:nvSpPr>
-        <p:spPr/>
-      </p:sp>
-      <p:sp>
-        <p:nvSpPr>
-          <p:cNvPr id="3" name="Notes Placeholder 2"/>
-          <p:cNvSpPr>
-            <a:spLocks noGrp="1"/>
-          </p:cNvSpPr>
-          <p:nvPr>
-            <p:ph type="body" idx="1"/>
-          </p:nvPr>
-        </p:nvSpPr>
-        <p:spPr/>
-        <p:txBody>
-          <a:bodyPr/>
-          <a:lstStyle/>
-          <a:p>
-            <a:r>
-              <a:rPr lang="en-US" dirty="0"/>
-              <a:t/>
-            </a:r>
-            <a:endParaRPr lang="en-US" dirty="0"/>
-          </a:p>
-        </p:txBody>
-      </p:sp>
-      <p:sp>
-        <p:nvSpPr>
-          <p:cNvPr id="4" name="Slide Number Placeholder 3"/>
-          <p:cNvSpPr>
-            <a:spLocks noGrp="1"/>
-          </p:cNvSpPr>
-          <p:nvPr>
-            <p:ph type="sldNum" sz="quarter" idx="10"/>
-          </p:nvPr>
-        </p:nvSpPr>
-        <p:spPr/>
-        <p:txBody>
-          <a:bodyPr/>
-          <a:lstStyle/>
-          <a:p>
-            <a:fld id="{F7021451-1387-4CA6-816F-3879F97B5CBC}" type="slidenum">
-              <a:rPr lang="en-US"/>
-              <a:t>6</a:t>
-            </a:fld>
-            <a:endParaRPr lang="en-US"/>
-          </a:p>
-        </p:txBody>
-      </p:sp>
-    </p:spTree>
-    <p:extLst>
-      <p:ext uri="{BB962C8B-B14F-4D97-AF65-F5344CB8AC3E}">
-        <p14:creationId xmlns:p14="http://schemas.microsoft.com/office/powerpoint/2010/main" val="1024086991"/>
-      </p:ext>
-    </p:extLst>
-  </p:cSld>
-  <p:clrMapOvr>
-    <a:masterClrMapping/>
-  </p:clrMapOvr>
-</p:notes>
-</file>
-
-<file path=ppt/notesSlides/notesSlide7.xml><?xml version="1.0" encoding="utf-8"?>
-<p:notes xmlns:a="http://schemas.openxmlformats.org/drawingml/2006/main" xmlns:r="http://schemas.openxmlformats.org/officeDocument/2006/relationships" xmlns:p="http://schemas.openxmlformats.org/presentationml/2006/main">
-  <p:cSld>
-    <p:spTree>
-      <p:nvGrpSpPr>
-        <p:cNvPr id="1" name=""/>
-        <p:cNvGrpSpPr/>
-        <p:nvPr/>
-      </p:nvGrpSpPr>
-      <p:grpSpPr>
-        <a:xfrm>
-          <a:off x="0" y="0"/>
-          <a:ext cx="0" cy="0"/>
-          <a:chOff x="0" y="0"/>
-          <a:chExt cx="0" cy="0"/>
-        </a:xfrm>
-      </p:grpSpPr>
-      <p:sp>
-        <p:nvSpPr>
-          <p:cNvPr id="2" name="Slide Image Placeholder 1"/>
-          <p:cNvSpPr>
-            <a:spLocks noGrp="1" noRot="1" noChangeAspect="1"/>
-          </p:cNvSpPr>
-          <p:nvPr>
-            <p:ph type="sldImg"/>
-          </p:nvPr>
-        </p:nvSpPr>
-        <p:spPr/>
-      </p:sp>
-      <p:sp>
-        <p:nvSpPr>
-          <p:cNvPr id="3" name="Notes Placeholder 2"/>
-          <p:cNvSpPr>
-            <a:spLocks noGrp="1"/>
-          </p:cNvSpPr>
-          <p:nvPr>
-            <p:ph type="body" idx="1"/>
-          </p:nvPr>
-        </p:nvSpPr>
-        <p:spPr/>
-        <p:txBody>
-          <a:bodyPr/>
-          <a:lstStyle/>
-          <a:p>
-            <a:r>
-              <a:rPr lang="en-US" dirty="0"/>
-              <a:t/>
-            </a:r>
-            <a:endParaRPr lang="en-US" dirty="0"/>
-          </a:p>
-        </p:txBody>
-      </p:sp>
-      <p:sp>
-        <p:nvSpPr>
-          <p:cNvPr id="4" name="Slide Number Placeholder 3"/>
-          <p:cNvSpPr>
-            <a:spLocks noGrp="1"/>
-          </p:cNvSpPr>
-          <p:nvPr>
-            <p:ph type="sldNum" sz="quarter" idx="10"/>
-          </p:nvPr>
-        </p:nvSpPr>
-        <p:spPr/>
-        <p:txBody>
-          <a:bodyPr/>
-          <a:lstStyle/>
-          <a:p>
-            <a:fld id="{F7021451-1387-4CA6-816F-3879F97B5CBC}" type="slidenum">
-              <a:rPr lang="en-US"/>
-              <a:t>7</a:t>
-            </a:fld>
-            <a:endParaRPr lang="en-US"/>
-          </a:p>
-        </p:txBody>
-      </p:sp>
-    </p:spTree>
-    <p:extLst>
-      <p:ext uri="{BB962C8B-B14F-4D97-AF65-F5344CB8AC3E}">
-        <p14:creationId xmlns:p14="http://schemas.microsoft.com/office/powerpoint/2010/main" val="1024086991"/>
-      </p:ext>
-    </p:extLst>
-  </p:cSld>
-  <p:clrMapOvr>
-    <a:masterClrMapping/>
-  </p:clrMapOvr>
-</p:notes>
-</file>
-
-<file path=ppt/notesSlides/notesSlide8.xml><?xml version="1.0" encoding="utf-8"?>
-<p:notes xmlns:a="http://schemas.openxmlformats.org/drawingml/2006/main" xmlns:r="http://schemas.openxmlformats.org/officeDocument/2006/relationships" xmlns:p="http://schemas.openxmlformats.org/presentationml/2006/main">
-  <p:cSld>
-    <p:spTree>
-      <p:nvGrpSpPr>
-        <p:cNvPr id="1" name=""/>
-        <p:cNvGrpSpPr/>
-        <p:nvPr/>
-      </p:nvGrpSpPr>
-      <p:grpSpPr>
-        <a:xfrm>
-          <a:off x="0" y="0"/>
-          <a:ext cx="0" cy="0"/>
-          <a:chOff x="0" y="0"/>
-          <a:chExt cx="0" cy="0"/>
-        </a:xfrm>
-      </p:grpSpPr>
-      <p:sp>
-        <p:nvSpPr>
-          <p:cNvPr id="2" name="Slide Image Placeholder 1"/>
-          <p:cNvSpPr>
-            <a:spLocks noGrp="1" noRot="1" noChangeAspect="1"/>
-          </p:cNvSpPr>
-          <p:nvPr>
-            <p:ph type="sldImg"/>
-          </p:nvPr>
-        </p:nvSpPr>
-        <p:spPr/>
-      </p:sp>
-      <p:sp>
-        <p:nvSpPr>
-          <p:cNvPr id="3" name="Notes Placeholder 2"/>
-          <p:cNvSpPr>
-            <a:spLocks noGrp="1"/>
-          </p:cNvSpPr>
-          <p:nvPr>
-            <p:ph type="body" idx="1"/>
-          </p:nvPr>
-        </p:nvSpPr>
-        <p:spPr/>
-        <p:txBody>
-          <a:bodyPr/>
-          <a:lstStyle/>
-          <a:p>
-            <a:r>
-              <a:rPr lang="en-US" dirty="0"/>
-              <a:t/>
-            </a:r>
-            <a:endParaRPr lang="en-US" dirty="0"/>
-          </a:p>
-        </p:txBody>
-      </p:sp>
-      <p:sp>
-        <p:nvSpPr>
-          <p:cNvPr id="4" name="Slide Number Placeholder 3"/>
-          <p:cNvSpPr>
-            <a:spLocks noGrp="1"/>
-          </p:cNvSpPr>
-          <p:nvPr>
-            <p:ph type="sldNum" sz="quarter" idx="10"/>
-          </p:nvPr>
-        </p:nvSpPr>
-        <p:spPr/>
-        <p:txBody>
-          <a:bodyPr/>
-          <a:lstStyle/>
-          <a:p>
-            <a:fld id="{F7021451-1387-4CA6-816F-3879F97B5CBC}" type="slidenum">
-              <a:rPr lang="en-US"/>
-              <a:t>8</a:t>
-            </a:fld>
-            <a:endParaRPr lang="en-US"/>
-          </a:p>
-        </p:txBody>
-      </p:sp>
-    </p:spTree>
-    <p:extLst>
-      <p:ext uri="{BB962C8B-B14F-4D97-AF65-F5344CB8AC3E}">
-        <p14:creationId xmlns:p14="http://schemas.microsoft.com/office/powerpoint/2010/main" val="1024086991"/>
-      </p:ext>
-    </p:extLst>
-  </p:cSld>
-  <p:clrMapOvr>
-    <a:masterClrMapping/>
-  </p:clrMapOvr>
-</p:notes>
-</file>
-
-<file path=ppt/notesSlides/notesSlide9.xml><?xml version="1.0" encoding="utf-8"?>
-<p:notes xmlns:a="http://schemas.openxmlformats.org/drawingml/2006/main" xmlns:r="http://schemas.openxmlformats.org/officeDocument/2006/relationships" xmlns:p="http://schemas.openxmlformats.org/presentationml/2006/main">
-  <p:cSld>
-    <p:spTree>
-      <p:nvGrpSpPr>
-        <p:cNvPr id="1" name=""/>
-        <p:cNvGrpSpPr/>
-        <p:nvPr/>
-      </p:nvGrpSpPr>
-      <p:grpSpPr>
-        <a:xfrm>
-          <a:off x="0" y="0"/>
-          <a:ext cx="0" cy="0"/>
-          <a:chOff x="0" y="0"/>
-          <a:chExt cx="0" cy="0"/>
-        </a:xfrm>
-      </p:grpSpPr>
-      <p:sp>
-        <p:nvSpPr>
-          <p:cNvPr id="2" name="Slide Image Placeholder 1"/>
-          <p:cNvSpPr>
-            <a:spLocks noGrp="1" noRot="1" noChangeAspect="1"/>
-          </p:cNvSpPr>
-          <p:nvPr>
-            <p:ph type="sldImg"/>
-          </p:nvPr>
-        </p:nvSpPr>
-        <p:spPr/>
-      </p:sp>
-      <p:sp>
-        <p:nvSpPr>
-          <p:cNvPr id="3" name="Notes Placeholder 2"/>
-          <p:cNvSpPr>
-            <a:spLocks noGrp="1"/>
-          </p:cNvSpPr>
-          <p:nvPr>
-            <p:ph type="body" idx="1"/>
-          </p:nvPr>
-        </p:nvSpPr>
-        <p:spPr/>
-        <p:txBody>
-          <a:bodyPr/>
-          <a:lstStyle/>
-          <a:p>
-            <a:r>
-              <a:rPr lang="en-US" dirty="0"/>
-              <a:t/>
-            </a:r>
-            <a:endParaRPr lang="en-US" dirty="0"/>
-          </a:p>
-        </p:txBody>
-      </p:sp>
-      <p:sp>
-        <p:nvSpPr>
-          <p:cNvPr id="4" name="Slide Number Placeholder 3"/>
-          <p:cNvSpPr>
-            <a:spLocks noGrp="1"/>
-          </p:cNvSpPr>
-          <p:nvPr>
-            <p:ph type="sldNum" sz="quarter" idx="10"/>
-          </p:nvPr>
-        </p:nvSpPr>
-        <p:spPr/>
-        <p:txBody>
-          <a:bodyPr/>
-          <a:lstStyle/>
-          <a:p>
-            <a:fld id="{F7021451-1387-4CA6-816F-3879F97B5CBC}" type="slidenum">
-              <a:rPr lang="en-US"/>
-              <a:t>9</a:t>
-            </a:fld>
-            <a:endParaRPr lang="en-US"/>
-          </a:p>
-        </p:txBody>
-      </p:sp>
-    </p:spTree>
-    <p:extLst>
-      <p:ext uri="{BB962C8B-B14F-4D97-AF65-F5344CB8AC3E}">
-        <p14:creationId xmlns:p14="http://schemas.microsoft.com/office/powerpoint/2010/main" val="1024086991"/>
-      </p:ext>
-    </p:extLst>
-  </p:cSld>
-  <p:clrMapOvr>
-    <a:masterClrMapping/>
-  </p:clrMapOvr>
-</p:notes>
-</file>
-
-<file path=ppt/slideLayouts/slideLayout1.xml><?xml version="1.0" encoding="utf-8"?>
+<file path=ppt\slideLayouts\slideLayout1.xml><?xml version="1.0" encoding="utf-8"?>
 <p:sldLayout xmlns:a="http://schemas.openxmlformats.org/drawingml/2006/main" xmlns:r="http://schemas.openxmlformats.org/officeDocument/2006/relationships" xmlns:p="http://schemas.openxmlformats.org/presentationml/2006/main" preserve="1">
   <p:cSld name="DEFAULT">
     <p:bg>
@@ -1375,9 +1412,14 @@
 </p:sldLayout>
 </file>
 
-<file path=ppt/slideMasters/slideMaster1.xml><?xml version="1.0" encoding="utf-8"?>
+<file path=ppt\slideMasters\slideMaster1.xml><?xml version="1.0" encoding="utf-8"?>
 <p:sldMaster xmlns:a="http://schemas.openxmlformats.org/drawingml/2006/main" xmlns:r="http://schemas.openxmlformats.org/officeDocument/2006/relationships" xmlns:p="http://schemas.openxmlformats.org/presentationml/2006/main">
   <p:cSld>
+    <p:bg>
+      <p:bgRef idx="1001">
+        <a:schemeClr val="bg1"/>
+      </p:bgRef>
+    </p:bg>
     <p:spTree>
       <p:nvGrpSpPr>
         <p:cNvPr id="1" name=""/>
@@ -1652,7 +1694,7 @@
 </p:sldMaster>
 </file>
 
-<file path=ppt/slides/slide1.xml><?xml version="1.0" encoding="utf-8"?>
+<file path=ppt\slides\slide1.xml><?xml version="1.0" encoding="utf-8"?>
 <p:sld xmlns:a="http://schemas.openxmlformats.org/drawingml/2006/main" xmlns:r="http://schemas.openxmlformats.org/officeDocument/2006/relationships" xmlns:p="http://schemas.openxmlformats.org/presentationml/2006/main">
   <p:cSld name="Slide 1">
     <p:bg>
@@ -1660,6 +1702,7 @@
         <a:solidFill>
           <a:srgbClr val="1A3A8C"/>
         </a:solidFill>
+        <a:effectLst/>
       </p:bgPr>
     </p:bg>
     <p:spTree>
@@ -1695,7 +1738,7 @@
           </a:solidFill>
           <a:ln/>
           <a:effectLst>
-            <a:outerShdw sx="100000" sy="100000" kx="0" ky="0" algn="bl" rotWithShape="0" blurRad="304800" dist="50800" dir="5400000">
+            <a:outerShdw blurRad="304800" dist="50800" dir="5400000" algn="bl" rotWithShape="0">
               <a:srgbClr val="000000">
                 <a:alpha val="25000"/>
               </a:srgbClr>
@@ -1724,7 +1767,7 @@
           <a:bodyPr wrap="square" lIns="0" tIns="0" rIns="0" bIns="0" rtlCol="0" anchor="ctr"/>
           <a:lstStyle/>
           <a:p>
-            <a:pPr algn="ctr" indent="0" marL="0">
+            <a:pPr marL="0" indent="0" algn="ctr">
               <a:buNone/>
             </a:pPr>
             <a:r>
@@ -1783,11 +1826,11 @@
           <a:bodyPr wrap="square" lIns="0" tIns="0" rIns="0" bIns="0" rtlCol="0" anchor="ctr"/>
           <a:lstStyle/>
           <a:p>
-            <a:pPr indent="0" marL="0">
-              <a:buNone/>
-            </a:pPr>
-            <a:r>
-              <a:rPr lang="en-US" sz="7200" b="1" spc="-100" kern="0" dirty="0">
+            <a:pPr marL="0" indent="0">
+              <a:buNone/>
+            </a:pPr>
+            <a:r>
+              <a:rPr lang="en-US" sz="7200" b="1" kern="0" spc="-100" dirty="0">
                 <a:solidFill>
                   <a:srgbClr val="FFFFFF"/>
                 </a:solidFill>
@@ -1822,7 +1865,7 @@
           <a:bodyPr wrap="square" lIns="0" tIns="0" rIns="0" bIns="0" rtlCol="0" anchor="ctr"/>
           <a:lstStyle/>
           <a:p>
-            <a:pPr indent="0" marL="0">
+            <a:pPr marL="0" indent="0">
               <a:buNone/>
             </a:pPr>
             <a:r>
@@ -1861,7 +1904,7 @@
           <a:bodyPr wrap="square" lIns="0" tIns="0" rIns="0" bIns="0" rtlCol="0" anchor="t"/>
           <a:lstStyle/>
           <a:p>
-            <a:pPr algn="l" indent="0" marL="0">
+            <a:pPr marL="0" indent="0" algn="l">
               <a:buNone/>
             </a:pPr>
             <a:r>
@@ -1878,7 +1921,7 @@
             <a:endParaRPr lang="en-US" sz="4000" dirty="0"/>
           </a:p>
           <a:p>
-            <a:pPr algn="l" indent="0" marL="0">
+            <a:pPr marL="0" indent="0" algn="l">
               <a:buNone/>
             </a:pPr>
             <a:r>
@@ -1917,7 +1960,7 @@
           <a:bodyPr wrap="square" rtlCol="0" anchor="ctr"/>
           <a:lstStyle/>
           <a:p>
-            <a:pPr algn="l" indent="0" marL="0">
+            <a:pPr marL="0" indent="0" algn="l">
               <a:buNone/>
             </a:pPr>
             <a:r>
@@ -1956,9 +1999,31 @@
           <a:bodyPr wrap="square" rtlCol="0" anchor="ctr"/>
           <a:lstStyle/>
           <a:p>
-            <a:pPr algn="r" indent="0" marL="0">
-              <a:buNone/>
-            </a:pPr>
+            <a:pPr marL="0" indent="0" algn="r">
+              <a:buNone/>
+            </a:pPr>
+            <a:r>
+              <a:rPr lang="ko-KR" altLang="en-US" sz="1200" i="1" dirty="0" smtClean="0">
+                <a:solidFill>
+                  <a:srgbClr val="CADCFC"/>
+                </a:solidFill>
+                <a:latin typeface="Malgun Gothic" pitchFamily="34" charset="0"/>
+                <a:ea typeface="Malgun Gothic" pitchFamily="34" charset="-122"/>
+                <a:cs typeface="Malgun Gothic" pitchFamily="34" charset="-120"/>
+              </a:rPr>
+              <a:t>송 하 준</a:t>
+            </a:r>
+            <a:r>
+              <a:rPr lang="en-US" sz="1200" i="1" dirty="0" smtClean="0">
+                <a:solidFill>
+                  <a:srgbClr val="CADCFC"/>
+                </a:solidFill>
+                <a:latin typeface="Malgun Gothic" pitchFamily="34" charset="0"/>
+                <a:ea typeface="Malgun Gothic" pitchFamily="34" charset="-122"/>
+                <a:cs typeface="Malgun Gothic" pitchFamily="34" charset="-120"/>
+              </a:rPr>
+              <a:t> </a:t>
+            </a:r>
             <a:r>
               <a:rPr lang="en-US" sz="1200" i="1" dirty="0">
                 <a:solidFill>
@@ -1968,7 +2033,7 @@
                 <a:ea typeface="Malgun Gothic" pitchFamily="34" charset="-122"/>
                 <a:cs typeface="Malgun Gothic" pitchFamily="34" charset="-120"/>
               </a:rPr>
-              <a:t>AlexSong0674 · 2026.05 · ASSIST</a:t>
+              <a:t>· 2026.05 · ASSIST</a:t>
             </a:r>
             <a:endParaRPr lang="en-US" sz="1200" dirty="0"/>
           </a:p>
@@ -2015,7 +2080,7 @@
           <a:bodyPr wrap="square" rtlCol="0" anchor="ctr"/>
           <a:lstStyle/>
           <a:p>
-            <a:pPr indent="0" marL="0">
+            <a:pPr marL="0" indent="0">
               <a:buNone/>
             </a:pPr>
             <a:r>
@@ -2041,7 +2106,7 @@
 </p:sld>
 </file>
 
-<file path=ppt/slides/slide10.xml><?xml version="1.0" encoding="utf-8"?>
+<file path=ppt\slides\slide10.xml><?xml version="1.0" encoding="utf-8"?>
 <p:sld xmlns:a="http://schemas.openxmlformats.org/drawingml/2006/main" xmlns:r="http://schemas.openxmlformats.org/officeDocument/2006/relationships" xmlns:p="http://schemas.openxmlformats.org/presentationml/2006/main">
   <p:cSld name="Slide 10">
     <p:bg>
@@ -2049,6 +2114,7 @@
         <a:solidFill>
           <a:srgbClr val="1A3A8C"/>
         </a:solidFill>
+        <a:effectLst/>
       </p:bgPr>
     </p:bg>
     <p:spTree>
@@ -2086,7 +2152,7 @@
           <a:bodyPr wrap="square" lIns="0" tIns="0" rIns="0" bIns="0" rtlCol="0" anchor="ctr"/>
           <a:lstStyle/>
           <a:p>
-            <a:pPr indent="0" marL="0">
+            <a:pPr marL="0" indent="0">
               <a:buNone/>
             </a:pPr>
             <a:r>
@@ -2125,7 +2191,7 @@
           <a:bodyPr wrap="square" lIns="0" tIns="0" rIns="0" bIns="0" rtlCol="0" anchor="ctr"/>
           <a:lstStyle/>
           <a:p>
-            <a:pPr indent="0" marL="0">
+            <a:pPr marL="0" indent="0">
               <a:buNone/>
             </a:pPr>
             <a:r>
@@ -2164,7 +2230,7 @@
           <a:bodyPr wrap="square" lIns="0" tIns="0" rIns="0" bIns="0" rtlCol="0" anchor="ctr"/>
           <a:lstStyle/>
           <a:p>
-            <a:pPr indent="0" marL="0">
+            <a:pPr marL="0" indent="0">
               <a:buNone/>
             </a:pPr>
             <a:r>
@@ -2203,7 +2269,7 @@
           <a:bodyPr wrap="square" lIns="0" tIns="0" rIns="0" bIns="0" rtlCol="0" anchor="ctr"/>
           <a:lstStyle/>
           <a:p>
-            <a:pPr indent="0" marL="0">
+            <a:pPr marL="0" indent="0">
               <a:buNone/>
             </a:pPr>
             <a:r>
@@ -2242,20 +2308,17 @@
           <a:bodyPr wrap="square" lIns="0" tIns="0" rIns="0" bIns="0" rtlCol="0" anchor="ctr"/>
           <a:lstStyle/>
           <a:p>
-            <a:pPr indent="0" marL="0">
-              <a:buNone/>
-            </a:pPr>
-            <a:r>
-              <a:rPr lang="en-US" sz="1200" b="1" spc="200" kern="0" dirty="0">
+            <a:pPr marL="0" indent="0">
+              <a:buNone/>
+            </a:pPr>
+            <a:r>
+              <a:rPr lang="en-US" sz="1200" b="1" kern="0" spc="200" dirty="0">
                 <a:solidFill>
                   <a:srgbClr val="FBBF24"/>
                 </a:solidFill>
               </a:rPr>
               <a:t>데모  </a:t>
             </a:r>
-            <a:pPr indent="0" marL="0">
-              <a:buNone/>
-            </a:pPr>
             <a:r>
               <a:rPr lang="en-US" sz="1400" dirty="0">
                 <a:solidFill>
@@ -2292,20 +2355,17 @@
           <a:bodyPr wrap="square" lIns="0" tIns="0" rIns="0" bIns="0" rtlCol="0" anchor="ctr"/>
           <a:lstStyle/>
           <a:p>
-            <a:pPr indent="0" marL="0">
-              <a:buNone/>
-            </a:pPr>
-            <a:r>
-              <a:rPr lang="en-US" sz="1200" b="1" spc="200" kern="0" dirty="0">
+            <a:pPr marL="0" indent="0">
+              <a:buNone/>
+            </a:pPr>
+            <a:r>
+              <a:rPr lang="en-US" sz="1200" b="1" kern="0" spc="200" dirty="0">
                 <a:solidFill>
                   <a:srgbClr val="FBBF24"/>
                 </a:solidFill>
               </a:rPr>
               <a:t>기획  </a:t>
             </a:r>
-            <a:pPr indent="0" marL="0">
-              <a:buNone/>
-            </a:pPr>
             <a:r>
               <a:rPr lang="en-US" sz="1400" dirty="0">
                 <a:solidFill>
@@ -2315,7 +2375,7 @@
                 <a:ea typeface="Consolas" pitchFamily="34" charset="-122"/>
                 <a:cs typeface="Consolas" pitchFamily="34" charset="-120"/>
               </a:rPr>
-              <a:t>github.com/AlexSong0674/test</a:t>
+              <a:t>github.com/송 하 준/test</a:t>
             </a:r>
             <a:endParaRPr lang="en-US" sz="1200" dirty="0"/>
           </a:p>
@@ -2342,20 +2402,25 @@
           <a:bodyPr wrap="square" lIns="0" tIns="0" rIns="0" bIns="0" rtlCol="0" anchor="ctr"/>
           <a:lstStyle/>
           <a:p>
-            <a:pPr indent="0" marL="0">
-              <a:buNone/>
-            </a:pPr>
-            <a:r>
-              <a:rPr lang="en-US" sz="1200" b="1" spc="200" kern="0" dirty="0">
+            <a:pPr marL="0" indent="0">
+              <a:buNone/>
+            </a:pPr>
+            <a:r>
+              <a:rPr lang="en-US" sz="1200" b="1" kern="0" spc="200" dirty="0" err="1">
                 <a:solidFill>
                   <a:srgbClr val="FBBF24"/>
                 </a:solidFill>
               </a:rPr>
-              <a:t>연락  </a:t>
-            </a:r>
-            <a:pPr indent="0" marL="0">
-              <a:buNone/>
-            </a:pPr>
+              <a:t>연락</a:t>
+            </a:r>
+            <a:r>
+              <a:rPr lang="en-US" sz="1200" b="1" kern="0" spc="200" dirty="0">
+                <a:solidFill>
+                  <a:srgbClr val="FBBF24"/>
+                </a:solidFill>
+              </a:rPr>
+              <a:t>  </a:t>
+            </a:r>
             <a:r>
               <a:rPr lang="en-US" sz="1400" dirty="0">
                 <a:solidFill>
@@ -2365,7 +2430,18 @@
                 <a:ea typeface="Consolas" pitchFamily="34" charset="-122"/>
                 <a:cs typeface="Consolas" pitchFamily="34" charset="-120"/>
               </a:rPr>
-              <a:t>alexsong0674@gmail.com</a:t>
+              <a:t>junioppa@</a:t>
+            </a:r>
+            <a:r>
+              <a:rPr lang="en-US" sz="1400" dirty="0" smtClean="0">
+                <a:solidFill>
+                  <a:srgbClr val="FFFFFF"/>
+                </a:solidFill>
+                <a:latin typeface="Consolas" pitchFamily="34" charset="0"/>
+                <a:ea typeface="Consolas" pitchFamily="34" charset="-122"/>
+                <a:cs typeface="Consolas" pitchFamily="34" charset="-120"/>
+              </a:rPr>
+              <a:t>gmail.com</a:t>
             </a:r>
             <a:endParaRPr lang="en-US" sz="1200" dirty="0"/>
           </a:p>
@@ -2392,7 +2468,7 @@
           </a:solidFill>
           <a:ln/>
           <a:effectLst>
-            <a:outerShdw sx="100000" sy="100000" kx="0" ky="0" algn="bl" rotWithShape="0" blurRad="254000" dist="76200" dir="5400000">
+            <a:outerShdw blurRad="254000" dist="76200" dir="5400000" algn="bl" rotWithShape="0">
               <a:srgbClr val="000000">
                 <a:alpha val="35000"/>
               </a:srgbClr>
@@ -2402,14 +2478,14 @@
       </p:sp>
       <p:pic>
         <p:nvPicPr>
-          <p:cNvPr id="10" name="Image 0" descr="C:\Users\송 하 준\Documents\알토대학원\수업과제\벤처 스타트업\기획서\.claude\worktrees\hungry-austin-6b4740\Voyna_라이브_QR.png">    </p:cNvPr>
+          <p:cNvPr id="10" name="Image 0" descr="C:\Users\송 하 준\Documents\알토대학원\수업과제\벤처 스타트업\기획서\.claude\worktrees\hungry-austin-6b4740\Voyna_라이브_QR.png"/>
           <p:cNvPicPr>
             <a:picLocks noChangeAspect="1"/>
           </p:cNvPicPr>
           <p:nvPr/>
         </p:nvPicPr>
         <p:blipFill>
-          <a:blip r:embed="rId1"/>
+          <a:blip r:embed="rId3"/>
           <a:stretch>
             <a:fillRect/>
           </a:stretch>
@@ -2445,7 +2521,7 @@
           <a:bodyPr wrap="square" lIns="0" tIns="0" rIns="0" bIns="0" rtlCol="0" anchor="ctr"/>
           <a:lstStyle/>
           <a:p>
-            <a:pPr algn="ctr" indent="0" marL="0">
+            <a:pPr marL="0" indent="0" algn="ctr">
               <a:buNone/>
             </a:pPr>
             <a:r>
@@ -2471,7 +2547,7 @@
 </p:sld>
 </file>
 
-<file path=ppt/slides/slide2.xml><?xml version="1.0" encoding="utf-8"?>
+<file path=ppt\slides\slide2.xml><?xml version="1.0" encoding="utf-8"?>
 <p:sld xmlns:a="http://schemas.openxmlformats.org/drawingml/2006/main" xmlns:r="http://schemas.openxmlformats.org/officeDocument/2006/relationships" xmlns:p="http://schemas.openxmlformats.org/presentationml/2006/main">
   <p:cSld name="Slide 2">
     <p:bg>
@@ -2479,6 +2555,7 @@
         <a:solidFill>
           <a:srgbClr val="F7F9FC"/>
         </a:solidFill>
+        <a:effectLst/>
       </p:bgPr>
     </p:bg>
     <p:spTree>
@@ -2516,7 +2593,7 @@
           <a:bodyPr wrap="square" lIns="0" tIns="0" rIns="0" bIns="0" rtlCol="0" anchor="ctr"/>
           <a:lstStyle/>
           <a:p>
-            <a:pPr indent="0" marL="0">
+            <a:pPr marL="0" indent="0">
               <a:buNone/>
             </a:pPr>
             <a:r>
@@ -2555,7 +2632,7 @@
           <a:bodyPr wrap="square" lIns="0" tIns="0" rIns="0" bIns="0" rtlCol="0" anchor="ctr"/>
           <a:lstStyle/>
           <a:p>
-            <a:pPr indent="0" marL="0">
+            <a:pPr marL="0" indent="0">
               <a:buNone/>
             </a:pPr>
             <a:r>
@@ -2594,7 +2671,7 @@
           <a:bodyPr wrap="square" lIns="0" tIns="0" rIns="0" bIns="0" rtlCol="0" anchor="ctr"/>
           <a:lstStyle/>
           <a:p>
-            <a:pPr indent="0" marL="0">
+            <a:pPr marL="0" indent="0">
               <a:buNone/>
             </a:pPr>
             <a:r>
@@ -2633,7 +2710,7 @@
           <a:bodyPr wrap="square" rtlCol="0" anchor="ctr"/>
           <a:lstStyle/>
           <a:p>
-            <a:pPr indent="0" marL="0">
+            <a:pPr marL="0" indent="0">
               <a:buNone/>
             </a:pPr>
             <a:r>
@@ -2650,7 +2727,7 @@
             <a:endParaRPr lang="en-US" sz="1300" dirty="0"/>
           </a:p>
           <a:p>
-            <a:pPr indent="0" marL="0">
+            <a:pPr marL="0" indent="0">
               <a:buNone/>
             </a:pPr>
             <a:r>
@@ -2709,7 +2786,7 @@
           <a:bodyPr wrap="square" rtlCol="0" anchor="ctr"/>
           <a:lstStyle/>
           <a:p>
-            <a:pPr algn="l" indent="0" marL="0">
+            <a:pPr marL="0" indent="0" algn="l">
               <a:buNone/>
             </a:pPr>
             <a:r>
@@ -2721,7 +2798,51 @@
                 <a:ea typeface="Malgun Gothic" pitchFamily="34" charset="-122"/>
                 <a:cs typeface="Malgun Gothic" pitchFamily="34" charset="-120"/>
               </a:rPr>
-              <a:t>Voyna · 알토대학원 ASSIST 벤처 스타트업</a:t>
+              <a:t>Voyna · </a:t>
+            </a:r>
+            <a:r>
+              <a:rPr lang="en-US" sz="900" dirty="0" err="1">
+                <a:solidFill>
+                  <a:srgbClr val="6B7280"/>
+                </a:solidFill>
+                <a:latin typeface="Malgun Gothic" pitchFamily="34" charset="0"/>
+                <a:ea typeface="Malgun Gothic" pitchFamily="34" charset="-122"/>
+                <a:cs typeface="Malgun Gothic" pitchFamily="34" charset="-120"/>
+              </a:rPr>
+              <a:t>알토대학원</a:t>
+            </a:r>
+            <a:r>
+              <a:rPr lang="en-US" sz="900" dirty="0">
+                <a:solidFill>
+                  <a:srgbClr val="6B7280"/>
+                </a:solidFill>
+                <a:latin typeface="Malgun Gothic" pitchFamily="34" charset="0"/>
+                <a:ea typeface="Malgun Gothic" pitchFamily="34" charset="-122"/>
+                <a:cs typeface="Malgun Gothic" pitchFamily="34" charset="-120"/>
+              </a:rPr>
+              <a:t> </a:t>
+            </a:r>
+            <a:r>
+              <a:rPr lang="en-US" sz="900" dirty="0" smtClean="0">
+                <a:solidFill>
+                  <a:srgbClr val="6B7280"/>
+                </a:solidFill>
+                <a:latin typeface="Malgun Gothic" pitchFamily="34" charset="0"/>
+                <a:ea typeface="Malgun Gothic" pitchFamily="34" charset="-122"/>
+                <a:cs typeface="Malgun Gothic" pitchFamily="34" charset="-120"/>
+              </a:rPr>
+              <a:t>ASSIST New </a:t>
+            </a:r>
+            <a:r>
+              <a:rPr lang="en-US" sz="900" dirty="0">
+                <a:solidFill>
+                  <a:srgbClr val="6B7280"/>
+                </a:solidFill>
+                <a:latin typeface="Malgun Gothic" pitchFamily="34" charset="0"/>
+                <a:ea typeface="Malgun Gothic" pitchFamily="34" charset="-122"/>
+                <a:cs typeface="Malgun Gothic" pitchFamily="34" charset="-120"/>
+              </a:rPr>
+              <a:t>벤처 스타트업</a:t>
             </a:r>
             <a:endParaRPr lang="en-US" sz="900" dirty="0"/>
           </a:p>
@@ -2748,9 +2869,31 @@
           <a:bodyPr wrap="square" rtlCol="0" anchor="ctr"/>
           <a:lstStyle/>
           <a:p>
-            <a:pPr algn="r" indent="0" marL="0">
-              <a:buNone/>
-            </a:pPr>
+            <a:pPr marL="0" indent="0" algn="r">
+              <a:buNone/>
+            </a:pPr>
+            <a:r>
+              <a:rPr lang="ko-KR" altLang="en-US" sz="900" dirty="0" smtClean="0">
+                <a:solidFill>
+                  <a:srgbClr val="6B7280"/>
+                </a:solidFill>
+                <a:latin typeface="Malgun Gothic" pitchFamily="34" charset="0"/>
+                <a:ea typeface="Malgun Gothic" pitchFamily="34" charset="-122"/>
+                <a:cs typeface="Malgun Gothic" pitchFamily="34" charset="-120"/>
+              </a:rPr>
+              <a:t>송 하 준</a:t>
+            </a:r>
+            <a:r>
+              <a:rPr lang="en-US" sz="900" dirty="0" smtClean="0">
+                <a:solidFill>
+                  <a:srgbClr val="6B7280"/>
+                </a:solidFill>
+                <a:latin typeface="Malgun Gothic" pitchFamily="34" charset="0"/>
+                <a:ea typeface="Malgun Gothic" pitchFamily="34" charset="-122"/>
+                <a:cs typeface="Malgun Gothic" pitchFamily="34" charset="-120"/>
+              </a:rPr>
+              <a:t> </a:t>
+            </a:r>
             <a:r>
               <a:rPr lang="en-US" sz="900" dirty="0">
                 <a:solidFill>
@@ -2760,7 +2903,7 @@
                 <a:ea typeface="Malgun Gothic" pitchFamily="34" charset="-122"/>
                 <a:cs typeface="Malgun Gothic" pitchFamily="34" charset="-120"/>
               </a:rPr>
-              <a:t>AlexSong0674 / 2026-05</a:t>
+              <a:t>/ 2026-05</a:t>
             </a:r>
             <a:endParaRPr lang="en-US" sz="900" dirty="0"/>
           </a:p>
@@ -2774,7 +2917,7 @@
 </p:sld>
 </file>
 
-<file path=ppt/slides/slide3.xml><?xml version="1.0" encoding="utf-8"?>
+<file path=ppt\slides\slide3.xml><?xml version="1.0" encoding="utf-8"?>
 <p:sld xmlns:a="http://schemas.openxmlformats.org/drawingml/2006/main" xmlns:r="http://schemas.openxmlformats.org/officeDocument/2006/relationships" xmlns:p="http://schemas.openxmlformats.org/presentationml/2006/main">
   <p:cSld name="Slide 3">
     <p:bg>
@@ -2782,6 +2925,7 @@
         <a:solidFill>
           <a:srgbClr val="FFFFFF"/>
         </a:solidFill>
+        <a:effectLst/>
       </p:bgPr>
     </p:bg>
     <p:spTree>
@@ -2819,7 +2963,7 @@
           <a:bodyPr wrap="square" lIns="0" tIns="0" rIns="0" bIns="0" rtlCol="0" anchor="ctr"/>
           <a:lstStyle/>
           <a:p>
-            <a:pPr indent="0" marL="0">
+            <a:pPr marL="0" indent="0">
               <a:buNone/>
             </a:pPr>
             <a:r>
@@ -2858,7 +3002,7 @@
           <a:bodyPr wrap="square" lIns="0" tIns="0" rIns="0" bIns="0" rtlCol="0" anchor="ctr"/>
           <a:lstStyle/>
           <a:p>
-            <a:pPr indent="0" marL="0">
+            <a:pPr marL="0" indent="0">
               <a:buNone/>
             </a:pPr>
             <a:r>
@@ -2897,7 +3041,7 @@
           <a:bodyPr wrap="square" lIns="0" tIns="0" rIns="0" bIns="0" rtlCol="0" anchor="ctr"/>
           <a:lstStyle/>
           <a:p>
-            <a:pPr indent="0" marL="0">
+            <a:pPr marL="0" indent="0">
               <a:buNone/>
             </a:pPr>
             <a:r>
@@ -2936,7 +3080,7 @@
           <a:bodyPr wrap="square" lIns="0" tIns="0" rIns="0" bIns="0" rtlCol="0" anchor="ctr"/>
           <a:lstStyle/>
           <a:p>
-            <a:pPr indent="0" marL="0">
+            <a:pPr marL="0" indent="0">
               <a:buNone/>
             </a:pPr>
             <a:r>
@@ -3002,7 +3146,7 @@
           <a:bodyPr wrap="square" lIns="0" tIns="0" rIns="0" bIns="0" rtlCol="0" anchor="ctr"/>
           <a:lstStyle/>
           <a:p>
-            <a:pPr algn="ctr" indent="0" marL="0">
+            <a:pPr marL="0" indent="0" algn="ctr">
               <a:buNone/>
             </a:pPr>
             <a:r>
@@ -3068,7 +3212,7 @@
           <a:bodyPr wrap="square" lIns="0" tIns="0" rIns="0" bIns="0" rtlCol="0" anchor="ctr"/>
           <a:lstStyle/>
           <a:p>
-            <a:pPr algn="ctr" indent="0" marL="0">
+            <a:pPr marL="0" indent="0" algn="ctr">
               <a:buNone/>
             </a:pPr>
             <a:r>
@@ -3134,7 +3278,7 @@
           <a:bodyPr wrap="square" lIns="0" tIns="0" rIns="0" bIns="0" rtlCol="0" anchor="ctr"/>
           <a:lstStyle/>
           <a:p>
-            <a:pPr algn="ctr" indent="0" marL="0">
+            <a:pPr marL="0" indent="0" algn="ctr">
               <a:buNone/>
             </a:pPr>
             <a:r>
@@ -3173,7 +3317,7 @@
           <a:bodyPr wrap="square" lIns="0" tIns="0" rIns="0" bIns="0" rtlCol="0" anchor="ctr"/>
           <a:lstStyle/>
           <a:p>
-            <a:pPr indent="0" marL="0">
+            <a:pPr marL="0" indent="0">
               <a:buNone/>
             </a:pPr>
             <a:r>
@@ -3212,7 +3356,7 @@
           <a:bodyPr wrap="square" rtlCol="0" anchor="ctr"/>
           <a:lstStyle/>
           <a:p>
-            <a:pPr algn="l" indent="0" marL="0">
+            <a:pPr marL="0" indent="0" algn="l">
               <a:buNone/>
             </a:pPr>
             <a:r>
@@ -3224,7 +3368,7 @@
                 <a:ea typeface="Malgun Gothic" pitchFamily="34" charset="-122"/>
                 <a:cs typeface="Malgun Gothic" pitchFamily="34" charset="-120"/>
               </a:rPr>
-              <a:t>Voyna · 알토대학원 ASSIST 벤처 스타트업</a:t>
+              <a:t>Voyna · 알토대학원 ASSIST New 벤처 스타트업</a:t>
             </a:r>
             <a:endParaRPr lang="en-US" sz="900" dirty="0"/>
           </a:p>
@@ -3251,7 +3395,7 @@
           <a:bodyPr wrap="square" rtlCol="0" anchor="ctr"/>
           <a:lstStyle/>
           <a:p>
-            <a:pPr algn="r" indent="0" marL="0">
+            <a:pPr marL="0" indent="0" algn="r">
               <a:buNone/>
             </a:pPr>
             <a:r>
@@ -3263,7 +3407,7 @@
                 <a:ea typeface="Malgun Gothic" pitchFamily="34" charset="-122"/>
                 <a:cs typeface="Malgun Gothic" pitchFamily="34" charset="-120"/>
               </a:rPr>
-              <a:t>AlexSong0674 / 2026-05</a:t>
+              <a:t>송 하 준 / 2026-05</a:t>
             </a:r>
             <a:endParaRPr lang="en-US" sz="900" dirty="0"/>
           </a:p>
@@ -3277,7 +3421,7 @@
 </p:sld>
 </file>
 
-<file path=ppt/slides/slide4.xml><?xml version="1.0" encoding="utf-8"?>
+<file path=ppt\slides\slide4.xml><?xml version="1.0" encoding="utf-8"?>
 <p:sld xmlns:a="http://schemas.openxmlformats.org/drawingml/2006/main" xmlns:r="http://schemas.openxmlformats.org/officeDocument/2006/relationships" xmlns:p="http://schemas.openxmlformats.org/presentationml/2006/main">
   <p:cSld name="Slide 4">
     <p:bg>
@@ -3285,6 +3429,7 @@
         <a:solidFill>
           <a:srgbClr val="F7F9FC"/>
         </a:solidFill>
+        <a:effectLst/>
       </p:bgPr>
     </p:bg>
     <p:spTree>
@@ -3322,7 +3467,7 @@
           <a:bodyPr wrap="square" lIns="0" tIns="0" rIns="0" bIns="0" rtlCol="0" anchor="ctr"/>
           <a:lstStyle/>
           <a:p>
-            <a:pPr indent="0" marL="0">
+            <a:pPr marL="0" indent="0">
               <a:buNone/>
             </a:pPr>
             <a:r>
@@ -3361,7 +3506,7 @@
           <a:bodyPr wrap="square" lIns="0" tIns="0" rIns="0" bIns="0" rtlCol="0" anchor="ctr"/>
           <a:lstStyle/>
           <a:p>
-            <a:pPr indent="0" marL="0">
+            <a:pPr marL="0" indent="0">
               <a:buNone/>
             </a:pPr>
             <a:r>
@@ -3405,7 +3550,7 @@
             <a:prstDash val="solid"/>
           </a:ln>
           <a:effectLst>
-            <a:outerShdw sx="100000" sy="100000" kx="0" ky="0" algn="bl" rotWithShape="0" blurRad="152400" dist="38100" dir="5400000">
+            <a:outerShdw blurRad="152400" dist="38100" dir="5400000" algn="bl" rotWithShape="0">
               <a:srgbClr val="000000">
                 <a:alpha val="6000"/>
               </a:srgbClr>
@@ -3459,7 +3604,7 @@
           <a:bodyPr wrap="square" lIns="0" tIns="0" rIns="0" bIns="0" rtlCol="0" anchor="ctr"/>
           <a:lstStyle/>
           <a:p>
-            <a:pPr algn="ctr" indent="0" marL="0">
+            <a:pPr marL="0" indent="0" algn="ctr">
               <a:buNone/>
             </a:pPr>
             <a:r>
@@ -3498,7 +3643,7 @@
           <a:bodyPr wrap="square" lIns="0" tIns="0" rIns="0" bIns="0" rtlCol="0" anchor="ctr"/>
           <a:lstStyle/>
           <a:p>
-            <a:pPr algn="ctr" indent="0" marL="0">
+            <a:pPr marL="0" indent="0" algn="ctr">
               <a:buNone/>
             </a:pPr>
             <a:r>
@@ -3537,7 +3682,7 @@
           <a:bodyPr wrap="square" lIns="0" tIns="0" rIns="0" bIns="0" rtlCol="0" anchor="t"/>
           <a:lstStyle/>
           <a:p>
-            <a:pPr algn="ctr" indent="0" marL="0">
+            <a:pPr marL="0" indent="0" algn="ctr">
               <a:buNone/>
             </a:pPr>
             <a:r>
@@ -3554,7 +3699,7 @@
             <a:endParaRPr lang="en-US" sz="1400" dirty="0"/>
           </a:p>
           <a:p>
-            <a:pPr algn="ctr" indent="0" marL="0">
+            <a:pPr marL="0" indent="0" algn="ctr">
               <a:buNone/>
             </a:pPr>
             <a:r>
@@ -3598,7 +3743,7 @@
             <a:prstDash val="solid"/>
           </a:ln>
           <a:effectLst>
-            <a:outerShdw sx="100000" sy="100000" kx="0" ky="0" algn="bl" rotWithShape="0" blurRad="152400" dist="38100" dir="5400000">
+            <a:outerShdw blurRad="152400" dist="38100" dir="5400000" algn="bl" rotWithShape="0">
               <a:srgbClr val="000000">
                 <a:alpha val="6000"/>
               </a:srgbClr>
@@ -3652,7 +3797,7 @@
           <a:bodyPr wrap="square" lIns="0" tIns="0" rIns="0" bIns="0" rtlCol="0" anchor="ctr"/>
           <a:lstStyle/>
           <a:p>
-            <a:pPr algn="ctr" indent="0" marL="0">
+            <a:pPr marL="0" indent="0" algn="ctr">
               <a:buNone/>
             </a:pPr>
             <a:r>
@@ -3691,7 +3836,7 @@
           <a:bodyPr wrap="square" lIns="0" tIns="0" rIns="0" bIns="0" rtlCol="0" anchor="ctr"/>
           <a:lstStyle/>
           <a:p>
-            <a:pPr algn="ctr" indent="0" marL="0">
+            <a:pPr marL="0" indent="0" algn="ctr">
               <a:buNone/>
             </a:pPr>
             <a:r>
@@ -3730,7 +3875,7 @@
           <a:bodyPr wrap="square" lIns="0" tIns="0" rIns="0" bIns="0" rtlCol="0" anchor="t"/>
           <a:lstStyle/>
           <a:p>
-            <a:pPr algn="ctr" indent="0" marL="0">
+            <a:pPr marL="0" indent="0" algn="ctr">
               <a:buNone/>
             </a:pPr>
             <a:r>
@@ -3747,7 +3892,7 @@
             <a:endParaRPr lang="en-US" sz="1400" dirty="0"/>
           </a:p>
           <a:p>
-            <a:pPr algn="ctr" indent="0" marL="0">
+            <a:pPr marL="0" indent="0" algn="ctr">
               <a:buNone/>
             </a:pPr>
             <a:r>
@@ -3791,7 +3936,7 @@
             <a:prstDash val="solid"/>
           </a:ln>
           <a:effectLst>
-            <a:outerShdw sx="100000" sy="100000" kx="0" ky="0" algn="bl" rotWithShape="0" blurRad="152400" dist="38100" dir="5400000">
+            <a:outerShdw blurRad="152400" dist="38100" dir="5400000" algn="bl" rotWithShape="0">
               <a:srgbClr val="000000">
                 <a:alpha val="6000"/>
               </a:srgbClr>
@@ -3845,7 +3990,7 @@
           <a:bodyPr wrap="square" lIns="0" tIns="0" rIns="0" bIns="0" rtlCol="0" anchor="ctr"/>
           <a:lstStyle/>
           <a:p>
-            <a:pPr algn="ctr" indent="0" marL="0">
+            <a:pPr marL="0" indent="0" algn="ctr">
               <a:buNone/>
             </a:pPr>
             <a:r>
@@ -3884,7 +4029,7 @@
           <a:bodyPr wrap="square" lIns="0" tIns="0" rIns="0" bIns="0" rtlCol="0" anchor="ctr"/>
           <a:lstStyle/>
           <a:p>
-            <a:pPr algn="ctr" indent="0" marL="0">
+            <a:pPr marL="0" indent="0" algn="ctr">
               <a:buNone/>
             </a:pPr>
             <a:r>
@@ -3923,7 +4068,7 @@
           <a:bodyPr wrap="square" lIns="0" tIns="0" rIns="0" bIns="0" rtlCol="0" anchor="t"/>
           <a:lstStyle/>
           <a:p>
-            <a:pPr algn="ctr" indent="0" marL="0">
+            <a:pPr marL="0" indent="0" algn="ctr">
               <a:buNone/>
             </a:pPr>
             <a:r>
@@ -3940,7 +4085,7 @@
             <a:endParaRPr lang="en-US" sz="1400" dirty="0"/>
           </a:p>
           <a:p>
-            <a:pPr algn="ctr" indent="0" marL="0">
+            <a:pPr marL="0" indent="0" algn="ctr">
               <a:buNone/>
             </a:pPr>
             <a:r>
@@ -3984,7 +4129,7 @@
             <a:prstDash val="solid"/>
           </a:ln>
           <a:effectLst>
-            <a:outerShdw sx="100000" sy="100000" kx="0" ky="0" algn="bl" rotWithShape="0" blurRad="152400" dist="38100" dir="5400000">
+            <a:outerShdw blurRad="152400" dist="38100" dir="5400000" algn="bl" rotWithShape="0">
               <a:srgbClr val="000000">
                 <a:alpha val="6000"/>
               </a:srgbClr>
@@ -4038,7 +4183,7 @@
           <a:bodyPr wrap="square" lIns="0" tIns="0" rIns="0" bIns="0" rtlCol="0" anchor="ctr"/>
           <a:lstStyle/>
           <a:p>
-            <a:pPr algn="ctr" indent="0" marL="0">
+            <a:pPr marL="0" indent="0" algn="ctr">
               <a:buNone/>
             </a:pPr>
             <a:r>
@@ -4077,7 +4222,7 @@
           <a:bodyPr wrap="square" lIns="0" tIns="0" rIns="0" bIns="0" rtlCol="0" anchor="ctr"/>
           <a:lstStyle/>
           <a:p>
-            <a:pPr algn="ctr" indent="0" marL="0">
+            <a:pPr marL="0" indent="0" algn="ctr">
               <a:buNone/>
             </a:pPr>
             <a:r>
@@ -4116,7 +4261,7 @@
           <a:bodyPr wrap="square" lIns="0" tIns="0" rIns="0" bIns="0" rtlCol="0" anchor="t"/>
           <a:lstStyle/>
           <a:p>
-            <a:pPr algn="ctr" indent="0" marL="0">
+            <a:pPr marL="0" indent="0" algn="ctr">
               <a:buNone/>
             </a:pPr>
             <a:r>
@@ -4133,7 +4278,7 @@
             <a:endParaRPr lang="en-US" sz="1400" dirty="0"/>
           </a:p>
           <a:p>
-            <a:pPr algn="ctr" indent="0" marL="0">
+            <a:pPr marL="0" indent="0" algn="ctr">
               <a:buNone/>
             </a:pPr>
             <a:r>
@@ -4172,7 +4317,7 @@
           <a:bodyPr wrap="square" lIns="0" tIns="0" rIns="0" bIns="0" rtlCol="0" anchor="ctr"/>
           <a:lstStyle/>
           <a:p>
-            <a:pPr algn="ctr" indent="0" marL="0">
+            <a:pPr marL="0" indent="0" algn="ctr">
               <a:buNone/>
             </a:pPr>
             <a:r>
@@ -4211,7 +4356,7 @@
           <a:bodyPr wrap="square" lIns="0" tIns="0" rIns="0" bIns="0" rtlCol="0" anchor="ctr"/>
           <a:lstStyle/>
           <a:p>
-            <a:pPr algn="ctr" indent="0" marL="0">
+            <a:pPr marL="0" indent="0" algn="ctr">
               <a:buNone/>
             </a:pPr>
             <a:r>
@@ -4250,7 +4395,7 @@
           <a:bodyPr wrap="square" lIns="0" tIns="0" rIns="0" bIns="0" rtlCol="0" anchor="ctr"/>
           <a:lstStyle/>
           <a:p>
-            <a:pPr algn="ctr" indent="0" marL="0">
+            <a:pPr marL="0" indent="0" algn="ctr">
               <a:buNone/>
             </a:pPr>
             <a:r>
@@ -4289,7 +4434,7 @@
           <a:bodyPr wrap="square" rtlCol="0" anchor="ctr"/>
           <a:lstStyle/>
           <a:p>
-            <a:pPr indent="0" marL="0">
+            <a:pPr marL="0" indent="0">
               <a:buNone/>
             </a:pPr>
             <a:r>
@@ -4328,7 +4473,7 @@
           <a:bodyPr wrap="square" rtlCol="0" anchor="ctr"/>
           <a:lstStyle/>
           <a:p>
-            <a:pPr algn="l" indent="0" marL="0">
+            <a:pPr marL="0" indent="0" algn="l">
               <a:buNone/>
             </a:pPr>
             <a:r>
@@ -4340,7 +4485,7 @@
                 <a:ea typeface="Malgun Gothic" pitchFamily="34" charset="-122"/>
                 <a:cs typeface="Malgun Gothic" pitchFamily="34" charset="-120"/>
               </a:rPr>
-              <a:t>Voyna · 알토대학원 ASSIST 벤처 스타트업</a:t>
+              <a:t>Voyna · 알토대학원 ASSIST New 벤처 스타트업</a:t>
             </a:r>
             <a:endParaRPr lang="en-US" sz="900" dirty="0"/>
           </a:p>
@@ -4367,7 +4512,7 @@
           <a:bodyPr wrap="square" rtlCol="0" anchor="ctr"/>
           <a:lstStyle/>
           <a:p>
-            <a:pPr algn="r" indent="0" marL="0">
+            <a:pPr marL="0" indent="0" algn="r">
               <a:buNone/>
             </a:pPr>
             <a:r>
@@ -4379,7 +4524,7 @@
                 <a:ea typeface="Malgun Gothic" pitchFamily="34" charset="-122"/>
                 <a:cs typeface="Malgun Gothic" pitchFamily="34" charset="-120"/>
               </a:rPr>
-              <a:t>AlexSong0674 / 2026-05</a:t>
+              <a:t>송 하 준 / 2026-05</a:t>
             </a:r>
             <a:endParaRPr lang="en-US" sz="900" dirty="0"/>
           </a:p>
@@ -4393,7 +4538,7 @@
 </p:sld>
 </file>
 
-<file path=ppt/slides/slide5.xml><?xml version="1.0" encoding="utf-8"?>
+<file path=ppt\slides\slide5.xml><?xml version="1.0" encoding="utf-8"?>
 <p:sld xmlns:a="http://schemas.openxmlformats.org/drawingml/2006/main" xmlns:r="http://schemas.openxmlformats.org/officeDocument/2006/relationships" xmlns:p="http://schemas.openxmlformats.org/presentationml/2006/main">
   <p:cSld name="Slide 5">
     <p:bg>
@@ -4401,6 +4546,7 @@
         <a:solidFill>
           <a:srgbClr val="FFFFFF"/>
         </a:solidFill>
+        <a:effectLst/>
       </p:bgPr>
     </p:bg>
     <p:spTree>
@@ -4438,7 +4584,7 @@
           <a:bodyPr wrap="square" lIns="0" tIns="0" rIns="0" bIns="0" rtlCol="0" anchor="ctr"/>
           <a:lstStyle/>
           <a:p>
-            <a:pPr indent="0" marL="0">
+            <a:pPr marL="0" indent="0">
               <a:buNone/>
             </a:pPr>
             <a:r>
@@ -4522,11 +4668,11 @@
           <a:bodyPr wrap="square" lIns="0" tIns="0" rIns="0" bIns="0" rtlCol="0" anchor="ctr"/>
           <a:lstStyle/>
           <a:p>
-            <a:pPr indent="0" marL="0">
-              <a:buNone/>
-            </a:pPr>
-            <a:r>
-              <a:rPr lang="en-US" sz="1100" b="1" spc="200" kern="0" dirty="0">
+            <a:pPr marL="0" indent="0">
+              <a:buNone/>
+            </a:pPr>
+            <a:r>
+              <a:rPr lang="en-US" sz="1100" b="1" kern="0" spc="200" dirty="0">
                 <a:solidFill>
                   <a:srgbClr val="2A5CDC"/>
                 </a:solidFill>
@@ -4561,7 +4707,7 @@
           <a:bodyPr wrap="square" lIns="0" tIns="0" rIns="0" bIns="0" rtlCol="0" anchor="ctr"/>
           <a:lstStyle/>
           <a:p>
-            <a:pPr indent="0" marL="0">
+            <a:pPr marL="0" indent="0">
               <a:buNone/>
             </a:pPr>
             <a:r>
@@ -4600,7 +4746,7 @@
           <a:bodyPr wrap="square" lIns="0" tIns="0" rIns="0" bIns="0" rtlCol="0" anchor="ctr"/>
           <a:lstStyle/>
           <a:p>
-            <a:pPr indent="0" marL="0">
+            <a:pPr marL="0" indent="0">
               <a:buNone/>
             </a:pPr>
             <a:r>
@@ -4684,11 +4830,11 @@
           <a:bodyPr wrap="square" lIns="0" tIns="0" rIns="0" bIns="0" rtlCol="0" anchor="ctr"/>
           <a:lstStyle/>
           <a:p>
-            <a:pPr indent="0" marL="0">
-              <a:buNone/>
-            </a:pPr>
-            <a:r>
-              <a:rPr lang="en-US" sz="1100" b="1" spc="200" kern="0" dirty="0">
+            <a:pPr marL="0" indent="0">
+              <a:buNone/>
+            </a:pPr>
+            <a:r>
+              <a:rPr lang="en-US" sz="1100" b="1" kern="0" spc="200" dirty="0">
                 <a:solidFill>
                   <a:srgbClr val="2A5CDC"/>
                 </a:solidFill>
@@ -4723,7 +4869,7 @@
           <a:bodyPr wrap="square" lIns="0" tIns="0" rIns="0" bIns="0" rtlCol="0" anchor="ctr"/>
           <a:lstStyle/>
           <a:p>
-            <a:pPr indent="0" marL="0">
+            <a:pPr marL="0" indent="0">
               <a:buNone/>
             </a:pPr>
             <a:r>
@@ -4762,7 +4908,7 @@
           <a:bodyPr wrap="square" lIns="0" tIns="0" rIns="0" bIns="0" rtlCol="0" anchor="ctr"/>
           <a:lstStyle/>
           <a:p>
-            <a:pPr indent="0" marL="0">
+            <a:pPr marL="0" indent="0">
               <a:buNone/>
             </a:pPr>
             <a:r>
@@ -4846,11 +4992,11 @@
           <a:bodyPr wrap="square" lIns="0" tIns="0" rIns="0" bIns="0" rtlCol="0" anchor="ctr"/>
           <a:lstStyle/>
           <a:p>
-            <a:pPr indent="0" marL="0">
-              <a:buNone/>
-            </a:pPr>
-            <a:r>
-              <a:rPr lang="en-US" sz="1100" b="1" spc="200" kern="0" dirty="0">
+            <a:pPr marL="0" indent="0">
+              <a:buNone/>
+            </a:pPr>
+            <a:r>
+              <a:rPr lang="en-US" sz="1100" b="1" kern="0" spc="200" dirty="0">
                 <a:solidFill>
                   <a:srgbClr val="2A5CDC"/>
                 </a:solidFill>
@@ -4885,7 +5031,7 @@
           <a:bodyPr wrap="square" lIns="0" tIns="0" rIns="0" bIns="0" rtlCol="0" anchor="ctr"/>
           <a:lstStyle/>
           <a:p>
-            <a:pPr indent="0" marL="0">
+            <a:pPr marL="0" indent="0">
               <a:buNone/>
             </a:pPr>
             <a:r>
@@ -4924,7 +5070,7 @@
           <a:bodyPr wrap="square" lIns="0" tIns="0" rIns="0" bIns="0" rtlCol="0" anchor="ctr"/>
           <a:lstStyle/>
           <a:p>
-            <a:pPr indent="0" marL="0">
+            <a:pPr marL="0" indent="0">
               <a:buNone/>
             </a:pPr>
             <a:r>
@@ -5008,11 +5154,11 @@
           <a:bodyPr wrap="square" lIns="0" tIns="0" rIns="0" bIns="0" rtlCol="0" anchor="ctr"/>
           <a:lstStyle/>
           <a:p>
-            <a:pPr indent="0" marL="0">
-              <a:buNone/>
-            </a:pPr>
-            <a:r>
-              <a:rPr lang="en-US" sz="1100" b="1" spc="200" kern="0" dirty="0">
+            <a:pPr marL="0" indent="0">
+              <a:buNone/>
+            </a:pPr>
+            <a:r>
+              <a:rPr lang="en-US" sz="1100" b="1" kern="0" spc="200" dirty="0">
                 <a:solidFill>
                   <a:srgbClr val="D4A017"/>
                 </a:solidFill>
@@ -5047,7 +5193,7 @@
           <a:bodyPr wrap="square" lIns="0" tIns="0" rIns="0" bIns="0" rtlCol="0" anchor="ctr"/>
           <a:lstStyle/>
           <a:p>
-            <a:pPr indent="0" marL="0">
+            <a:pPr marL="0" indent="0">
               <a:buNone/>
             </a:pPr>
             <a:r>
@@ -5086,7 +5232,7 @@
           <a:bodyPr wrap="square" lIns="0" tIns="0" rIns="0" bIns="0" rtlCol="0" anchor="ctr"/>
           <a:lstStyle/>
           <a:p>
-            <a:pPr indent="0" marL="0">
+            <a:pPr marL="0" indent="0">
               <a:buNone/>
             </a:pPr>
             <a:r>
@@ -5170,11 +5316,11 @@
           <a:bodyPr wrap="square" lIns="0" tIns="0" rIns="0" bIns="0" rtlCol="0" anchor="ctr"/>
           <a:lstStyle/>
           <a:p>
-            <a:pPr indent="0" marL="0">
-              <a:buNone/>
-            </a:pPr>
-            <a:r>
-              <a:rPr lang="en-US" sz="1100" b="1" spc="200" kern="0" dirty="0">
+            <a:pPr marL="0" indent="0">
+              <a:buNone/>
+            </a:pPr>
+            <a:r>
+              <a:rPr lang="en-US" sz="1100" b="1" kern="0" spc="200" dirty="0">
                 <a:solidFill>
                   <a:srgbClr val="D4A017"/>
                 </a:solidFill>
@@ -5209,7 +5355,7 @@
           <a:bodyPr wrap="square" lIns="0" tIns="0" rIns="0" bIns="0" rtlCol="0" anchor="ctr"/>
           <a:lstStyle/>
           <a:p>
-            <a:pPr indent="0" marL="0">
+            <a:pPr marL="0" indent="0">
               <a:buNone/>
             </a:pPr>
             <a:r>
@@ -5248,7 +5394,7 @@
           <a:bodyPr wrap="square" lIns="0" tIns="0" rIns="0" bIns="0" rtlCol="0" anchor="ctr"/>
           <a:lstStyle/>
           <a:p>
-            <a:pPr indent="0" marL="0">
+            <a:pPr marL="0" indent="0">
               <a:buNone/>
             </a:pPr>
             <a:r>
@@ -5332,11 +5478,11 @@
           <a:bodyPr wrap="square" lIns="0" tIns="0" rIns="0" bIns="0" rtlCol="0" anchor="ctr"/>
           <a:lstStyle/>
           <a:p>
-            <a:pPr indent="0" marL="0">
-              <a:buNone/>
-            </a:pPr>
-            <a:r>
-              <a:rPr lang="en-US" sz="1100" b="1" spc="200" kern="0" dirty="0">
+            <a:pPr marL="0" indent="0">
+              <a:buNone/>
+            </a:pPr>
+            <a:r>
+              <a:rPr lang="en-US" sz="1100" b="1" kern="0" spc="200" dirty="0">
                 <a:solidFill>
                   <a:srgbClr val="D4A017"/>
                 </a:solidFill>
@@ -5371,7 +5517,7 @@
           <a:bodyPr wrap="square" lIns="0" tIns="0" rIns="0" bIns="0" rtlCol="0" anchor="ctr"/>
           <a:lstStyle/>
           <a:p>
-            <a:pPr indent="0" marL="0">
+            <a:pPr marL="0" indent="0">
               <a:buNone/>
             </a:pPr>
             <a:r>
@@ -5410,7 +5556,7 @@
           <a:bodyPr wrap="square" lIns="0" tIns="0" rIns="0" bIns="0" rtlCol="0" anchor="ctr"/>
           <a:lstStyle/>
           <a:p>
-            <a:pPr indent="0" marL="0">
+            <a:pPr marL="0" indent="0">
               <a:buNone/>
             </a:pPr>
             <a:r>
@@ -5449,7 +5595,7 @@
           <a:bodyPr wrap="square" rtlCol="0" anchor="ctr"/>
           <a:lstStyle/>
           <a:p>
-            <a:pPr indent="0" marL="0">
+            <a:pPr marL="0" indent="0">
               <a:buNone/>
             </a:pPr>
             <a:r>
@@ -5510,7 +5656,7 @@
           <a:bodyPr wrap="square" lIns="0" tIns="0" rIns="0" bIns="0" rtlCol="0" anchor="ctr"/>
           <a:lstStyle/>
           <a:p>
-            <a:pPr algn="ctr" indent="0" marL="0">
+            <a:pPr marL="0" indent="0" algn="ctr">
               <a:buNone/>
             </a:pPr>
             <a:r>
@@ -5571,7 +5717,7 @@
           <a:bodyPr wrap="square" lIns="0" tIns="0" rIns="0" bIns="0" rtlCol="0" anchor="ctr"/>
           <a:lstStyle/>
           <a:p>
-            <a:pPr algn="ctr" indent="0" marL="0">
+            <a:pPr marL="0" indent="0" algn="ctr">
               <a:buNone/>
             </a:pPr>
             <a:r>
@@ -5632,7 +5778,7 @@
           <a:bodyPr wrap="square" lIns="0" tIns="0" rIns="0" bIns="0" rtlCol="0" anchor="ctr"/>
           <a:lstStyle/>
           <a:p>
-            <a:pPr algn="ctr" indent="0" marL="0">
+            <a:pPr marL="0" indent="0" algn="ctr">
               <a:buNone/>
             </a:pPr>
             <a:r>
@@ -5693,7 +5839,7 @@
           <a:bodyPr wrap="square" lIns="0" tIns="0" rIns="0" bIns="0" rtlCol="0" anchor="ctr"/>
           <a:lstStyle/>
           <a:p>
-            <a:pPr algn="ctr" indent="0" marL="0">
+            <a:pPr marL="0" indent="0" algn="ctr">
               <a:buNone/>
             </a:pPr>
             <a:r>
@@ -5732,7 +5878,7 @@
           <a:bodyPr wrap="square" rtlCol="0" anchor="ctr"/>
           <a:lstStyle/>
           <a:p>
-            <a:pPr algn="l" indent="0" marL="0">
+            <a:pPr marL="0" indent="0" algn="l">
               <a:buNone/>
             </a:pPr>
             <a:r>
@@ -5744,7 +5890,7 @@
                 <a:ea typeface="Malgun Gothic" pitchFamily="34" charset="-122"/>
                 <a:cs typeface="Malgun Gothic" pitchFamily="34" charset="-120"/>
               </a:rPr>
-              <a:t>Voyna · 알토대학원 ASSIST 벤처 스타트업</a:t>
+              <a:t>Voyna · 알토대학원 ASSIST New 벤처 스타트업</a:t>
             </a:r>
             <a:endParaRPr lang="en-US" sz="900" dirty="0"/>
           </a:p>
@@ -5771,7 +5917,7 @@
           <a:bodyPr wrap="square" rtlCol="0" anchor="ctr"/>
           <a:lstStyle/>
           <a:p>
-            <a:pPr algn="r" indent="0" marL="0">
+            <a:pPr marL="0" indent="0" algn="r">
               <a:buNone/>
             </a:pPr>
             <a:r>
@@ -5783,7 +5929,7 @@
                 <a:ea typeface="Malgun Gothic" pitchFamily="34" charset="-122"/>
                 <a:cs typeface="Malgun Gothic" pitchFamily="34" charset="-120"/>
               </a:rPr>
-              <a:t>AlexSong0674 / 2026-05</a:t>
+              <a:t>송 하 준 / 2026-05</a:t>
             </a:r>
             <a:endParaRPr lang="en-US" sz="900" dirty="0"/>
           </a:p>
@@ -5797,7 +5943,7 @@
 </p:sld>
 </file>
 
-<file path=ppt/slides/slide6.xml><?xml version="1.0" encoding="utf-8"?>
+<file path=ppt\slides\slide6.xml><?xml version="1.0" encoding="utf-8"?>
 <p:sld xmlns:a="http://schemas.openxmlformats.org/drawingml/2006/main" xmlns:r="http://schemas.openxmlformats.org/officeDocument/2006/relationships" xmlns:p="http://schemas.openxmlformats.org/presentationml/2006/main">
   <p:cSld name="Slide 6">
     <p:bg>
@@ -5805,6 +5951,7 @@
         <a:solidFill>
           <a:srgbClr val="1A3A8C"/>
         </a:solidFill>
+        <a:effectLst/>
       </p:bgPr>
     </p:bg>
     <p:spTree>
@@ -5842,7 +5989,7 @@
           <a:bodyPr wrap="square" lIns="0" tIns="0" rIns="0" bIns="0" rtlCol="0" anchor="ctr"/>
           <a:lstStyle/>
           <a:p>
-            <a:pPr indent="0" marL="0">
+            <a:pPr marL="0" indent="0">
               <a:buNone/>
             </a:pPr>
             <a:r>
@@ -5881,7 +6028,7 @@
           <a:bodyPr wrap="square" lIns="0" tIns="0" rIns="0" bIns="0" rtlCol="0" anchor="ctr"/>
           <a:lstStyle/>
           <a:p>
-            <a:pPr indent="0" marL="0">
+            <a:pPr marL="0" indent="0">
               <a:buNone/>
             </a:pPr>
             <a:r>
@@ -5920,11 +6067,11 @@
           <a:bodyPr wrap="square" lIns="0" tIns="0" rIns="0" bIns="0" rtlCol="0" anchor="ctr"/>
           <a:lstStyle/>
           <a:p>
-            <a:pPr indent="0" marL="0">
-              <a:buNone/>
-            </a:pPr>
-            <a:r>
-              <a:rPr lang="en-US" sz="1200" b="1" spc="300" kern="0" dirty="0">
+            <a:pPr marL="0" indent="0">
+              <a:buNone/>
+            </a:pPr>
+            <a:r>
+              <a:rPr lang="en-US" sz="1200" b="1" kern="0" spc="300" dirty="0">
                 <a:solidFill>
                   <a:srgbClr val="FBBF24"/>
                 </a:solidFill>
@@ -5986,7 +6133,7 @@
           <a:bodyPr wrap="square" lIns="0" tIns="0" rIns="0" bIns="0" rtlCol="0" anchor="ctr"/>
           <a:lstStyle/>
           <a:p>
-            <a:pPr indent="0" marL="0">
+            <a:pPr marL="0" indent="0">
               <a:buNone/>
             </a:pPr>
             <a:r>
@@ -6045,7 +6192,7 @@
           <a:bodyPr wrap="square" lIns="0" tIns="0" rIns="0" bIns="0" rtlCol="0" anchor="ctr"/>
           <a:lstStyle/>
           <a:p>
-            <a:pPr algn="ctr" indent="0" marL="0">
+            <a:pPr marL="0" indent="0" algn="ctr">
               <a:buNone/>
             </a:pPr>
             <a:r>
@@ -6084,7 +6231,7 @@
           <a:bodyPr wrap="square" lIns="0" tIns="0" rIns="0" bIns="0" rtlCol="0" anchor="ctr"/>
           <a:lstStyle/>
           <a:p>
-            <a:pPr indent="0" marL="0">
+            <a:pPr marL="0" indent="0">
               <a:buNone/>
             </a:pPr>
             <a:r>
@@ -6143,7 +6290,7 @@
           <a:bodyPr wrap="square" lIns="0" tIns="0" rIns="0" bIns="0" rtlCol="0" anchor="ctr"/>
           <a:lstStyle/>
           <a:p>
-            <a:pPr algn="ctr" indent="0" marL="0">
+            <a:pPr marL="0" indent="0" algn="ctr">
               <a:buNone/>
             </a:pPr>
             <a:r>
@@ -6182,7 +6329,7 @@
           <a:bodyPr wrap="square" lIns="0" tIns="0" rIns="0" bIns="0" rtlCol="0" anchor="ctr"/>
           <a:lstStyle/>
           <a:p>
-            <a:pPr indent="0" marL="0">
+            <a:pPr marL="0" indent="0">
               <a:buNone/>
             </a:pPr>
             <a:r>
@@ -6241,7 +6388,7 @@
           <a:bodyPr wrap="square" lIns="0" tIns="0" rIns="0" bIns="0" rtlCol="0" anchor="ctr"/>
           <a:lstStyle/>
           <a:p>
-            <a:pPr algn="ctr" indent="0" marL="0">
+            <a:pPr marL="0" indent="0" algn="ctr">
               <a:buNone/>
             </a:pPr>
             <a:r>
@@ -6280,7 +6427,7 @@
           <a:bodyPr wrap="square" lIns="0" tIns="0" rIns="0" bIns="0" rtlCol="0" anchor="ctr"/>
           <a:lstStyle/>
           <a:p>
-            <a:pPr indent="0" marL="0">
+            <a:pPr marL="0" indent="0">
               <a:buNone/>
             </a:pPr>
             <a:r>
@@ -6339,7 +6486,7 @@
           <a:bodyPr wrap="square" lIns="0" tIns="0" rIns="0" bIns="0" rtlCol="0" anchor="ctr"/>
           <a:lstStyle/>
           <a:p>
-            <a:pPr algn="ctr" indent="0" marL="0">
+            <a:pPr marL="0" indent="0" algn="ctr">
               <a:buNone/>
             </a:pPr>
             <a:r>
@@ -6378,7 +6525,7 @@
           <a:bodyPr wrap="square" lIns="0" tIns="0" rIns="0" bIns="0" rtlCol="0" anchor="ctr"/>
           <a:lstStyle/>
           <a:p>
-            <a:pPr indent="0" marL="0">
+            <a:pPr marL="0" indent="0">
               <a:buNone/>
             </a:pPr>
             <a:r>
@@ -6437,7 +6584,7 @@
           <a:bodyPr wrap="square" lIns="0" tIns="0" rIns="0" bIns="0" rtlCol="0" anchor="ctr"/>
           <a:lstStyle/>
           <a:p>
-            <a:pPr algn="ctr" indent="0" marL="0">
+            <a:pPr marL="0" indent="0" algn="ctr">
               <a:buNone/>
             </a:pPr>
             <a:r>
@@ -6476,7 +6623,7 @@
           <a:bodyPr wrap="square" lIns="0" tIns="0" rIns="0" bIns="0" rtlCol="0" anchor="ctr"/>
           <a:lstStyle/>
           <a:p>
-            <a:pPr indent="0" marL="0">
+            <a:pPr marL="0" indent="0">
               <a:buNone/>
             </a:pPr>
             <a:r>
@@ -6515,7 +6662,7 @@
           </a:solidFill>
           <a:ln/>
           <a:effectLst>
-            <a:outerShdw sx="100000" sy="100000" kx="0" ky="0" algn="bl" rotWithShape="0" blurRad="254000" dist="76200" dir="5400000">
+            <a:outerShdw blurRad="254000" dist="76200" dir="5400000" algn="bl" rotWithShape="0">
               <a:srgbClr val="000000">
                 <a:alpha val="30000"/>
               </a:srgbClr>
@@ -6544,7 +6691,7 @@
           <a:bodyPr wrap="square" lIns="0" tIns="0" rIns="0" bIns="0" rtlCol="0" anchor="ctr"/>
           <a:lstStyle/>
           <a:p>
-            <a:pPr algn="ctr" indent="0" marL="0">
+            <a:pPr marL="0" indent="0" algn="ctr">
               <a:buNone/>
             </a:pPr>
             <a:r>
@@ -6561,7 +6708,7 @@
             <a:endParaRPr lang="en-US" sz="1600" dirty="0"/>
           </a:p>
           <a:p>
-            <a:pPr algn="ctr" indent="0" marL="0">
+            <a:pPr marL="0" indent="0" algn="ctr">
               <a:buNone/>
             </a:pPr>
             <a:r>
@@ -6581,14 +6728,14 @@
       </p:sp>
       <p:pic>
         <p:nvPicPr>
-          <p:cNvPr id="24" name="Image 0" descr="C:\Users\송 하 준\Documents\알토대학원\수업과제\벤처 스타트업\기획서\.claude\worktrees\hungry-austin-6b4740\Voyna_라이브_QR.png">    </p:cNvPr>
+          <p:cNvPr id="24" name="Image 0" descr="C:\Users\송 하 준\Documents\알토대학원\수업과제\벤처 스타트업\기획서\.claude\worktrees\hungry-austin-6b4740\Voyna_라이브_QR.png"/>
           <p:cNvPicPr>
             <a:picLocks noChangeAspect="1"/>
           </p:cNvPicPr>
           <p:nvPr/>
         </p:nvPicPr>
         <p:blipFill>
-          <a:blip r:embed="rId1"/>
+          <a:blip r:embed="rId3"/>
           <a:stretch>
             <a:fillRect/>
           </a:stretch>
@@ -6624,7 +6771,7 @@
           <a:bodyPr wrap="square" lIns="0" tIns="0" rIns="0" bIns="0" rtlCol="0" anchor="ctr"/>
           <a:lstStyle/>
           <a:p>
-            <a:pPr algn="ctr" indent="0" marL="0">
+            <a:pPr marL="0" indent="0" algn="ctr">
               <a:buNone/>
             </a:pPr>
             <a:r>
@@ -6663,7 +6810,7 @@
           <a:bodyPr wrap="square" rtlCol="0" anchor="ctr"/>
           <a:lstStyle/>
           <a:p>
-            <a:pPr algn="l" indent="0" marL="0">
+            <a:pPr marL="0" indent="0" algn="l">
               <a:buNone/>
             </a:pPr>
             <a:r>
@@ -6675,7 +6822,7 @@
                 <a:ea typeface="Malgun Gothic" pitchFamily="34" charset="-122"/>
                 <a:cs typeface="Malgun Gothic" pitchFamily="34" charset="-120"/>
               </a:rPr>
-              <a:t>Voyna · 알토 ASSIST 벤처 스타트업 발표</a:t>
+              <a:t>Voyna · 알토 ASSIST New 벤처 스타트업 발표</a:t>
             </a:r>
             <a:endParaRPr lang="en-US" sz="900" dirty="0"/>
           </a:p>
@@ -6689,7 +6836,7 @@
 </p:sld>
 </file>
 
-<file path=ppt/slides/slide7.xml><?xml version="1.0" encoding="utf-8"?>
+<file path=ppt\slides\slide7.xml><?xml version="1.0" encoding="utf-8"?>
 <p:sld xmlns:a="http://schemas.openxmlformats.org/drawingml/2006/main" xmlns:r="http://schemas.openxmlformats.org/officeDocument/2006/relationships" xmlns:p="http://schemas.openxmlformats.org/presentationml/2006/main">
   <p:cSld name="Slide 7">
     <p:bg>
@@ -6697,6 +6844,7 @@
         <a:solidFill>
           <a:srgbClr val="F7F9FC"/>
         </a:solidFill>
+        <a:effectLst/>
       </p:bgPr>
     </p:bg>
     <p:spTree>
@@ -6734,7 +6882,7 @@
           <a:bodyPr wrap="square" lIns="0" tIns="0" rIns="0" bIns="0" rtlCol="0" anchor="ctr"/>
           <a:lstStyle/>
           <a:p>
-            <a:pPr indent="0" marL="0">
+            <a:pPr marL="0" indent="0">
               <a:buNone/>
             </a:pPr>
             <a:r>
@@ -6773,7 +6921,7 @@
           <a:bodyPr wrap="square" lIns="0" tIns="0" rIns="0" bIns="0" rtlCol="0" anchor="ctr"/>
           <a:lstStyle/>
           <a:p>
-            <a:pPr indent="0" marL="0">
+            <a:pPr marL="0" indent="0">
               <a:buNone/>
             </a:pPr>
             <a:r>
@@ -6832,7 +6980,7 @@
           <a:bodyPr wrap="square" lIns="0" tIns="0" rIns="0" bIns="0" rtlCol="0" anchor="ctr"/>
           <a:lstStyle/>
           <a:p>
-            <a:pPr indent="0" marL="0">
+            <a:pPr marL="0" indent="0">
               <a:buNone/>
             </a:pPr>
             <a:r>
@@ -6891,7 +7039,7 @@
           <a:bodyPr wrap="square" lIns="0" tIns="0" rIns="0" bIns="0" rtlCol="0" anchor="ctr"/>
           <a:lstStyle/>
           <a:p>
-            <a:pPr indent="0" marL="0">
+            <a:pPr marL="0" indent="0">
               <a:buNone/>
             </a:pPr>
             <a:r>
@@ -6950,7 +7098,7 @@
           <a:bodyPr wrap="square" lIns="0" tIns="0" rIns="0" bIns="0" rtlCol="0" anchor="ctr"/>
           <a:lstStyle/>
           <a:p>
-            <a:pPr indent="0" marL="0">
+            <a:pPr marL="0" indent="0">
               <a:buNone/>
             </a:pPr>
             <a:r>
@@ -7009,7 +7157,7 @@
           <a:bodyPr wrap="square" lIns="0" tIns="0" rIns="0" bIns="0" rtlCol="0" anchor="ctr"/>
           <a:lstStyle/>
           <a:p>
-            <a:pPr indent="0" marL="0">
+            <a:pPr marL="0" indent="0">
               <a:buNone/>
             </a:pPr>
             <a:r>
@@ -7073,7 +7221,7 @@
           <a:bodyPr wrap="square" lIns="0" tIns="0" rIns="0" bIns="0" rtlCol="0" anchor="ctr"/>
           <a:lstStyle/>
           <a:p>
-            <a:pPr indent="0" marL="0">
+            <a:pPr marL="0" indent="0">
               <a:buNone/>
             </a:pPr>
             <a:r>
@@ -7137,7 +7285,7 @@
           <a:bodyPr wrap="square" lIns="0" tIns="0" rIns="0" bIns="0" rtlCol="0" anchor="ctr"/>
           <a:lstStyle/>
           <a:p>
-            <a:pPr indent="0" marL="0">
+            <a:pPr marL="0" indent="0">
               <a:buNone/>
             </a:pPr>
             <a:r>
@@ -7201,7 +7349,7 @@
           <a:bodyPr wrap="square" lIns="0" tIns="0" rIns="0" bIns="0" rtlCol="0" anchor="ctr"/>
           <a:lstStyle/>
           <a:p>
-            <a:pPr indent="0" marL="0">
+            <a:pPr marL="0" indent="0">
               <a:buNone/>
             </a:pPr>
             <a:r>
@@ -7265,7 +7413,7 @@
           <a:bodyPr wrap="square" lIns="0" tIns="0" rIns="0" bIns="0" rtlCol="0" anchor="ctr"/>
           <a:lstStyle/>
           <a:p>
-            <a:pPr indent="0" marL="0">
+            <a:pPr marL="0" indent="0">
               <a:buNone/>
             </a:pPr>
             <a:r>
@@ -7329,7 +7477,7 @@
           <a:bodyPr wrap="square" lIns="0" tIns="0" rIns="0" bIns="0" rtlCol="0" anchor="ctr"/>
           <a:lstStyle/>
           <a:p>
-            <a:pPr indent="0" marL="0">
+            <a:pPr marL="0" indent="0">
               <a:buNone/>
             </a:pPr>
             <a:r>
@@ -7393,7 +7541,7 @@
           <a:bodyPr wrap="square" lIns="0" tIns="0" rIns="0" bIns="0" rtlCol="0" anchor="ctr"/>
           <a:lstStyle/>
           <a:p>
-            <a:pPr indent="0" marL="0">
+            <a:pPr marL="0" indent="0">
               <a:buNone/>
             </a:pPr>
             <a:r>
@@ -7457,7 +7605,7 @@
           <a:bodyPr wrap="square" lIns="0" tIns="0" rIns="0" bIns="0" rtlCol="0" anchor="ctr"/>
           <a:lstStyle/>
           <a:p>
-            <a:pPr indent="0" marL="0">
+            <a:pPr marL="0" indent="0">
               <a:buNone/>
             </a:pPr>
             <a:r>
@@ -7521,7 +7669,7 @@
           <a:bodyPr wrap="square" lIns="0" tIns="0" rIns="0" bIns="0" rtlCol="0" anchor="ctr"/>
           <a:lstStyle/>
           <a:p>
-            <a:pPr indent="0" marL="0">
+            <a:pPr marL="0" indent="0">
               <a:buNone/>
             </a:pPr>
             <a:r>
@@ -7585,7 +7733,7 @@
           <a:bodyPr wrap="square" lIns="0" tIns="0" rIns="0" bIns="0" rtlCol="0" anchor="ctr"/>
           <a:lstStyle/>
           <a:p>
-            <a:pPr indent="0" marL="0">
+            <a:pPr marL="0" indent="0">
               <a:buNone/>
             </a:pPr>
             <a:r>
@@ -7649,7 +7797,7 @@
           <a:bodyPr wrap="square" lIns="0" tIns="0" rIns="0" bIns="0" rtlCol="0" anchor="ctr"/>
           <a:lstStyle/>
           <a:p>
-            <a:pPr indent="0" marL="0">
+            <a:pPr marL="0" indent="0">
               <a:buNone/>
             </a:pPr>
             <a:r>
@@ -7713,7 +7861,7 @@
           <a:bodyPr wrap="square" lIns="0" tIns="0" rIns="0" bIns="0" rtlCol="0" anchor="ctr"/>
           <a:lstStyle/>
           <a:p>
-            <a:pPr indent="0" marL="0">
+            <a:pPr marL="0" indent="0">
               <a:buNone/>
             </a:pPr>
             <a:r>
@@ -7777,7 +7925,7 @@
           <a:bodyPr wrap="square" lIns="0" tIns="0" rIns="0" bIns="0" rtlCol="0" anchor="ctr"/>
           <a:lstStyle/>
           <a:p>
-            <a:pPr indent="0" marL="0">
+            <a:pPr marL="0" indent="0">
               <a:buNone/>
             </a:pPr>
             <a:r>
@@ -7841,7 +7989,7 @@
           <a:bodyPr wrap="square" lIns="0" tIns="0" rIns="0" bIns="0" rtlCol="0" anchor="ctr"/>
           <a:lstStyle/>
           <a:p>
-            <a:pPr indent="0" marL="0">
+            <a:pPr marL="0" indent="0">
               <a:buNone/>
             </a:pPr>
             <a:r>
@@ -7905,7 +8053,7 @@
           <a:bodyPr wrap="square" lIns="0" tIns="0" rIns="0" bIns="0" rtlCol="0" anchor="ctr"/>
           <a:lstStyle/>
           <a:p>
-            <a:pPr indent="0" marL="0">
+            <a:pPr marL="0" indent="0">
               <a:buNone/>
             </a:pPr>
             <a:r>
@@ -7969,7 +8117,7 @@
           <a:bodyPr wrap="square" lIns="0" tIns="0" rIns="0" bIns="0" rtlCol="0" anchor="ctr"/>
           <a:lstStyle/>
           <a:p>
-            <a:pPr indent="0" marL="0">
+            <a:pPr marL="0" indent="0">
               <a:buNone/>
             </a:pPr>
             <a:r>
@@ -8033,7 +8181,7 @@
           <a:bodyPr wrap="square" lIns="0" tIns="0" rIns="0" bIns="0" rtlCol="0" anchor="ctr"/>
           <a:lstStyle/>
           <a:p>
-            <a:pPr indent="0" marL="0">
+            <a:pPr marL="0" indent="0">
               <a:buNone/>
             </a:pPr>
             <a:r>
@@ -8097,7 +8245,7 @@
           <a:bodyPr wrap="square" lIns="0" tIns="0" rIns="0" bIns="0" rtlCol="0" anchor="ctr"/>
           <a:lstStyle/>
           <a:p>
-            <a:pPr indent="0" marL="0">
+            <a:pPr marL="0" indent="0">
               <a:buNone/>
             </a:pPr>
             <a:r>
@@ -8161,7 +8309,7 @@
           <a:bodyPr wrap="square" lIns="0" tIns="0" rIns="0" bIns="0" rtlCol="0" anchor="ctr"/>
           <a:lstStyle/>
           <a:p>
-            <a:pPr indent="0" marL="0">
+            <a:pPr marL="0" indent="0">
               <a:buNone/>
             </a:pPr>
             <a:r>
@@ -8225,7 +8373,7 @@
           <a:bodyPr wrap="square" lIns="0" tIns="0" rIns="0" bIns="0" rtlCol="0" anchor="ctr"/>
           <a:lstStyle/>
           <a:p>
-            <a:pPr indent="0" marL="0">
+            <a:pPr marL="0" indent="0">
               <a:buNone/>
             </a:pPr>
             <a:r>
@@ -8289,7 +8437,7 @@
           <a:bodyPr wrap="square" lIns="0" tIns="0" rIns="0" bIns="0" rtlCol="0" anchor="ctr"/>
           <a:lstStyle/>
           <a:p>
-            <a:pPr indent="0" marL="0">
+            <a:pPr marL="0" indent="0">
               <a:buNone/>
             </a:pPr>
             <a:r>
@@ -8355,7 +8503,7 @@
           <a:bodyPr wrap="square" lIns="0" tIns="0" rIns="0" bIns="0" rtlCol="0" anchor="ctr"/>
           <a:lstStyle/>
           <a:p>
-            <a:pPr indent="0" marL="0">
+            <a:pPr marL="0" indent="0">
               <a:buNone/>
             </a:pPr>
             <a:r>
@@ -8369,9 +8517,6 @@
               </a:rPr>
               <a:t>강점:  </a:t>
             </a:r>
-            <a:pPr indent="0" marL="0">
-              <a:buNone/>
-            </a:pPr>
             <a:r>
               <a:rPr lang="en-US" sz="1400" dirty="0">
                 <a:solidFill>
@@ -8381,7 +8526,40 @@
                 <a:ea typeface="Malgun Gothic" pitchFamily="34" charset="-122"/>
                 <a:cs typeface="Malgun Gothic" pitchFamily="34" charset="-120"/>
               </a:rPr>
-              <a:t>여행 전체 게임화 · 자동/확인 이원화 · B2B 가맹 배지 · 글로벌 확장 가능한 짧은 이름</a:t>
+              <a:t>여행 전체 게임화 · 자동/확인 이원화 · B2B 가맹 배지 · 글로벌 </a:t>
+            </a:r>
+            <a:r>
+              <a:rPr lang="en-US" sz="1400" dirty="0" err="1">
+                <a:solidFill>
+                  <a:srgbClr val="1F2937"/>
+                </a:solidFill>
+                <a:latin typeface="Malgun Gothic" pitchFamily="34" charset="0"/>
+                <a:ea typeface="Malgun Gothic" pitchFamily="34" charset="-122"/>
+                <a:cs typeface="Malgun Gothic" pitchFamily="34" charset="-120"/>
+              </a:rPr>
+              <a:t>확장</a:t>
+            </a:r>
+            <a:r>
+              <a:rPr lang="en-US" sz="1400" dirty="0">
+                <a:solidFill>
+                  <a:srgbClr val="1F2937"/>
+                </a:solidFill>
+                <a:latin typeface="Malgun Gothic" pitchFamily="34" charset="0"/>
+                <a:ea typeface="Malgun Gothic" pitchFamily="34" charset="-122"/>
+                <a:cs typeface="Malgun Gothic" pitchFamily="34" charset="-120"/>
+              </a:rPr>
+              <a:t> </a:t>
+            </a:r>
+            <a:r>
+              <a:rPr lang="en-US" sz="1400" dirty="0" err="1" smtClean="0">
+                <a:solidFill>
+                  <a:srgbClr val="1F2937"/>
+                </a:solidFill>
+                <a:latin typeface="Malgun Gothic" pitchFamily="34" charset="0"/>
+                <a:ea typeface="Malgun Gothic" pitchFamily="34" charset="-122"/>
+                <a:cs typeface="Malgun Gothic" pitchFamily="34" charset="-120"/>
+              </a:rPr>
+              <a:t>가능</a:t>
             </a:r>
             <a:endParaRPr lang="en-US" sz="1400" dirty="0"/>
           </a:p>
@@ -8408,7 +8586,7 @@
           <a:bodyPr wrap="square" rtlCol="0" anchor="ctr"/>
           <a:lstStyle/>
           <a:p>
-            <a:pPr algn="l" indent="0" marL="0">
+            <a:pPr marL="0" indent="0" algn="l">
               <a:buNone/>
             </a:pPr>
             <a:r>
@@ -8420,7 +8598,7 @@
                 <a:ea typeface="Malgun Gothic" pitchFamily="34" charset="-122"/>
                 <a:cs typeface="Malgun Gothic" pitchFamily="34" charset="-120"/>
               </a:rPr>
-              <a:t>Voyna · 알토대학원 ASSIST 벤처 스타트업</a:t>
+              <a:t>Voyna · 알토대학원 ASSIST New 벤처 스타트업</a:t>
             </a:r>
             <a:endParaRPr lang="en-US" sz="900" dirty="0"/>
           </a:p>
@@ -8447,7 +8625,7 @@
           <a:bodyPr wrap="square" rtlCol="0" anchor="ctr"/>
           <a:lstStyle/>
           <a:p>
-            <a:pPr algn="r" indent="0" marL="0">
+            <a:pPr marL="0" indent="0" algn="r">
               <a:buNone/>
             </a:pPr>
             <a:r>
@@ -8459,7 +8637,7 @@
                 <a:ea typeface="Malgun Gothic" pitchFamily="34" charset="-122"/>
                 <a:cs typeface="Malgun Gothic" pitchFamily="34" charset="-120"/>
               </a:rPr>
-              <a:t>AlexSong0674 / 2026-05</a:t>
+              <a:t>송 하 준 / 2026-05</a:t>
             </a:r>
             <a:endParaRPr lang="en-US" sz="900" dirty="0"/>
           </a:p>
@@ -8473,7 +8651,7 @@
 </p:sld>
 </file>
 
-<file path=ppt/slides/slide8.xml><?xml version="1.0" encoding="utf-8"?>
+<file path=ppt\slides\slide8.xml><?xml version="1.0" encoding="utf-8"?>
 <p:sld xmlns:a="http://schemas.openxmlformats.org/drawingml/2006/main" xmlns:r="http://schemas.openxmlformats.org/officeDocument/2006/relationships" xmlns:p="http://schemas.openxmlformats.org/presentationml/2006/main">
   <p:cSld name="Slide 8">
     <p:bg>
@@ -8481,6 +8659,7 @@
         <a:solidFill>
           <a:srgbClr val="FFFFFF"/>
         </a:solidFill>
+        <a:effectLst/>
       </p:bgPr>
     </p:bg>
     <p:spTree>
@@ -8518,7 +8697,7 @@
           <a:bodyPr wrap="square" lIns="0" tIns="0" rIns="0" bIns="0" rtlCol="0" anchor="ctr"/>
           <a:lstStyle/>
           <a:p>
-            <a:pPr indent="0" marL="0">
+            <a:pPr marL="0" indent="0">
               <a:buNone/>
             </a:pPr>
             <a:r>
@@ -8557,7 +8736,7 @@
           <a:bodyPr wrap="square" lIns="0" tIns="0" rIns="0" bIns="0" rtlCol="0" anchor="ctr"/>
           <a:lstStyle/>
           <a:p>
-            <a:pPr indent="0" marL="0">
+            <a:pPr marL="0" indent="0">
               <a:buNone/>
             </a:pPr>
             <a:r>
@@ -8638,7 +8817,7 @@
           <a:bodyPr wrap="square" lIns="0" tIns="0" rIns="0" bIns="0" rtlCol="0" anchor="ctr"/>
           <a:lstStyle/>
           <a:p>
-            <a:pPr algn="ctr" indent="0" marL="0">
+            <a:pPr marL="0" indent="0" algn="ctr">
               <a:buNone/>
             </a:pPr>
             <a:r>
@@ -8702,7 +8881,7 @@
           <a:bodyPr wrap="square" lIns="0" tIns="0" rIns="0" bIns="0" rtlCol="0" anchor="ctr"/>
           <a:lstStyle/>
           <a:p>
-            <a:pPr algn="ctr" indent="0" marL="0">
+            <a:pPr marL="0" indent="0" algn="ctr">
               <a:buNone/>
             </a:pPr>
             <a:r>
@@ -8741,7 +8920,7 @@
           <a:bodyPr wrap="square" lIns="0" tIns="0" rIns="0" bIns="0" rtlCol="0" anchor="ctr"/>
           <a:lstStyle/>
           <a:p>
-            <a:pPr algn="ctr" indent="0" marL="0">
+            <a:pPr marL="0" indent="0" algn="ctr">
               <a:buNone/>
             </a:pPr>
             <a:r>
@@ -8802,7 +8981,7 @@
           <a:bodyPr wrap="square" lIns="0" tIns="0" rIns="0" bIns="0" rtlCol="0" anchor="ctr"/>
           <a:lstStyle/>
           <a:p>
-            <a:pPr algn="ctr" indent="0" marL="0">
+            <a:pPr marL="0" indent="0" algn="ctr">
               <a:buNone/>
             </a:pPr>
             <a:r>
@@ -8866,7 +9045,7 @@
           <a:bodyPr wrap="square" lIns="0" tIns="0" rIns="0" bIns="0" rtlCol="0" anchor="ctr"/>
           <a:lstStyle/>
           <a:p>
-            <a:pPr algn="ctr" indent="0" marL="0">
+            <a:pPr marL="0" indent="0" algn="ctr">
               <a:buNone/>
             </a:pPr>
             <a:r>
@@ -8905,7 +9084,7 @@
           <a:bodyPr wrap="square" lIns="0" tIns="0" rIns="0" bIns="0" rtlCol="0" anchor="ctr"/>
           <a:lstStyle/>
           <a:p>
-            <a:pPr algn="ctr" indent="0" marL="0">
+            <a:pPr marL="0" indent="0" algn="ctr">
               <a:buNone/>
             </a:pPr>
             <a:r>
@@ -8966,7 +9145,7 @@
           <a:bodyPr wrap="square" lIns="0" tIns="0" rIns="0" bIns="0" rtlCol="0" anchor="ctr"/>
           <a:lstStyle/>
           <a:p>
-            <a:pPr algn="ctr" indent="0" marL="0">
+            <a:pPr marL="0" indent="0" algn="ctr">
               <a:buNone/>
             </a:pPr>
             <a:r>
@@ -9030,7 +9209,7 @@
           <a:bodyPr wrap="square" lIns="0" tIns="0" rIns="0" bIns="0" rtlCol="0" anchor="ctr"/>
           <a:lstStyle/>
           <a:p>
-            <a:pPr algn="ctr" indent="0" marL="0">
+            <a:pPr marL="0" indent="0" algn="ctr">
               <a:buNone/>
             </a:pPr>
             <a:r>
@@ -9069,7 +9248,7 @@
           <a:bodyPr wrap="square" lIns="0" tIns="0" rIns="0" bIns="0" rtlCol="0" anchor="ctr"/>
           <a:lstStyle/>
           <a:p>
-            <a:pPr algn="ctr" indent="0" marL="0">
+            <a:pPr marL="0" indent="0" algn="ctr">
               <a:buNone/>
             </a:pPr>
             <a:r>
@@ -9130,7 +9309,7 @@
           <a:bodyPr wrap="square" lIns="0" tIns="0" rIns="0" bIns="0" rtlCol="0" anchor="ctr"/>
           <a:lstStyle/>
           <a:p>
-            <a:pPr algn="ctr" indent="0" marL="0">
+            <a:pPr marL="0" indent="0" algn="ctr">
               <a:buNone/>
             </a:pPr>
             <a:r>
@@ -9194,7 +9373,7 @@
           <a:bodyPr wrap="square" lIns="0" tIns="0" rIns="0" bIns="0" rtlCol="0" anchor="ctr"/>
           <a:lstStyle/>
           <a:p>
-            <a:pPr algn="ctr" indent="0" marL="0">
+            <a:pPr marL="0" indent="0" algn="ctr">
               <a:buNone/>
             </a:pPr>
             <a:r>
@@ -9233,7 +9412,7 @@
           <a:bodyPr wrap="square" lIns="0" tIns="0" rIns="0" bIns="0" rtlCol="0" anchor="ctr"/>
           <a:lstStyle/>
           <a:p>
-            <a:pPr algn="ctr" indent="0" marL="0">
+            <a:pPr marL="0" indent="0" algn="ctr">
               <a:buNone/>
             </a:pPr>
             <a:r>
@@ -9294,7 +9473,7 @@
           <a:bodyPr wrap="square" lIns="0" tIns="0" rIns="0" bIns="0" rtlCol="0" anchor="ctr"/>
           <a:lstStyle/>
           <a:p>
-            <a:pPr algn="ctr" indent="0" marL="0">
+            <a:pPr marL="0" indent="0" algn="ctr">
               <a:buNone/>
             </a:pPr>
             <a:r>
@@ -9358,7 +9537,7 @@
           <a:bodyPr wrap="square" lIns="0" tIns="0" rIns="0" bIns="0" rtlCol="0" anchor="ctr"/>
           <a:lstStyle/>
           <a:p>
-            <a:pPr algn="ctr" indent="0" marL="0">
+            <a:pPr marL="0" indent="0" algn="ctr">
               <a:buNone/>
             </a:pPr>
             <a:r>
@@ -9397,7 +9576,7 @@
           <a:bodyPr wrap="square" lIns="0" tIns="0" rIns="0" bIns="0" rtlCol="0" anchor="ctr"/>
           <a:lstStyle/>
           <a:p>
-            <a:pPr algn="ctr" indent="0" marL="0">
+            <a:pPr marL="0" indent="0" algn="ctr">
               <a:buNone/>
             </a:pPr>
             <a:r>
@@ -9436,7 +9615,7 @@
           <a:bodyPr wrap="square" lIns="0" tIns="0" rIns="0" bIns="0" rtlCol="0" anchor="ctr"/>
           <a:lstStyle/>
           <a:p>
-            <a:pPr indent="0" marL="0">
+            <a:pPr marL="0" indent="0">
               <a:buNone/>
             </a:pPr>
             <a:r>
@@ -9475,7 +9654,7 @@
           <a:bodyPr wrap="square" lIns="0" tIns="0" rIns="0" bIns="0" rtlCol="0" anchor="ctr"/>
           <a:lstStyle/>
           <a:p>
-            <a:pPr indent="0" marL="0">
+            <a:pPr marL="0" indent="0">
               <a:buNone/>
             </a:pPr>
             <a:r>
@@ -9514,7 +9693,7 @@
           <a:bodyPr wrap="square" lIns="0" tIns="0" rIns="0" bIns="0" rtlCol="0" anchor="ctr"/>
           <a:lstStyle/>
           <a:p>
-            <a:pPr indent="0" marL="0">
+            <a:pPr marL="0" indent="0">
               <a:buNone/>
             </a:pPr>
             <a:r>
@@ -9553,7 +9732,7 @@
           <a:bodyPr wrap="square" lIns="0" tIns="0" rIns="0" bIns="0" rtlCol="0" anchor="ctr"/>
           <a:lstStyle/>
           <a:p>
-            <a:pPr indent="0" marL="0">
+            <a:pPr marL="0" indent="0">
               <a:buNone/>
             </a:pPr>
             <a:r>
@@ -9592,7 +9771,7 @@
           <a:bodyPr wrap="square" lIns="0" tIns="0" rIns="0" bIns="0" rtlCol="0" anchor="ctr"/>
           <a:lstStyle/>
           <a:p>
-            <a:pPr indent="0" marL="0">
+            <a:pPr marL="0" indent="0">
               <a:buNone/>
             </a:pPr>
             <a:r>
@@ -9631,7 +9810,7 @@
           <a:bodyPr wrap="square" lIns="0" tIns="0" rIns="0" bIns="0" rtlCol="0" anchor="ctr"/>
           <a:lstStyle/>
           <a:p>
-            <a:pPr indent="0" marL="0">
+            <a:pPr marL="0" indent="0">
               <a:buNone/>
             </a:pPr>
             <a:r>
@@ -9670,7 +9849,7 @@
           <a:bodyPr wrap="square" lIns="0" tIns="0" rIns="0" bIns="0" rtlCol="0" anchor="ctr"/>
           <a:lstStyle/>
           <a:p>
-            <a:pPr indent="0" marL="0">
+            <a:pPr marL="0" indent="0">
               <a:buNone/>
             </a:pPr>
             <a:r>
@@ -9709,7 +9888,7 @@
           <a:bodyPr wrap="square" rtlCol="0" anchor="ctr"/>
           <a:lstStyle/>
           <a:p>
-            <a:pPr algn="l" indent="0" marL="0">
+            <a:pPr marL="0" indent="0" algn="l">
               <a:buNone/>
             </a:pPr>
             <a:r>
@@ -9721,7 +9900,7 @@
                 <a:ea typeface="Malgun Gothic" pitchFamily="34" charset="-122"/>
                 <a:cs typeface="Malgun Gothic" pitchFamily="34" charset="-120"/>
               </a:rPr>
-              <a:t>Voyna · 알토대학원 ASSIST 벤처 스타트업</a:t>
+              <a:t>Voyna · 알토대학원 ASSIST New 벤처 스타트업</a:t>
             </a:r>
             <a:endParaRPr lang="en-US" sz="900" dirty="0"/>
           </a:p>
@@ -9748,7 +9927,7 @@
           <a:bodyPr wrap="square" rtlCol="0" anchor="ctr"/>
           <a:lstStyle/>
           <a:p>
-            <a:pPr algn="r" indent="0" marL="0">
+            <a:pPr marL="0" indent="0" algn="r">
               <a:buNone/>
             </a:pPr>
             <a:r>
@@ -9760,7 +9939,7 @@
                 <a:ea typeface="Malgun Gothic" pitchFamily="34" charset="-122"/>
                 <a:cs typeface="Malgun Gothic" pitchFamily="34" charset="-120"/>
               </a:rPr>
-              <a:t>AlexSong0674 / 2026-05</a:t>
+              <a:t>송 하 준 / 2026-05</a:t>
             </a:r>
             <a:endParaRPr lang="en-US" sz="900" dirty="0"/>
           </a:p>
@@ -9774,7 +9953,7 @@
 </p:sld>
 </file>
 
-<file path=ppt/slides/slide9.xml><?xml version="1.0" encoding="utf-8"?>
+<file path=ppt\slides\slide9.xml><?xml version="1.0" encoding="utf-8"?>
 <p:sld xmlns:a="http://schemas.openxmlformats.org/drawingml/2006/main" xmlns:r="http://schemas.openxmlformats.org/officeDocument/2006/relationships" xmlns:p="http://schemas.openxmlformats.org/presentationml/2006/main">
   <p:cSld name="Slide 9">
     <p:bg>
@@ -9782,6 +9961,7 @@
         <a:solidFill>
           <a:srgbClr val="F7F9FC"/>
         </a:solidFill>
+        <a:effectLst/>
       </p:bgPr>
     </p:bg>
     <p:spTree>
@@ -9819,7 +9999,7 @@
           <a:bodyPr wrap="square" lIns="0" tIns="0" rIns="0" bIns="0" rtlCol="0" anchor="ctr"/>
           <a:lstStyle/>
           <a:p>
-            <a:pPr indent="0" marL="0">
+            <a:pPr marL="0" indent="0">
               <a:buNone/>
             </a:pPr>
             <a:r>
@@ -9885,7 +10065,7 @@
           <a:bodyPr wrap="square" lIns="0" tIns="0" rIns="0" bIns="0" rtlCol="0" anchor="ctr"/>
           <a:lstStyle/>
           <a:p>
-            <a:pPr indent="0" marL="0">
+            <a:pPr marL="0" indent="0">
               <a:buNone/>
             </a:pPr>
             <a:r>
@@ -9924,7 +10104,7 @@
           <a:bodyPr wrap="square" lIns="0" tIns="0" rIns="0" bIns="0" rtlCol="0" anchor="ctr"/>
           <a:lstStyle/>
           <a:p>
-            <a:pPr indent="0" marL="0">
+            <a:pPr marL="0" indent="0">
               <a:buNone/>
             </a:pPr>
             <a:r>
@@ -9963,7 +10143,7 @@
           <a:bodyPr wrap="square" lIns="0" tIns="0" rIns="0" bIns="0" rtlCol="0" anchor="ctr"/>
           <a:lstStyle/>
           <a:p>
-            <a:pPr indent="0" marL="0">
+            <a:pPr marL="0" indent="0">
               <a:buNone/>
             </a:pPr>
             <a:r>
@@ -10002,7 +10182,7 @@
           <a:bodyPr wrap="square" lIns="0" tIns="0" rIns="0" bIns="0" rtlCol="0" anchor="ctr"/>
           <a:lstStyle/>
           <a:p>
-            <a:pPr indent="0" marL="0">
+            <a:pPr marL="0" indent="0">
               <a:buNone/>
             </a:pPr>
             <a:r>
@@ -10041,7 +10221,7 @@
           <a:bodyPr wrap="square" lIns="0" tIns="0" rIns="0" bIns="0" rtlCol="0" anchor="ctr"/>
           <a:lstStyle/>
           <a:p>
-            <a:pPr indent="0" marL="0">
+            <a:pPr marL="0" indent="0">
               <a:buNone/>
             </a:pPr>
             <a:r>
@@ -10080,7 +10260,7 @@
           <a:bodyPr wrap="square" lIns="0" tIns="0" rIns="0" bIns="0" rtlCol="0" anchor="ctr"/>
           <a:lstStyle/>
           <a:p>
-            <a:pPr indent="0" marL="0">
+            <a:pPr marL="0" indent="0">
               <a:buNone/>
             </a:pPr>
             <a:r>
@@ -10119,7 +10299,7 @@
           <a:bodyPr wrap="square" lIns="0" tIns="0" rIns="0" bIns="0" rtlCol="0" anchor="ctr"/>
           <a:lstStyle/>
           <a:p>
-            <a:pPr indent="0" marL="0">
+            <a:pPr marL="0" indent="0">
               <a:buNone/>
             </a:pPr>
             <a:r>
@@ -10158,7 +10338,7 @@
           <a:bodyPr wrap="square" lIns="0" tIns="0" rIns="0" bIns="0" rtlCol="0" anchor="ctr"/>
           <a:lstStyle/>
           <a:p>
-            <a:pPr indent="0" marL="0">
+            <a:pPr marL="0" indent="0">
               <a:buNone/>
             </a:pPr>
             <a:r>
@@ -10197,7 +10377,7 @@
           <a:bodyPr wrap="square" lIns="0" tIns="0" rIns="0" bIns="0" rtlCol="0" anchor="ctr"/>
           <a:lstStyle/>
           <a:p>
-            <a:pPr indent="0" marL="0">
+            <a:pPr marL="0" indent="0">
               <a:buNone/>
             </a:pPr>
             <a:r>
@@ -10236,7 +10416,7 @@
           <a:bodyPr wrap="square" lIns="0" tIns="0" rIns="0" bIns="0" rtlCol="0" anchor="ctr"/>
           <a:lstStyle/>
           <a:p>
-            <a:pPr indent="0" marL="0">
+            <a:pPr marL="0" indent="0">
               <a:buNone/>
             </a:pPr>
             <a:r>
@@ -10275,7 +10455,7 @@
           <a:bodyPr wrap="square" lIns="0" tIns="0" rIns="0" bIns="0" rtlCol="0" anchor="ctr"/>
           <a:lstStyle/>
           <a:p>
-            <a:pPr indent="0" marL="0">
+            <a:pPr marL="0" indent="0">
               <a:buNone/>
             </a:pPr>
             <a:r>
@@ -10314,7 +10494,7 @@
           <a:bodyPr wrap="square" lIns="0" tIns="0" rIns="0" bIns="0" rtlCol="0" anchor="ctr"/>
           <a:lstStyle/>
           <a:p>
-            <a:pPr indent="0" marL="0">
+            <a:pPr marL="0" indent="0">
               <a:buNone/>
             </a:pPr>
             <a:r>
@@ -10353,7 +10533,7 @@
           <a:bodyPr wrap="square" lIns="0" tIns="0" rIns="0" bIns="0" rtlCol="0" anchor="ctr"/>
           <a:lstStyle/>
           <a:p>
-            <a:pPr indent="0" marL="0">
+            <a:pPr marL="0" indent="0">
               <a:buNone/>
             </a:pPr>
             <a:r>
@@ -10392,7 +10572,7 @@
           <a:bodyPr wrap="square" lIns="0" tIns="0" rIns="0" bIns="0" rtlCol="0" anchor="ctr"/>
           <a:lstStyle/>
           <a:p>
-            <a:pPr indent="0" marL="0">
+            <a:pPr marL="0" indent="0">
               <a:buNone/>
             </a:pPr>
             <a:r>
@@ -10431,7 +10611,7 @@
           <a:bodyPr wrap="square" lIns="0" tIns="0" rIns="0" bIns="0" rtlCol="0" anchor="ctr"/>
           <a:lstStyle/>
           <a:p>
-            <a:pPr indent="0" marL="0">
+            <a:pPr marL="0" indent="0">
               <a:buNone/>
             </a:pPr>
             <a:r>
@@ -10470,7 +10650,7 @@
           <a:bodyPr wrap="square" lIns="0" tIns="0" rIns="0" bIns="0" rtlCol="0" anchor="ctr"/>
           <a:lstStyle/>
           <a:p>
-            <a:pPr indent="0" marL="0">
+            <a:pPr marL="0" indent="0">
               <a:buNone/>
             </a:pPr>
             <a:r>
@@ -10509,7 +10689,7 @@
           <a:bodyPr wrap="square" lIns="0" tIns="0" rIns="0" bIns="0" rtlCol="0" anchor="ctr"/>
           <a:lstStyle/>
           <a:p>
-            <a:pPr indent="0" marL="0">
+            <a:pPr marL="0" indent="0">
               <a:buNone/>
             </a:pPr>
             <a:r>
@@ -10548,7 +10728,7 @@
           <a:bodyPr wrap="square" lIns="0" tIns="0" rIns="0" bIns="0" rtlCol="0" anchor="ctr"/>
           <a:lstStyle/>
           <a:p>
-            <a:pPr indent="0" marL="0">
+            <a:pPr marL="0" indent="0">
               <a:buNone/>
             </a:pPr>
             <a:r>
@@ -10587,7 +10767,7 @@
           <a:bodyPr wrap="square" lIns="0" tIns="0" rIns="0" bIns="0" rtlCol="0" anchor="ctr"/>
           <a:lstStyle/>
           <a:p>
-            <a:pPr indent="0" marL="0">
+            <a:pPr marL="0" indent="0">
               <a:buNone/>
             </a:pPr>
             <a:r>
@@ -10653,7 +10833,7 @@
           <a:bodyPr wrap="square" lIns="0" tIns="0" rIns="0" bIns="0" rtlCol="0" anchor="ctr"/>
           <a:lstStyle/>
           <a:p>
-            <a:pPr indent="0" marL="0">
+            <a:pPr marL="0" indent="0">
               <a:buNone/>
             </a:pPr>
             <a:r>
@@ -10692,7 +10872,7 @@
           <a:bodyPr wrap="square" lIns="0" tIns="0" rIns="0" bIns="0" rtlCol="0" anchor="ctr"/>
           <a:lstStyle/>
           <a:p>
-            <a:pPr indent="0" marL="0">
+            <a:pPr marL="0" indent="0">
               <a:buNone/>
             </a:pPr>
             <a:r>
@@ -10731,7 +10911,7 @@
           <a:bodyPr wrap="square" lIns="0" tIns="0" rIns="0" bIns="0" rtlCol="0" anchor="ctr"/>
           <a:lstStyle/>
           <a:p>
-            <a:pPr indent="0" marL="0">
+            <a:pPr marL="0" indent="0">
               <a:buNone/>
             </a:pPr>
             <a:r>
@@ -10770,7 +10950,7 @@
           <a:bodyPr wrap="square" lIns="0" tIns="0" rIns="0" bIns="0" rtlCol="0" anchor="ctr"/>
           <a:lstStyle/>
           <a:p>
-            <a:pPr indent="0" marL="0">
+            <a:pPr marL="0" indent="0">
               <a:buNone/>
             </a:pPr>
             <a:r>
@@ -10809,7 +10989,7 @@
           <a:bodyPr wrap="square" lIns="0" tIns="0" rIns="0" bIns="0" rtlCol="0" anchor="ctr"/>
           <a:lstStyle/>
           <a:p>
-            <a:pPr indent="0" marL="0">
+            <a:pPr marL="0" indent="0">
               <a:buNone/>
             </a:pPr>
             <a:r>
@@ -10848,7 +11028,7 @@
           <a:bodyPr wrap="square" lIns="0" tIns="0" rIns="0" bIns="0" rtlCol="0" anchor="ctr"/>
           <a:lstStyle/>
           <a:p>
-            <a:pPr indent="0" marL="0">
+            <a:pPr marL="0" indent="0">
               <a:buNone/>
             </a:pPr>
             <a:r>
@@ -10887,7 +11067,7 @@
           <a:bodyPr wrap="square" lIns="0" tIns="0" rIns="0" bIns="0" rtlCol="0" anchor="ctr"/>
           <a:lstStyle/>
           <a:p>
-            <a:pPr indent="0" marL="0">
+            <a:pPr marL="0" indent="0">
               <a:buNone/>
             </a:pPr>
             <a:r>
@@ -10926,7 +11106,7 @@
           <a:bodyPr wrap="square" lIns="0" tIns="0" rIns="0" bIns="0" rtlCol="0" anchor="ctr"/>
           <a:lstStyle/>
           <a:p>
-            <a:pPr indent="0" marL="0">
+            <a:pPr marL="0" indent="0">
               <a:buNone/>
             </a:pPr>
             <a:r>
@@ -10965,7 +11145,7 @@
           <a:bodyPr wrap="square" lIns="0" tIns="0" rIns="0" bIns="0" rtlCol="0" anchor="ctr"/>
           <a:lstStyle/>
           <a:p>
-            <a:pPr indent="0" marL="0">
+            <a:pPr marL="0" indent="0">
               <a:buNone/>
             </a:pPr>
             <a:r>
@@ -11004,7 +11184,7 @@
           <a:bodyPr wrap="square" lIns="0" tIns="0" rIns="0" bIns="0" rtlCol="0" anchor="ctr"/>
           <a:lstStyle/>
           <a:p>
-            <a:pPr indent="0" marL="0">
+            <a:pPr marL="0" indent="0">
               <a:buNone/>
             </a:pPr>
             <a:r>
@@ -11043,7 +11223,7 @@
           <a:bodyPr wrap="square" lIns="0" tIns="0" rIns="0" bIns="0" rtlCol="0" anchor="ctr"/>
           <a:lstStyle/>
           <a:p>
-            <a:pPr indent="0" marL="0">
+            <a:pPr marL="0" indent="0">
               <a:buNone/>
             </a:pPr>
             <a:r>
@@ -11082,7 +11262,7 @@
           <a:bodyPr wrap="square" lIns="0" tIns="0" rIns="0" bIns="0" rtlCol="0" anchor="ctr"/>
           <a:lstStyle/>
           <a:p>
-            <a:pPr indent="0" marL="0">
+            <a:pPr marL="0" indent="0">
               <a:buNone/>
             </a:pPr>
             <a:r>
@@ -11121,7 +11301,7 @@
           <a:bodyPr wrap="square" lIns="0" tIns="0" rIns="0" bIns="0" rtlCol="0" anchor="ctr"/>
           <a:lstStyle/>
           <a:p>
-            <a:pPr indent="0" marL="0">
+            <a:pPr marL="0" indent="0">
               <a:buNone/>
             </a:pPr>
             <a:r>
@@ -11160,7 +11340,7 @@
           <a:bodyPr wrap="square" lIns="0" tIns="0" rIns="0" bIns="0" rtlCol="0" anchor="ctr"/>
           <a:lstStyle/>
           <a:p>
-            <a:pPr indent="0" marL="0">
+            <a:pPr marL="0" indent="0">
               <a:buNone/>
             </a:pPr>
             <a:r>
@@ -11199,7 +11379,7 @@
           <a:bodyPr wrap="square" lIns="0" tIns="0" rIns="0" bIns="0" rtlCol="0" anchor="ctr"/>
           <a:lstStyle/>
           <a:p>
-            <a:pPr indent="0" marL="0">
+            <a:pPr marL="0" indent="0">
               <a:buNone/>
             </a:pPr>
             <a:r>
@@ -11238,7 +11418,7 @@
           <a:bodyPr wrap="square" lIns="0" tIns="0" rIns="0" bIns="0" rtlCol="0" anchor="ctr"/>
           <a:lstStyle/>
           <a:p>
-            <a:pPr indent="0" marL="0">
+            <a:pPr marL="0" indent="0">
               <a:buNone/>
             </a:pPr>
             <a:r>
@@ -11277,7 +11457,7 @@
           <a:bodyPr wrap="square" lIns="0" tIns="0" rIns="0" bIns="0" rtlCol="0" anchor="ctr"/>
           <a:lstStyle/>
           <a:p>
-            <a:pPr indent="0" marL="0">
+            <a:pPr marL="0" indent="0">
               <a:buNone/>
             </a:pPr>
             <a:r>
@@ -11316,7 +11496,7 @@
           <a:bodyPr wrap="square" lIns="0" tIns="0" rIns="0" bIns="0" rtlCol="0" anchor="ctr"/>
           <a:lstStyle/>
           <a:p>
-            <a:pPr indent="0" marL="0">
+            <a:pPr marL="0" indent="0">
               <a:buNone/>
             </a:pPr>
             <a:r>
@@ -11355,7 +11535,7 @@
           <a:bodyPr wrap="square" lIns="0" tIns="0" rIns="0" bIns="0" rtlCol="0" anchor="ctr"/>
           <a:lstStyle/>
           <a:p>
-            <a:pPr indent="0" marL="0">
+            <a:pPr marL="0" indent="0">
               <a:buNone/>
             </a:pPr>
             <a:r>
@@ -11394,7 +11574,7 @@
           <a:bodyPr wrap="square" rtlCol="0" anchor="ctr"/>
           <a:lstStyle/>
           <a:p>
-            <a:pPr algn="l" indent="0" marL="0">
+            <a:pPr marL="0" indent="0" algn="l">
               <a:buNone/>
             </a:pPr>
             <a:r>
@@ -11406,7 +11586,7 @@
                 <a:ea typeface="Malgun Gothic" pitchFamily="34" charset="-122"/>
                 <a:cs typeface="Malgun Gothic" pitchFamily="34" charset="-120"/>
               </a:rPr>
-              <a:t>Voyna · 알토대학원 ASSIST 벤처 스타트업</a:t>
+              <a:t>Voyna · 알토대학원 ASSIST New 벤처 스타트업</a:t>
             </a:r>
             <a:endParaRPr lang="en-US" sz="900" dirty="0"/>
           </a:p>
@@ -11433,7 +11613,7 @@
           <a:bodyPr wrap="square" rtlCol="0" anchor="ctr"/>
           <a:lstStyle/>
           <a:p>
-            <a:pPr algn="r" indent="0" marL="0">
+            <a:pPr marL="0" indent="0" algn="r">
               <a:buNone/>
             </a:pPr>
             <a:r>
@@ -11445,7 +11625,7 @@
                 <a:ea typeface="Malgun Gothic" pitchFamily="34" charset="-122"/>
                 <a:cs typeface="Malgun Gothic" pitchFamily="34" charset="-120"/>
               </a:rPr>
-              <a:t>AlexSong0674 / 2026-05</a:t>
+              <a:t>송 하 준 / 2026-05</a:t>
             </a:r>
             <a:endParaRPr lang="en-US" sz="900" dirty="0"/>
           </a:p>
@@ -11459,7 +11639,11 @@
 </p:sld>
 </file>
 
-<file path=ppt/theme/theme1.xml><?xml version="1.0" encoding="utf-8"?>
+<file path=ppt\tableStyles.xml><?xml version="1.0" encoding="utf-8"?>
+<a:tblStyleLst xmlns:a="http://schemas.openxmlformats.org/drawingml/2006/main" def="{5C22544A-7EE6-4342-B048-85BDC9FD1C3A}"/>
+</file>
+
+<file path=ppt\theme\theme1.xml><?xml version="1.0" encoding="utf-8"?>
 <a:theme xmlns:a="http://schemas.openxmlformats.org/drawingml/2006/main" name="Office Theme">
   <a:themeElements>
     <a:clrScheme name="Office">
@@ -11748,8 +11932,327 @@
   <a:extraClrSchemeLst/>
   <a:extLst>
     <a:ext uri="{05A4C25C-085E-4340-85A3-A5531E510DB2}">
-      <thm15:themeFamily xmlns:thm15="http://schemas.microsoft.com/office/thememl/2012/main" name="Office Theme" id="{62F939B6-93AF-4DB8-9C6B-D6C7DFDC589F}" vid="{4A3C46E8-61CC-4603-A589-7422A47A8E4A}"/>
+      <thm15:themeFamily xmlns:thm15="http://schemas.microsoft.com/office/thememl/2012/main" xmlns="" name="Office Theme" id="{62F939B6-93AF-4DB8-9C6B-D6C7DFDC589F}" vid="{4A3C46E8-61CC-4603-A589-7422A47A8E4A}"/>
     </a:ext>
   </a:extLst>
 </a:theme>
+</file>
+
+<file path=ppt\theme\theme2.xml><?xml version="1.0" encoding="utf-8"?>
+<a:theme xmlns:a="http://schemas.openxmlformats.org/drawingml/2006/main" name="Office 테마">
+  <a:themeElements>
+    <a:clrScheme name="Office">
+      <a:dk1>
+        <a:sysClr val="windowText" lastClr="000000"/>
+      </a:dk1>
+      <a:lt1>
+        <a:sysClr val="window" lastClr="FFFFFF"/>
+      </a:lt1>
+      <a:dk2>
+        <a:srgbClr val="1F497D"/>
+      </a:dk2>
+      <a:lt2>
+        <a:srgbClr val="EEECE1"/>
+      </a:lt2>
+      <a:accent1>
+        <a:srgbClr val="4F81BD"/>
+      </a:accent1>
+      <a:accent2>
+        <a:srgbClr val="C0504D"/>
+      </a:accent2>
+      <a:accent3>
+        <a:srgbClr val="9BBB59"/>
+      </a:accent3>
+      <a:accent4>
+        <a:srgbClr val="8064A2"/>
+      </a:accent4>
+      <a:accent5>
+        <a:srgbClr val="4BACC6"/>
+      </a:accent5>
+      <a:accent6>
+        <a:srgbClr val="F79646"/>
+      </a:accent6>
+      <a:hlink>
+        <a:srgbClr val="0000FF"/>
+      </a:hlink>
+      <a:folHlink>
+        <a:srgbClr val="800080"/>
+      </a:folHlink>
+    </a:clrScheme>
+    <a:fontScheme name="Office">
+      <a:majorFont>
+        <a:latin typeface="맑은 고딕"/>
+        <a:ea typeface=""/>
+        <a:cs typeface=""/>
+        <a:font script="Jpan" typeface="ＭＳ Ｐゴシック"/>
+        <a:font script="Hang" typeface="맑은 고딕"/>
+        <a:font script="Hans" typeface="宋体"/>
+        <a:font script="Hant" typeface="新細明體"/>
+        <a:font script="Arab" typeface="Times New Roman"/>
+        <a:font script="Hebr" typeface="Times New Roman"/>
+        <a:font script="Thai" typeface="Angsana New"/>
+        <a:font script="Ethi" typeface="Nyala"/>
+        <a:font script="Beng" typeface="Vrinda"/>
+        <a:font script="Gujr" typeface="Shruti"/>
+        <a:font script="Khmr" typeface="MoolBoran"/>
+        <a:font script="Knda" typeface="Tunga"/>
+        <a:font script="Guru" typeface="Raavi"/>
+        <a:font script="Cans" typeface="Euphemia"/>
+        <a:font script="Cher" typeface="Plantagenet Cherokee"/>
+        <a:font script="Yiii" typeface="Microsoft Yi Baiti"/>
+        <a:font script="Tibt" typeface="Microsoft Himalaya"/>
+        <a:font script="Thaa" typeface="MV Boli"/>
+        <a:font script="Deva" typeface="Mangal"/>
+        <a:font script="Telu" typeface="Gautami"/>
+        <a:font script="Taml" typeface="Latha"/>
+        <a:font script="Syrc" typeface="Estrangelo Edessa"/>
+        <a:font script="Orya" typeface="Kalinga"/>
+        <a:font script="Mlym" typeface="Kartika"/>
+        <a:font script="Laoo" typeface="DokChampa"/>
+        <a:font script="Sinh" typeface="Iskoola Pota"/>
+        <a:font script="Mong" typeface="Mongolian Baiti"/>
+        <a:font script="Viet" typeface="Times New Roman"/>
+        <a:font script="Uigh" typeface="Microsoft Uighur"/>
+        <a:font script="Geor" typeface="Sylfaen"/>
+      </a:majorFont>
+      <a:minorFont>
+        <a:latin typeface="맑은 고딕"/>
+        <a:ea typeface=""/>
+        <a:cs typeface=""/>
+        <a:font script="Jpan" typeface="ＭＳ Ｐゴシック"/>
+        <a:font script="Hang" typeface="맑은 고딕"/>
+        <a:font script="Hans" typeface="宋体"/>
+        <a:font script="Hant" typeface="新細明體"/>
+        <a:font script="Arab" typeface="Arial"/>
+        <a:font script="Hebr" typeface="Arial"/>
+        <a:font script="Thai" typeface="Cordia New"/>
+        <a:font script="Ethi" typeface="Nyala"/>
+        <a:font script="Beng" typeface="Vrinda"/>
+        <a:font script="Gujr" typeface="Shruti"/>
+        <a:font script="Khmr" typeface="DaunPenh"/>
+        <a:font script="Knda" typeface="Tunga"/>
+        <a:font script="Guru" typeface="Raavi"/>
+        <a:font script="Cans" typeface="Euphemia"/>
+        <a:font script="Cher" typeface="Plantagenet Cherokee"/>
+        <a:font script="Yiii" typeface="Microsoft Yi Baiti"/>
+        <a:font script="Tibt" typeface="Microsoft Himalaya"/>
+        <a:font script="Thaa" typeface="MV Boli"/>
+        <a:font script="Deva" typeface="Mangal"/>
+        <a:font script="Telu" typeface="Gautami"/>
+        <a:font script="Taml" typeface="Latha"/>
+        <a:font script="Syrc" typeface="Estrangelo Edessa"/>
+        <a:font script="Orya" typeface="Kalinga"/>
+        <a:font script="Mlym" typeface="Kartika"/>
+        <a:font script="Laoo" typeface="DokChampa"/>
+        <a:font script="Sinh" typeface="Iskoola Pota"/>
+        <a:font script="Mong" typeface="Mongolian Baiti"/>
+        <a:font script="Viet" typeface="Arial"/>
+        <a:font script="Uigh" typeface="Microsoft Uighur"/>
+        <a:font script="Geor" typeface="Sylfaen"/>
+      </a:minorFont>
+    </a:fontScheme>
+    <a:fmtScheme name="Office">
+      <a:fillStyleLst>
+        <a:solidFill>
+          <a:schemeClr val="phClr"/>
+        </a:solidFill>
+        <a:gradFill rotWithShape="1">
+          <a:gsLst>
+            <a:gs pos="0">
+              <a:schemeClr val="phClr">
+                <a:tint val="50000"/>
+                <a:satMod val="300000"/>
+              </a:schemeClr>
+            </a:gs>
+            <a:gs pos="35000">
+              <a:schemeClr val="phClr">
+                <a:tint val="37000"/>
+                <a:satMod val="300000"/>
+              </a:schemeClr>
+            </a:gs>
+            <a:gs pos="100000">
+              <a:schemeClr val="phClr">
+                <a:tint val="15000"/>
+                <a:satMod val="350000"/>
+              </a:schemeClr>
+            </a:gs>
+          </a:gsLst>
+          <a:lin ang="16200000" scaled="1"/>
+        </a:gradFill>
+        <a:gradFill rotWithShape="1">
+          <a:gsLst>
+            <a:gs pos="0">
+              <a:schemeClr val="phClr">
+                <a:shade val="51000"/>
+                <a:satMod val="130000"/>
+              </a:schemeClr>
+            </a:gs>
+            <a:gs pos="80000">
+              <a:schemeClr val="phClr">
+                <a:shade val="93000"/>
+                <a:satMod val="130000"/>
+              </a:schemeClr>
+            </a:gs>
+            <a:gs pos="100000">
+              <a:schemeClr val="phClr">
+                <a:shade val="94000"/>
+                <a:satMod val="135000"/>
+              </a:schemeClr>
+            </a:gs>
+          </a:gsLst>
+          <a:lin ang="16200000" scaled="0"/>
+        </a:gradFill>
+      </a:fillStyleLst>
+      <a:lnStyleLst>
+        <a:ln w="9525" cap="flat" cmpd="sng" algn="ctr">
+          <a:solidFill>
+            <a:schemeClr val="phClr">
+              <a:shade val="95000"/>
+              <a:satMod val="105000"/>
+            </a:schemeClr>
+          </a:solidFill>
+          <a:prstDash val="solid"/>
+        </a:ln>
+        <a:ln w="25400" cap="flat" cmpd="sng" algn="ctr">
+          <a:solidFill>
+            <a:schemeClr val="phClr"/>
+          </a:solidFill>
+          <a:prstDash val="solid"/>
+        </a:ln>
+        <a:ln w="38100" cap="flat" cmpd="sng" algn="ctr">
+          <a:solidFill>
+            <a:schemeClr val="phClr"/>
+          </a:solidFill>
+          <a:prstDash val="solid"/>
+        </a:ln>
+      </a:lnStyleLst>
+      <a:effectStyleLst>
+        <a:effectStyle>
+          <a:effectLst>
+            <a:outerShdw blurRad="40000" dist="20000" dir="5400000" rotWithShape="0">
+              <a:srgbClr val="000000">
+                <a:alpha val="38000"/>
+              </a:srgbClr>
+            </a:outerShdw>
+          </a:effectLst>
+        </a:effectStyle>
+        <a:effectStyle>
+          <a:effectLst>
+            <a:outerShdw blurRad="40000" dist="23000" dir="5400000" rotWithShape="0">
+              <a:srgbClr val="000000">
+                <a:alpha val="35000"/>
+              </a:srgbClr>
+            </a:outerShdw>
+          </a:effectLst>
+        </a:effectStyle>
+        <a:effectStyle>
+          <a:effectLst>
+            <a:outerShdw blurRad="40000" dist="23000" dir="5400000" rotWithShape="0">
+              <a:srgbClr val="000000">
+                <a:alpha val="35000"/>
+              </a:srgbClr>
+            </a:outerShdw>
+          </a:effectLst>
+          <a:scene3d>
+            <a:camera prst="orthographicFront">
+              <a:rot lat="0" lon="0" rev="0"/>
+            </a:camera>
+            <a:lightRig rig="threePt" dir="t">
+              <a:rot lat="0" lon="0" rev="1200000"/>
+            </a:lightRig>
+          </a:scene3d>
+          <a:sp3d>
+            <a:bevelT w="63500" h="25400"/>
+          </a:sp3d>
+        </a:effectStyle>
+      </a:effectStyleLst>
+      <a:bgFillStyleLst>
+        <a:solidFill>
+          <a:schemeClr val="phClr"/>
+        </a:solidFill>
+        <a:gradFill rotWithShape="1">
+          <a:gsLst>
+            <a:gs pos="0">
+              <a:schemeClr val="phClr">
+                <a:tint val="40000"/>
+                <a:satMod val="350000"/>
+              </a:schemeClr>
+            </a:gs>
+            <a:gs pos="40000">
+              <a:schemeClr val="phClr">
+                <a:tint val="45000"/>
+                <a:shade val="99000"/>
+                <a:satMod val="350000"/>
+              </a:schemeClr>
+            </a:gs>
+            <a:gs pos="100000">
+              <a:schemeClr val="phClr">
+                <a:shade val="20000"/>
+                <a:satMod val="255000"/>
+              </a:schemeClr>
+            </a:gs>
+          </a:gsLst>
+          <a:path path="circle">
+            <a:fillToRect l="50000" t="-80000" r="50000" b="180000"/>
+          </a:path>
+        </a:gradFill>
+        <a:gradFill rotWithShape="1">
+          <a:gsLst>
+            <a:gs pos="0">
+              <a:schemeClr val="phClr">
+                <a:tint val="80000"/>
+                <a:satMod val="300000"/>
+              </a:schemeClr>
+            </a:gs>
+            <a:gs pos="100000">
+              <a:schemeClr val="phClr">
+                <a:shade val="30000"/>
+                <a:satMod val="200000"/>
+              </a:schemeClr>
+            </a:gs>
+          </a:gsLst>
+          <a:path path="circle">
+            <a:fillToRect l="50000" t="50000" r="50000" b="50000"/>
+          </a:path>
+        </a:gradFill>
+      </a:bgFillStyleLst>
+    </a:fmtScheme>
+  </a:themeElements>
+  <a:objectDefaults/>
+  <a:extraClrSchemeLst/>
+</a:theme>
+</file>
+
+<file path=ppt\viewProps.xml><?xml version="1.0" encoding="utf-8"?>
+<p:viewPr xmlns:a="http://schemas.openxmlformats.org/drawingml/2006/main" xmlns:r="http://schemas.openxmlformats.org/officeDocument/2006/relationships" xmlns:p="http://schemas.openxmlformats.org/presentationml/2006/main" lastView="sldThumbnailView">
+  <p:normalViewPr horzBarState="maximized">
+    <p:restoredLeft sz="15611"/>
+    <p:restoredTop sz="94610"/>
+  </p:normalViewPr>
+  <p:slideViewPr>
+    <p:cSldViewPr snapToGrid="0" snapToObjects="1">
+      <p:cViewPr varScale="1">
+        <p:scale>
+          <a:sx n="87" d="100"/>
+          <a:sy n="87" d="100"/>
+        </p:scale>
+        <p:origin x="-499" y="-82"/>
+      </p:cViewPr>
+      <p:guideLst>
+        <p:guide orient="horz" pos="2160"/>
+        <p:guide pos="3840"/>
+      </p:guideLst>
+    </p:cSldViewPr>
+  </p:slideViewPr>
+  <p:notesTextViewPr>
+    <p:cViewPr>
+      <p:scale>
+        <a:sx n="1" d="1"/>
+        <a:sy n="1" d="1"/>
+      </p:scale>
+      <p:origin x="0" y="0"/>
+    </p:cViewPr>
+  </p:notesTextViewPr>
+  <p:gridSpacing cx="76200" cy="76200"/>
+</p:viewPr>
 </file>